--- a/1_Class/Slides/INFO4610-Session1.pptx
+++ b/1_Class/Slides/INFO4610-Session1.pptx
@@ -472,1266 +472,6 @@
     </a:lvl9pPr>
   </p:notesStyle>
 </p:notesMaster>
-</file>
-
-<file path=ppt/notesSlides/notesSlide1.xml><?xml version="1.0" encoding="utf-8"?>
-<p:notes xmlns:a="http://schemas.openxmlformats.org/drawingml/2006/main" xmlns:p="http://schemas.openxmlformats.org/presentationml/2006/main" xmlns:r="http://schemas.openxmlformats.org/officeDocument/2006/relationships">
-  <p:cSld>
-    <p:spTree>
-      <p:nvGrpSpPr>
-        <p:cNvPr id="1" name=""/>
-        <p:cNvGrpSpPr/>
-        <p:nvPr/>
-      </p:nvGrpSpPr>
-      <p:grpSpPr>
-        <a:xfrm>
-          <a:off x="0" y="0"/>
-          <a:ext cx="0" cy="0"/>
-          <a:chOff x="0" y="0"/>
-          <a:chExt cx="0" cy="0"/>
-        </a:xfrm>
-      </p:grpSpPr>
-      <p:sp>
-        <p:nvSpPr>
-          <p:cNvPr id="2" name="Slide Image Placeholder 1"/>
-          <p:cNvSpPr>
-            <a:spLocks noGrp="1"/>
-          </p:cNvSpPr>
-          <p:nvPr>
-            <p:ph type="sldImg" idx="2"/>
-          </p:nvPr>
-        </p:nvSpPr>
-        <p:spPr/>
-      </p:sp>
-      <p:sp>
-        <p:nvSpPr>
-          <p:cNvPr id="3" name="Notes Placeholder 2"/>
-          <p:cNvSpPr>
-            <a:spLocks noGrp="1"/>
-          </p:cNvSpPr>
-          <p:nvPr>
-            <p:ph type="body" idx="3" sz="quarter"/>
-          </p:nvPr>
-        </p:nvSpPr>
-        <p:spPr/>
-        <p:txBody>
-          <a:bodyPr/>
-          <a:lstStyle/>
-          <a:p>
-            <a:r>
-              <a:t>Welcome. Tonight we do NOT build anything, and that is deliberate. Tonight is about making sure that what you build next week is worth building.</a:t>
-            </a:r>
-          </a:p>
-        </p:txBody>
-      </p:sp>
-      <p:sp>
-        <p:nvSpPr>
-          <p:cNvPr id="4" name="Slide Number Placeholder 3"/>
-          <p:cNvSpPr>
-            <a:spLocks noGrp="1"/>
-          </p:cNvSpPr>
-          <p:nvPr>
-            <p:ph type="sldNum" idx="5" sz="quarter"/>
-          </p:nvPr>
-        </p:nvSpPr>
-        <p:spPr/>
-      </p:sp>
-    </p:spTree>
-  </p:cSld>
-  <p:clrMapOvr>
-    <a:masterClrMapping/>
-  </p:clrMapOvr>
-</p:notes>
-</file>
-
-<file path=ppt/notesSlides/notesSlide10.xml><?xml version="1.0" encoding="utf-8"?>
-<p:notes xmlns:a="http://schemas.openxmlformats.org/drawingml/2006/main" xmlns:p="http://schemas.openxmlformats.org/presentationml/2006/main" xmlns:r="http://schemas.openxmlformats.org/officeDocument/2006/relationships">
-  <p:cSld>
-    <p:spTree>
-      <p:nvGrpSpPr>
-        <p:cNvPr id="1" name=""/>
-        <p:cNvGrpSpPr/>
-        <p:nvPr/>
-      </p:nvGrpSpPr>
-      <p:grpSpPr>
-        <a:xfrm>
-          <a:off x="0" y="0"/>
-          <a:ext cx="0" cy="0"/>
-          <a:chOff x="0" y="0"/>
-          <a:chExt cx="0" cy="0"/>
-        </a:xfrm>
-      </p:grpSpPr>
-      <p:sp>
-        <p:nvSpPr>
-          <p:cNvPr id="2" name="Slide Image Placeholder 1"/>
-          <p:cNvSpPr>
-            <a:spLocks noGrp="1"/>
-          </p:cNvSpPr>
-          <p:nvPr>
-            <p:ph type="sldImg" idx="2"/>
-          </p:nvPr>
-        </p:nvSpPr>
-        <p:spPr/>
-      </p:sp>
-      <p:sp>
-        <p:nvSpPr>
-          <p:cNvPr id="3" name="Notes Placeholder 2"/>
-          <p:cNvSpPr>
-            <a:spLocks noGrp="1"/>
-          </p:cNvSpPr>
-          <p:nvPr>
-            <p:ph type="body" idx="3" sz="quarter"/>
-          </p:nvPr>
-        </p:nvSpPr>
-        <p:spPr/>
-        <p:txBody>
-          <a:bodyPr/>
-          <a:lstStyle/>
-          <a:p>
-            <a:r>
-              <a:t>Number 4 is in crimson because it is the one people cannot answer. Spend real time there.</a:t>
-            </a:r>
-          </a:p>
-        </p:txBody>
-      </p:sp>
-      <p:sp>
-        <p:nvSpPr>
-          <p:cNvPr id="4" name="Slide Number Placeholder 3"/>
-          <p:cNvSpPr>
-            <a:spLocks noGrp="1"/>
-          </p:cNvSpPr>
-          <p:nvPr>
-            <p:ph type="sldNum" idx="5" sz="quarter"/>
-          </p:nvPr>
-        </p:nvSpPr>
-        <p:spPr/>
-      </p:sp>
-    </p:spTree>
-  </p:cSld>
-  <p:clrMapOvr>
-    <a:masterClrMapping/>
-  </p:clrMapOvr>
-</p:notes>
-</file>
-
-<file path=ppt/notesSlides/notesSlide11.xml><?xml version="1.0" encoding="utf-8"?>
-<p:notes xmlns:a="http://schemas.openxmlformats.org/drawingml/2006/main" xmlns:p="http://schemas.openxmlformats.org/presentationml/2006/main" xmlns:r="http://schemas.openxmlformats.org/officeDocument/2006/relationships">
-  <p:cSld>
-    <p:spTree>
-      <p:nvGrpSpPr>
-        <p:cNvPr id="1" name=""/>
-        <p:cNvGrpSpPr/>
-        <p:nvPr/>
-      </p:nvGrpSpPr>
-      <p:grpSpPr>
-        <a:xfrm>
-          <a:off x="0" y="0"/>
-          <a:ext cx="0" cy="0"/>
-          <a:chOff x="0" y="0"/>
-          <a:chExt cx="0" cy="0"/>
-        </a:xfrm>
-      </p:grpSpPr>
-      <p:sp>
-        <p:nvSpPr>
-          <p:cNvPr id="2" name="Slide Image Placeholder 1"/>
-          <p:cNvSpPr>
-            <a:spLocks noGrp="1"/>
-          </p:cNvSpPr>
-          <p:nvPr>
-            <p:ph type="sldImg" idx="2"/>
-          </p:nvPr>
-        </p:nvSpPr>
-        <p:spPr/>
-      </p:sp>
-      <p:sp>
-        <p:nvSpPr>
-          <p:cNvPr id="3" name="Notes Placeholder 2"/>
-          <p:cNvSpPr>
-            <a:spLocks noGrp="1"/>
-          </p:cNvSpPr>
-          <p:nvPr>
-            <p:ph type="body" idx="3" sz="quarter"/>
-          </p:nvPr>
-        </p:nvSpPr>
-        <p:spPr/>
-        <p:txBody>
-          <a:bodyPr/>
-          <a:lstStyle/>
-          <a:p>
-            <a:r>
-              <a:t>This lands hard with a working cohort. Several will recognize a project of their own. Let them say so.</a:t>
-            </a:r>
-          </a:p>
-        </p:txBody>
-      </p:sp>
-      <p:sp>
-        <p:nvSpPr>
-          <p:cNvPr id="4" name="Slide Number Placeholder 3"/>
-          <p:cNvSpPr>
-            <a:spLocks noGrp="1"/>
-          </p:cNvSpPr>
-          <p:nvPr>
-            <p:ph type="sldNum" idx="5" sz="quarter"/>
-          </p:nvPr>
-        </p:nvSpPr>
-        <p:spPr/>
-      </p:sp>
-    </p:spTree>
-  </p:cSld>
-  <p:clrMapOvr>
-    <a:masterClrMapping/>
-  </p:clrMapOvr>
-</p:notes>
-</file>
-
-<file path=ppt/notesSlides/notesSlide12.xml><?xml version="1.0" encoding="utf-8"?>
-<p:notes xmlns:a="http://schemas.openxmlformats.org/drawingml/2006/main" xmlns:p="http://schemas.openxmlformats.org/presentationml/2006/main" xmlns:r="http://schemas.openxmlformats.org/officeDocument/2006/relationships">
-  <p:cSld>
-    <p:spTree>
-      <p:nvGrpSpPr>
-        <p:cNvPr id="1" name=""/>
-        <p:cNvGrpSpPr/>
-        <p:nvPr/>
-      </p:nvGrpSpPr>
-      <p:grpSpPr>
-        <a:xfrm>
-          <a:off x="0" y="0"/>
-          <a:ext cx="0" cy="0"/>
-          <a:chOff x="0" y="0"/>
-          <a:chExt cx="0" cy="0"/>
-        </a:xfrm>
-      </p:grpSpPr>
-      <p:sp>
-        <p:nvSpPr>
-          <p:cNvPr id="2" name="Slide Image Placeholder 1"/>
-          <p:cNvSpPr>
-            <a:spLocks noGrp="1"/>
-          </p:cNvSpPr>
-          <p:nvPr>
-            <p:ph type="sldImg" idx="2"/>
-          </p:nvPr>
-        </p:nvSpPr>
-        <p:spPr/>
-      </p:sp>
-      <p:sp>
-        <p:nvSpPr>
-          <p:cNvPr id="3" name="Notes Placeholder 2"/>
-          <p:cNvSpPr>
-            <a:spLocks noGrp="1"/>
-          </p:cNvSpPr>
-          <p:nvPr>
-            <p:ph type="body" idx="3" sz="quarter"/>
-          </p:nvPr>
-        </p:nvSpPr>
-        <p:spPr/>
-        <p:txBody>
-          <a:bodyPr/>
-          <a:lstStyle/>
-          <a:p>
-            <a:r>
-              <a:t>Circulate. The most common stall is a topic rather than a decision - listen for a missing verb.</a:t>
-            </a:r>
-          </a:p>
-        </p:txBody>
-      </p:sp>
-      <p:sp>
-        <p:nvSpPr>
-          <p:cNvPr id="4" name="Slide Number Placeholder 3"/>
-          <p:cNvSpPr>
-            <a:spLocks noGrp="1"/>
-          </p:cNvSpPr>
-          <p:nvPr>
-            <p:ph type="sldNum" idx="5" sz="quarter"/>
-          </p:nvPr>
-        </p:nvSpPr>
-        <p:spPr/>
-      </p:sp>
-    </p:spTree>
-  </p:cSld>
-  <p:clrMapOvr>
-    <a:masterClrMapping/>
-  </p:clrMapOvr>
-</p:notes>
-</file>
-
-<file path=ppt/notesSlides/notesSlide13.xml><?xml version="1.0" encoding="utf-8"?>
-<p:notes xmlns:a="http://schemas.openxmlformats.org/drawingml/2006/main" xmlns:p="http://schemas.openxmlformats.org/presentationml/2006/main" xmlns:r="http://schemas.openxmlformats.org/officeDocument/2006/relationships">
-  <p:cSld>
-    <p:spTree>
-      <p:nvGrpSpPr>
-        <p:cNvPr id="1" name=""/>
-        <p:cNvGrpSpPr/>
-        <p:nvPr/>
-      </p:nvGrpSpPr>
-      <p:grpSpPr>
-        <a:xfrm>
-          <a:off x="0" y="0"/>
-          <a:ext cx="0" cy="0"/>
-          <a:chOff x="0" y="0"/>
-          <a:chExt cx="0" cy="0"/>
-        </a:xfrm>
-      </p:grpSpPr>
-      <p:sp>
-        <p:nvSpPr>
-          <p:cNvPr id="2" name="Slide Image Placeholder 1"/>
-          <p:cNvSpPr>
-            <a:spLocks noGrp="1"/>
-          </p:cNvSpPr>
-          <p:nvPr>
-            <p:ph type="sldImg" idx="2"/>
-          </p:nvPr>
-        </p:nvSpPr>
-        <p:spPr/>
-      </p:sp>
-      <p:sp>
-        <p:nvSpPr>
-          <p:cNvPr id="3" name="Notes Placeholder 2"/>
-          <p:cNvSpPr>
-            <a:spLocks noGrp="1"/>
-          </p:cNvSpPr>
-          <p:nvPr>
-            <p:ph type="body" idx="3" sz="quarter"/>
-          </p:nvPr>
-        </p:nvSpPr>
-        <p:spPr/>
-        <p:txBody>
-          <a:bodyPr/>
-          <a:lstStyle/>
-          <a:p>
-            <a:r>
-              <a:t>Good moment for a five-minute stretch before the audit block.</a:t>
-            </a:r>
-          </a:p>
-        </p:txBody>
-      </p:sp>
-      <p:sp>
-        <p:nvSpPr>
-          <p:cNvPr id="4" name="Slide Number Placeholder 3"/>
-          <p:cNvSpPr>
-            <a:spLocks noGrp="1"/>
-          </p:cNvSpPr>
-          <p:nvPr>
-            <p:ph type="sldNum" idx="5" sz="quarter"/>
-          </p:nvPr>
-        </p:nvSpPr>
-        <p:spPr/>
-      </p:sp>
-    </p:spTree>
-  </p:cSld>
-  <p:clrMapOvr>
-    <a:masterClrMapping/>
-  </p:clrMapOvr>
-</p:notes>
-</file>
-
-<file path=ppt/notesSlides/notesSlide14.xml><?xml version="1.0" encoding="utf-8"?>
-<p:notes xmlns:a="http://schemas.openxmlformats.org/drawingml/2006/main" xmlns:p="http://schemas.openxmlformats.org/presentationml/2006/main" xmlns:r="http://schemas.openxmlformats.org/officeDocument/2006/relationships">
-  <p:cSld>
-    <p:spTree>
-      <p:nvGrpSpPr>
-        <p:cNvPr id="1" name=""/>
-        <p:cNvGrpSpPr/>
-        <p:nvPr/>
-      </p:nvGrpSpPr>
-      <p:grpSpPr>
-        <a:xfrm>
-          <a:off x="0" y="0"/>
-          <a:ext cx="0" cy="0"/>
-          <a:chOff x="0" y="0"/>
-          <a:chExt cx="0" cy="0"/>
-        </a:xfrm>
-      </p:grpSpPr>
-      <p:sp>
-        <p:nvSpPr>
-          <p:cNvPr id="2" name="Slide Image Placeholder 1"/>
-          <p:cNvSpPr>
-            <a:spLocks noGrp="1"/>
-          </p:cNvSpPr>
-          <p:nvPr>
-            <p:ph type="sldImg" idx="2"/>
-          </p:nvPr>
-        </p:nvSpPr>
-        <p:spPr/>
-      </p:sp>
-      <p:sp>
-        <p:nvSpPr>
-          <p:cNvPr id="3" name="Notes Placeholder 2"/>
-          <p:cNvSpPr>
-            <a:spLocks noGrp="1"/>
-          </p:cNvSpPr>
-          <p:nvPr>
-            <p:ph type="body" idx="3" sz="quarter"/>
-          </p:nvPr>
-        </p:nvSpPr>
-        <p:spPr/>
-        <p:txBody>
-          <a:bodyPr/>
-          <a:lstStyle/>
-          <a:p>
-            <a:r>
-              <a:t>Rule two is the one that makes them a professional rather than a button-pusher.</a:t>
-            </a:r>
-          </a:p>
-        </p:txBody>
-      </p:sp>
-      <p:sp>
-        <p:nvSpPr>
-          <p:cNvPr id="4" name="Slide Number Placeholder 3"/>
-          <p:cNvSpPr>
-            <a:spLocks noGrp="1"/>
-          </p:cNvSpPr>
-          <p:nvPr>
-            <p:ph type="sldNum" idx="5" sz="quarter"/>
-          </p:nvPr>
-        </p:nvSpPr>
-        <p:spPr/>
-      </p:sp>
-    </p:spTree>
-  </p:cSld>
-  <p:clrMapOvr>
-    <a:masterClrMapping/>
-  </p:clrMapOvr>
-</p:notes>
-</file>
-
-<file path=ppt/notesSlides/notesSlide15.xml><?xml version="1.0" encoding="utf-8"?>
-<p:notes xmlns:a="http://schemas.openxmlformats.org/drawingml/2006/main" xmlns:p="http://schemas.openxmlformats.org/presentationml/2006/main" xmlns:r="http://schemas.openxmlformats.org/officeDocument/2006/relationships">
-  <p:cSld>
-    <p:spTree>
-      <p:nvGrpSpPr>
-        <p:cNvPr id="1" name=""/>
-        <p:cNvGrpSpPr/>
-        <p:nvPr/>
-      </p:nvGrpSpPr>
-      <p:grpSpPr>
-        <a:xfrm>
-          <a:off x="0" y="0"/>
-          <a:ext cx="0" cy="0"/>
-          <a:chOff x="0" y="0"/>
-          <a:chExt cx="0" cy="0"/>
-        </a:xfrm>
-      </p:grpSpPr>
-      <p:sp>
-        <p:nvSpPr>
-          <p:cNvPr id="2" name="Slide Image Placeholder 1"/>
-          <p:cNvSpPr>
-            <a:spLocks noGrp="1"/>
-          </p:cNvSpPr>
-          <p:nvPr>
-            <p:ph type="sldImg" idx="2"/>
-          </p:nvPr>
-        </p:nvSpPr>
-        <p:spPr/>
-      </p:sp>
-      <p:sp>
-        <p:nvSpPr>
-          <p:cNvPr id="3" name="Notes Placeholder 2"/>
-          <p:cNvSpPr>
-            <a:spLocks noGrp="1"/>
-          </p:cNvSpPr>
-          <p:nvPr>
-            <p:ph type="body" idx="3" sz="quarter"/>
-          </p:nvPr>
-        </p:nvSpPr>
-        <p:spPr/>
-        <p:txBody>
-          <a:bodyPr/>
-          <a:lstStyle/>
-          <a:p>
-            <a:r>
-              <a:t>Definition drift: a migration, a new definition, a reorg that moved accounts between segments. Almost every organization has one and almost nobody wrote it down.</a:t>
-            </a:r>
-          </a:p>
-        </p:txBody>
-      </p:sp>
-      <p:sp>
-        <p:nvSpPr>
-          <p:cNvPr id="4" name="Slide Number Placeholder 3"/>
-          <p:cNvSpPr>
-            <a:spLocks noGrp="1"/>
-          </p:cNvSpPr>
-          <p:nvPr>
-            <p:ph type="sldNum" idx="5" sz="quarter"/>
-          </p:nvPr>
-        </p:nvSpPr>
-        <p:spPr/>
-      </p:sp>
-    </p:spTree>
-  </p:cSld>
-  <p:clrMapOvr>
-    <a:masterClrMapping/>
-  </p:clrMapOvr>
-</p:notes>
-</file>
-
-<file path=ppt/notesSlides/notesSlide16.xml><?xml version="1.0" encoding="utf-8"?>
-<p:notes xmlns:a="http://schemas.openxmlformats.org/drawingml/2006/main" xmlns:p="http://schemas.openxmlformats.org/presentationml/2006/main" xmlns:r="http://schemas.openxmlformats.org/officeDocument/2006/relationships">
-  <p:cSld>
-    <p:spTree>
-      <p:nvGrpSpPr>
-        <p:cNvPr id="1" name=""/>
-        <p:cNvGrpSpPr/>
-        <p:nvPr/>
-      </p:nvGrpSpPr>
-      <p:grpSpPr>
-        <a:xfrm>
-          <a:off x="0" y="0"/>
-          <a:ext cx="0" cy="0"/>
-          <a:chOff x="0" y="0"/>
-          <a:chExt cx="0" cy="0"/>
-        </a:xfrm>
-      </p:grpSpPr>
-      <p:sp>
-        <p:nvSpPr>
-          <p:cNvPr id="2" name="Slide Image Placeholder 1"/>
-          <p:cNvSpPr>
-            <a:spLocks noGrp="1"/>
-          </p:cNvSpPr>
-          <p:nvPr>
-            <p:ph type="sldImg" idx="2"/>
-          </p:nvPr>
-        </p:nvSpPr>
-        <p:spPr/>
-      </p:sp>
-      <p:sp>
-        <p:nvSpPr>
-          <p:cNvPr id="3" name="Notes Placeholder 2"/>
-          <p:cNvSpPr>
-            <a:spLocks noGrp="1"/>
-          </p:cNvSpPr>
-          <p:nvPr>
-            <p:ph type="body" idx="3" sz="quarter"/>
-          </p:nvPr>
-        </p:nvSpPr>
-        <p:spPr/>
-        <p:txBody>
-          <a:bodyPr/>
-          <a:lstStyle/>
-          <a:p>
-            <a:r>
-              <a:t>Let them find these rather than telling them first. The moment someone hits the leakage column is the best teaching moment of the night.</a:t>
-            </a:r>
-          </a:p>
-        </p:txBody>
-      </p:sp>
-      <p:sp>
-        <p:nvSpPr>
-          <p:cNvPr id="4" name="Slide Number Placeholder 3"/>
-          <p:cNvSpPr>
-            <a:spLocks noGrp="1"/>
-          </p:cNvSpPr>
-          <p:nvPr>
-            <p:ph type="sldNum" idx="5" sz="quarter"/>
-          </p:nvPr>
-        </p:nvSpPr>
-        <p:spPr/>
-      </p:sp>
-    </p:spTree>
-  </p:cSld>
-  <p:clrMapOvr>
-    <a:masterClrMapping/>
-  </p:clrMapOvr>
-</p:notes>
-</file>
-
-<file path=ppt/notesSlides/notesSlide17.xml><?xml version="1.0" encoding="utf-8"?>
-<p:notes xmlns:a="http://schemas.openxmlformats.org/drawingml/2006/main" xmlns:p="http://schemas.openxmlformats.org/presentationml/2006/main" xmlns:r="http://schemas.openxmlformats.org/officeDocument/2006/relationships">
-  <p:cSld>
-    <p:spTree>
-      <p:nvGrpSpPr>
-        <p:cNvPr id="1" name=""/>
-        <p:cNvGrpSpPr/>
-        <p:nvPr/>
-      </p:nvGrpSpPr>
-      <p:grpSpPr>
-        <a:xfrm>
-          <a:off x="0" y="0"/>
-          <a:ext cx="0" cy="0"/>
-          <a:chOff x="0" y="0"/>
-          <a:chExt cx="0" cy="0"/>
-        </a:xfrm>
-      </p:grpSpPr>
-      <p:sp>
-        <p:nvSpPr>
-          <p:cNvPr id="2" name="Slide Image Placeholder 1"/>
-          <p:cNvSpPr>
-            <a:spLocks noGrp="1"/>
-          </p:cNvSpPr>
-          <p:nvPr>
-            <p:ph type="sldImg" idx="2"/>
-          </p:nvPr>
-        </p:nvSpPr>
-        <p:spPr/>
-      </p:sp>
-      <p:sp>
-        <p:nvSpPr>
-          <p:cNvPr id="3" name="Notes Placeholder 2"/>
-          <p:cNvSpPr>
-            <a:spLocks noGrp="1"/>
-          </p:cNvSpPr>
-          <p:nvPr>
-            <p:ph type="body" idx="3" sz="quarter"/>
-          </p:nvPr>
-        </p:nvSpPr>
-        <p:spPr/>
-        <p:txBody>
-          <a:bodyPr/>
-          <a:lstStyle/>
-          <a:p>
-            <a:r>
-              <a:t>Twelve minutes before the end, stop everyone and ask three people for their CANNOT line. That is the debrief.</a:t>
-            </a:r>
-          </a:p>
-        </p:txBody>
-      </p:sp>
-      <p:sp>
-        <p:nvSpPr>
-          <p:cNvPr id="4" name="Slide Number Placeholder 3"/>
-          <p:cNvSpPr>
-            <a:spLocks noGrp="1"/>
-          </p:cNvSpPr>
-          <p:nvPr>
-            <p:ph type="sldNum" idx="5" sz="quarter"/>
-          </p:nvPr>
-        </p:nvSpPr>
-        <p:spPr/>
-      </p:sp>
-    </p:spTree>
-  </p:cSld>
-  <p:clrMapOvr>
-    <a:masterClrMapping/>
-  </p:clrMapOvr>
-</p:notes>
-</file>
-
-<file path=ppt/notesSlides/notesSlide18.xml><?xml version="1.0" encoding="utf-8"?>
-<p:notes xmlns:a="http://schemas.openxmlformats.org/drawingml/2006/main" xmlns:p="http://schemas.openxmlformats.org/presentationml/2006/main" xmlns:r="http://schemas.openxmlformats.org/officeDocument/2006/relationships">
-  <p:cSld>
-    <p:spTree>
-      <p:nvGrpSpPr>
-        <p:cNvPr id="1" name=""/>
-        <p:cNvGrpSpPr/>
-        <p:nvPr/>
-      </p:nvGrpSpPr>
-      <p:grpSpPr>
-        <a:xfrm>
-          <a:off x="0" y="0"/>
-          <a:ext cx="0" cy="0"/>
-          <a:chOff x="0" y="0"/>
-          <a:chExt cx="0" cy="0"/>
-        </a:xfrm>
-      </p:grpSpPr>
-      <p:sp>
-        <p:nvSpPr>
-          <p:cNvPr id="2" name="Slide Image Placeholder 1"/>
-          <p:cNvSpPr>
-            <a:spLocks noGrp="1"/>
-          </p:cNvSpPr>
-          <p:nvPr>
-            <p:ph type="sldImg" idx="2"/>
-          </p:nvPr>
-        </p:nvSpPr>
-        <p:spPr/>
-      </p:sp>
-      <p:sp>
-        <p:nvSpPr>
-          <p:cNvPr id="3" name="Notes Placeholder 2"/>
-          <p:cNvSpPr>
-            <a:spLocks noGrp="1"/>
-          </p:cNvSpPr>
-          <p:nvPr>
-            <p:ph type="body" idx="3" sz="quarter"/>
-          </p:nvPr>
-        </p:nvSpPr>
-        <p:spPr/>
-        <p:txBody>
-          <a:bodyPr/>
-          <a:lstStyle/>
-          <a:p>
-            <a:r>
-              <a:t>Remind them the student guide has the glossary and troubleshooting list. Send the link again after class.</a:t>
-            </a:r>
-          </a:p>
-        </p:txBody>
-      </p:sp>
-      <p:sp>
-        <p:nvSpPr>
-          <p:cNvPr id="4" name="Slide Number Placeholder 3"/>
-          <p:cNvSpPr>
-            <a:spLocks noGrp="1"/>
-          </p:cNvSpPr>
-          <p:nvPr>
-            <p:ph type="sldNum" idx="5" sz="quarter"/>
-          </p:nvPr>
-        </p:nvSpPr>
-        <p:spPr/>
-      </p:sp>
-    </p:spTree>
-  </p:cSld>
-  <p:clrMapOvr>
-    <a:masterClrMapping/>
-  </p:clrMapOvr>
-</p:notes>
-</file>
-
-<file path=ppt/notesSlides/notesSlide2.xml><?xml version="1.0" encoding="utf-8"?>
-<p:notes xmlns:a="http://schemas.openxmlformats.org/drawingml/2006/main" xmlns:p="http://schemas.openxmlformats.org/presentationml/2006/main" xmlns:r="http://schemas.openxmlformats.org/officeDocument/2006/relationships">
-  <p:cSld>
-    <p:spTree>
-      <p:nvGrpSpPr>
-        <p:cNvPr id="1" name=""/>
-        <p:cNvGrpSpPr/>
-        <p:nvPr/>
-      </p:nvGrpSpPr>
-      <p:grpSpPr>
-        <a:xfrm>
-          <a:off x="0" y="0"/>
-          <a:ext cx="0" cy="0"/>
-          <a:chOff x="0" y="0"/>
-          <a:chExt cx="0" cy="0"/>
-        </a:xfrm>
-      </p:grpSpPr>
-      <p:sp>
-        <p:nvSpPr>
-          <p:cNvPr id="2" name="Slide Image Placeholder 1"/>
-          <p:cNvSpPr>
-            <a:spLocks noGrp="1"/>
-          </p:cNvSpPr>
-          <p:nvPr>
-            <p:ph type="sldImg" idx="2"/>
-          </p:nvPr>
-        </p:nvSpPr>
-        <p:spPr/>
-      </p:sp>
-      <p:sp>
-        <p:nvSpPr>
-          <p:cNvPr id="3" name="Notes Placeholder 2"/>
-          <p:cNvSpPr>
-            <a:spLocks noGrp="1"/>
-          </p:cNvSpPr>
-          <p:nvPr>
-            <p:ph type="body" idx="3" sz="quarter"/>
-          </p:nvPr>
-        </p:nvSpPr>
-        <p:spPr/>
-        <p:txBody>
-          <a:bodyPr/>
-          <a:lstStyle/>
-          <a:p>
-            <a:r>
-              <a:t>Note the shape: two thirds of tonight is spent before anyone analyzes anything. That ratio is the lesson.</a:t>
-            </a:r>
-          </a:p>
-        </p:txBody>
-      </p:sp>
-      <p:sp>
-        <p:nvSpPr>
-          <p:cNvPr id="4" name="Slide Number Placeholder 3"/>
-          <p:cNvSpPr>
-            <a:spLocks noGrp="1"/>
-          </p:cNvSpPr>
-          <p:nvPr>
-            <p:ph type="sldNum" idx="5" sz="quarter"/>
-          </p:nvPr>
-        </p:nvSpPr>
-        <p:spPr/>
-      </p:sp>
-    </p:spTree>
-  </p:cSld>
-  <p:clrMapOvr>
-    <a:masterClrMapping/>
-  </p:clrMapOvr>
-</p:notes>
-</file>
-
-<file path=ppt/notesSlides/notesSlide3.xml><?xml version="1.0" encoding="utf-8"?>
-<p:notes xmlns:a="http://schemas.openxmlformats.org/drawingml/2006/main" xmlns:p="http://schemas.openxmlformats.org/presentationml/2006/main" xmlns:r="http://schemas.openxmlformats.org/officeDocument/2006/relationships">
-  <p:cSld>
-    <p:spTree>
-      <p:nvGrpSpPr>
-        <p:cNvPr id="1" name=""/>
-        <p:cNvGrpSpPr/>
-        <p:nvPr/>
-      </p:nvGrpSpPr>
-      <p:grpSpPr>
-        <a:xfrm>
-          <a:off x="0" y="0"/>
-          <a:ext cx="0" cy="0"/>
-          <a:chOff x="0" y="0"/>
-          <a:chExt cx="0" cy="0"/>
-        </a:xfrm>
-      </p:grpSpPr>
-      <p:sp>
-        <p:nvSpPr>
-          <p:cNvPr id="2" name="Slide Image Placeholder 1"/>
-          <p:cNvSpPr>
-            <a:spLocks noGrp="1"/>
-          </p:cNvSpPr>
-          <p:nvPr>
-            <p:ph type="sldImg" idx="2"/>
-          </p:nvPr>
-        </p:nvSpPr>
-        <p:spPr/>
-      </p:sp>
-      <p:sp>
-        <p:nvSpPr>
-          <p:cNvPr id="3" name="Notes Placeholder 2"/>
-          <p:cNvSpPr>
-            <a:spLocks noGrp="1"/>
-          </p:cNvSpPr>
-          <p:nvPr>
-            <p:ph type="body" idx="3" sz="quarter"/>
-          </p:nvPr>
-        </p:nvSpPr>
-        <p:spPr/>
-        <p:txBody>
-          <a:bodyPr/>
-          <a:lstStyle/>
-          <a:p>
-            <a:r>
-              <a:t>Say the last line out loud. Half the room is quietly worried about the data question and has not asked it.</a:t>
-            </a:r>
-          </a:p>
-        </p:txBody>
-      </p:sp>
-      <p:sp>
-        <p:nvSpPr>
-          <p:cNvPr id="4" name="Slide Number Placeholder 3"/>
-          <p:cNvSpPr>
-            <a:spLocks noGrp="1"/>
-          </p:cNvSpPr>
-          <p:nvPr>
-            <p:ph type="sldNum" idx="5" sz="quarter"/>
-          </p:nvPr>
-        </p:nvSpPr>
-        <p:spPr/>
-      </p:sp>
-    </p:spTree>
-  </p:cSld>
-  <p:clrMapOvr>
-    <a:masterClrMapping/>
-  </p:clrMapOvr>
-</p:notes>
-</file>
-
-<file path=ppt/notesSlides/notesSlide4.xml><?xml version="1.0" encoding="utf-8"?>
-<p:notes xmlns:a="http://schemas.openxmlformats.org/drawingml/2006/main" xmlns:p="http://schemas.openxmlformats.org/presentationml/2006/main" xmlns:r="http://schemas.openxmlformats.org/officeDocument/2006/relationships">
-  <p:cSld>
-    <p:spTree>
-      <p:nvGrpSpPr>
-        <p:cNvPr id="1" name=""/>
-        <p:cNvGrpSpPr/>
-        <p:nvPr/>
-      </p:nvGrpSpPr>
-      <p:grpSpPr>
-        <a:xfrm>
-          <a:off x="0" y="0"/>
-          <a:ext cx="0" cy="0"/>
-          <a:chOff x="0" y="0"/>
-          <a:chExt cx="0" cy="0"/>
-        </a:xfrm>
-      </p:grpSpPr>
-      <p:sp>
-        <p:nvSpPr>
-          <p:cNvPr id="2" name="Slide Image Placeholder 1"/>
-          <p:cNvSpPr>
-            <a:spLocks noGrp="1"/>
-          </p:cNvSpPr>
-          <p:nvPr>
-            <p:ph type="sldImg" idx="2"/>
-          </p:nvPr>
-        </p:nvSpPr>
-        <p:spPr/>
-      </p:sp>
-      <p:sp>
-        <p:nvSpPr>
-          <p:cNvPr id="3" name="Notes Placeholder 2"/>
-          <p:cNvSpPr>
-            <a:spLocks noGrp="1"/>
-          </p:cNvSpPr>
-          <p:nvPr>
-            <p:ph type="body" idx="3" sz="quarter"/>
-          </p:nvPr>
-        </p:nvSpPr>
-        <p:spPr/>
-        <p:txBody>
-          <a:bodyPr/>
-          <a:lstStyle/>
-          <a:p>
-            <a:r>
-              <a:t>This slide is the reframe. They are not learning new statistics tonight - they are learning to aim it. Confidence intervals from Module 03 show up in every single use case, which is why that row is highlighted.</a:t>
-            </a:r>
-          </a:p>
-        </p:txBody>
-      </p:sp>
-      <p:sp>
-        <p:nvSpPr>
-          <p:cNvPr id="4" name="Slide Number Placeholder 3"/>
-          <p:cNvSpPr>
-            <a:spLocks noGrp="1"/>
-          </p:cNvSpPr>
-          <p:nvPr>
-            <p:ph type="sldNum" idx="5" sz="quarter"/>
-          </p:nvPr>
-        </p:nvSpPr>
-        <p:spPr/>
-      </p:sp>
-    </p:spTree>
-  </p:cSld>
-  <p:clrMapOvr>
-    <a:masterClrMapping/>
-  </p:clrMapOvr>
-</p:notes>
-</file>
-
-<file path=ppt/notesSlides/notesSlide5.xml><?xml version="1.0" encoding="utf-8"?>
-<p:notes xmlns:a="http://schemas.openxmlformats.org/drawingml/2006/main" xmlns:p="http://schemas.openxmlformats.org/presentationml/2006/main" xmlns:r="http://schemas.openxmlformats.org/officeDocument/2006/relationships">
-  <p:cSld>
-    <p:spTree>
-      <p:nvGrpSpPr>
-        <p:cNvPr id="1" name=""/>
-        <p:cNvGrpSpPr/>
-        <p:nvPr/>
-      </p:nvGrpSpPr>
-      <p:grpSpPr>
-        <a:xfrm>
-          <a:off x="0" y="0"/>
-          <a:ext cx="0" cy="0"/>
-          <a:chOff x="0" y="0"/>
-          <a:chExt cx="0" cy="0"/>
-        </a:xfrm>
-      </p:grpSpPr>
-      <p:sp>
-        <p:nvSpPr>
-          <p:cNvPr id="2" name="Slide Image Placeholder 1"/>
-          <p:cNvSpPr>
-            <a:spLocks noGrp="1"/>
-          </p:cNvSpPr>
-          <p:nvPr>
-            <p:ph type="sldImg" idx="2"/>
-          </p:nvPr>
-        </p:nvSpPr>
-        <p:spPr/>
-      </p:sp>
-      <p:sp>
-        <p:nvSpPr>
-          <p:cNvPr id="3" name="Notes Placeholder 2"/>
-          <p:cNvSpPr>
-            <a:spLocks noGrp="1"/>
-          </p:cNvSpPr>
-          <p:nvPr>
-            <p:ph type="body" idx="3" sz="quarter"/>
-          </p:nvPr>
-        </p:nvSpPr>
-        <p:spPr/>
-        <p:txBody>
-          <a:bodyPr/>
-          <a:lstStyle/>
-          <a:p>
-            <a:r>
-              <a:t>Do not rush this slide. For a working cohort this is the single most important ground rule, and saying it plainly buys their trust for the rest of the evening.</a:t>
-            </a:r>
-          </a:p>
-        </p:txBody>
-      </p:sp>
-      <p:sp>
-        <p:nvSpPr>
-          <p:cNvPr id="4" name="Slide Number Placeholder 3"/>
-          <p:cNvSpPr>
-            <a:spLocks noGrp="1"/>
-          </p:cNvSpPr>
-          <p:nvPr>
-            <p:ph type="sldNum" idx="5" sz="quarter"/>
-          </p:nvPr>
-        </p:nvSpPr>
-        <p:spPr/>
-      </p:sp>
-    </p:spTree>
-  </p:cSld>
-  <p:clrMapOvr>
-    <a:masterClrMapping/>
-  </p:clrMapOvr>
-</p:notes>
-</file>
-
-<file path=ppt/notesSlides/notesSlide6.xml><?xml version="1.0" encoding="utf-8"?>
-<p:notes xmlns:a="http://schemas.openxmlformats.org/drawingml/2006/main" xmlns:p="http://schemas.openxmlformats.org/presentationml/2006/main" xmlns:r="http://schemas.openxmlformats.org/officeDocument/2006/relationships">
-  <p:cSld>
-    <p:spTree>
-      <p:nvGrpSpPr>
-        <p:cNvPr id="1" name=""/>
-        <p:cNvGrpSpPr/>
-        <p:nvPr/>
-      </p:nvGrpSpPr>
-      <p:grpSpPr>
-        <a:xfrm>
-          <a:off x="0" y="0"/>
-          <a:ext cx="0" cy="0"/>
-          <a:chOff x="0" y="0"/>
-          <a:chExt cx="0" cy="0"/>
-        </a:xfrm>
-      </p:grpSpPr>
-      <p:sp>
-        <p:nvSpPr>
-          <p:cNvPr id="2" name="Slide Image Placeholder 1"/>
-          <p:cNvSpPr>
-            <a:spLocks noGrp="1"/>
-          </p:cNvSpPr>
-          <p:nvPr>
-            <p:ph type="sldImg" idx="2"/>
-          </p:nvPr>
-        </p:nvSpPr>
-        <p:spPr/>
-      </p:sp>
-      <p:sp>
-        <p:nvSpPr>
-          <p:cNvPr id="3" name="Notes Placeholder 2"/>
-          <p:cNvSpPr>
-            <a:spLocks noGrp="1"/>
-          </p:cNvSpPr>
-          <p:nvPr>
-            <p:ph type="body" idx="3" sz="quarter"/>
-          </p:nvPr>
-        </p:nvSpPr>
-        <p:spPr/>
-        <p:txBody>
-          <a:bodyPr/>
-          <a:lstStyle/>
-          <a:p>
-            <a:r>
-              <a:t>Ask for a show of hands per tool. Pair up anyone on a free chat tool so they can share the copy-paste load.</a:t>
-            </a:r>
-          </a:p>
-        </p:txBody>
-      </p:sp>
-      <p:sp>
-        <p:nvSpPr>
-          <p:cNvPr id="4" name="Slide Number Placeholder 3"/>
-          <p:cNvSpPr>
-            <a:spLocks noGrp="1"/>
-          </p:cNvSpPr>
-          <p:nvPr>
-            <p:ph type="sldNum" idx="5" sz="quarter"/>
-          </p:nvPr>
-        </p:nvSpPr>
-        <p:spPr/>
-      </p:sp>
-    </p:spTree>
-  </p:cSld>
-  <p:clrMapOvr>
-    <a:masterClrMapping/>
-  </p:clrMapOvr>
-</p:notes>
-</file>
-
-<file path=ppt/notesSlides/notesSlide7.xml><?xml version="1.0" encoding="utf-8"?>
-<p:notes xmlns:a="http://schemas.openxmlformats.org/drawingml/2006/main" xmlns:p="http://schemas.openxmlformats.org/presentationml/2006/main" xmlns:r="http://schemas.openxmlformats.org/officeDocument/2006/relationships">
-  <p:cSld>
-    <p:spTree>
-      <p:nvGrpSpPr>
-        <p:cNvPr id="1" name=""/>
-        <p:cNvGrpSpPr/>
-        <p:nvPr/>
-      </p:nvGrpSpPr>
-      <p:grpSpPr>
-        <a:xfrm>
-          <a:off x="0" y="0"/>
-          <a:ext cx="0" cy="0"/>
-          <a:chOff x="0" y="0"/>
-          <a:chExt cx="0" cy="0"/>
-        </a:xfrm>
-      </p:grpSpPr>
-      <p:sp>
-        <p:nvSpPr>
-          <p:cNvPr id="2" name="Slide Image Placeholder 1"/>
-          <p:cNvSpPr>
-            <a:spLocks noGrp="1"/>
-          </p:cNvSpPr>
-          <p:nvPr>
-            <p:ph type="sldImg" idx="2"/>
-          </p:nvPr>
-        </p:nvSpPr>
-        <p:spPr/>
-      </p:sp>
-      <p:sp>
-        <p:nvSpPr>
-          <p:cNvPr id="3" name="Notes Placeholder 2"/>
-          <p:cNvSpPr>
-            <a:spLocks noGrp="1"/>
-          </p:cNvSpPr>
-          <p:nvPr>
-            <p:ph type="body" idx="3" sz="quarter"/>
-          </p:nvPr>
-        </p:nvSpPr>
-        <p:spPr/>
-        <p:txBody>
-          <a:bodyPr/>
-          <a:lstStyle/>
-          <a:p>
-            <a:r>
-              <a:t>Do this live on screen. It takes about 30 seconds and it is the first moment the room sees an agent do real work. Walk the aisles afterwards - the OneDrive mistake is the one people make.</a:t>
-            </a:r>
-          </a:p>
-        </p:txBody>
-      </p:sp>
-      <p:sp>
-        <p:nvSpPr>
-          <p:cNvPr id="4" name="Slide Number Placeholder 3"/>
-          <p:cNvSpPr>
-            <a:spLocks noGrp="1"/>
-          </p:cNvSpPr>
-          <p:nvPr>
-            <p:ph type="sldNum" idx="5" sz="quarter"/>
-          </p:nvPr>
-        </p:nvSpPr>
-        <p:spPr/>
-      </p:sp>
-    </p:spTree>
-  </p:cSld>
-  <p:clrMapOvr>
-    <a:masterClrMapping/>
-  </p:clrMapOvr>
-</p:notes>
-</file>
-
-<file path=ppt/notesSlides/notesSlide8.xml><?xml version="1.0" encoding="utf-8"?>
-<p:notes xmlns:a="http://schemas.openxmlformats.org/drawingml/2006/main" xmlns:p="http://schemas.openxmlformats.org/presentationml/2006/main" xmlns:r="http://schemas.openxmlformats.org/officeDocument/2006/relationships">
-  <p:cSld>
-    <p:spTree>
-      <p:nvGrpSpPr>
-        <p:cNvPr id="1" name=""/>
-        <p:cNvGrpSpPr/>
-        <p:nvPr/>
-      </p:nvGrpSpPr>
-      <p:grpSpPr>
-        <a:xfrm>
-          <a:off x="0" y="0"/>
-          <a:ext cx="0" cy="0"/>
-          <a:chOff x="0" y="0"/>
-          <a:chExt cx="0" cy="0"/>
-        </a:xfrm>
-      </p:grpSpPr>
-      <p:sp>
-        <p:nvSpPr>
-          <p:cNvPr id="2" name="Slide Image Placeholder 1"/>
-          <p:cNvSpPr>
-            <a:spLocks noGrp="1"/>
-          </p:cNvSpPr>
-          <p:nvPr>
-            <p:ph type="sldImg" idx="2"/>
-          </p:nvPr>
-        </p:nvSpPr>
-        <p:spPr/>
-      </p:sp>
-      <p:sp>
-        <p:nvSpPr>
-          <p:cNvPr id="3" name="Notes Placeholder 2"/>
-          <p:cNvSpPr>
-            <a:spLocks noGrp="1"/>
-          </p:cNvSpPr>
-          <p:nvPr>
-            <p:ph type="body" idx="3" sz="quarter"/>
-          </p:nvPr>
-        </p:nvSpPr>
-        <p:spPr/>
-        <p:txBody>
-          <a:bodyPr/>
-          <a:lstStyle/>
-          <a:p>
-            <a:r>
-              <a:t>Let this one sit for a beat before you talk over it.</a:t>
-            </a:r>
-          </a:p>
-        </p:txBody>
-      </p:sp>
-      <p:sp>
-        <p:nvSpPr>
-          <p:cNvPr id="4" name="Slide Number Placeholder 3"/>
-          <p:cNvSpPr>
-            <a:spLocks noGrp="1"/>
-          </p:cNvSpPr>
-          <p:nvPr>
-            <p:ph type="sldNum" idx="5" sz="quarter"/>
-          </p:nvPr>
-        </p:nvSpPr>
-        <p:spPr/>
-      </p:sp>
-    </p:spTree>
-  </p:cSld>
-  <p:clrMapOvr>
-    <a:masterClrMapping/>
-  </p:clrMapOvr>
-</p:notes>
-</file>
-
-<file path=ppt/notesSlides/notesSlide9.xml><?xml version="1.0" encoding="utf-8"?>
-<p:notes xmlns:a="http://schemas.openxmlformats.org/drawingml/2006/main" xmlns:p="http://schemas.openxmlformats.org/presentationml/2006/main" xmlns:r="http://schemas.openxmlformats.org/officeDocument/2006/relationships">
-  <p:cSld>
-    <p:spTree>
-      <p:nvGrpSpPr>
-        <p:cNvPr id="1" name=""/>
-        <p:cNvGrpSpPr/>
-        <p:nvPr/>
-      </p:nvGrpSpPr>
-      <p:grpSpPr>
-        <a:xfrm>
-          <a:off x="0" y="0"/>
-          <a:ext cx="0" cy="0"/>
-          <a:chOff x="0" y="0"/>
-          <a:chExt cx="0" cy="0"/>
-        </a:xfrm>
-      </p:grpSpPr>
-      <p:sp>
-        <p:nvSpPr>
-          <p:cNvPr id="2" name="Slide Image Placeholder 1"/>
-          <p:cNvSpPr>
-            <a:spLocks noGrp="1"/>
-          </p:cNvSpPr>
-          <p:nvPr>
-            <p:ph type="sldImg" idx="2"/>
-          </p:nvPr>
-        </p:nvSpPr>
-        <p:spPr/>
-      </p:sp>
-      <p:sp>
-        <p:nvSpPr>
-          <p:cNvPr id="3" name="Notes Placeholder 2"/>
-          <p:cNvSpPr>
-            <a:spLocks noGrp="1"/>
-          </p:cNvSpPr>
-          <p:nvPr>
-            <p:ph type="body" idx="3" sz="quarter"/>
-          </p:nvPr>
-        </p:nvSpPr>
-        <p:spPr/>
-        <p:txBody>
-          <a:bodyPr/>
-          <a:lstStyle/>
-          <a:p>
-            <a:r>
-              <a:t>Ask the room: who has been handed an analysis nobody used? Hands go up. That is the hook.</a:t>
-            </a:r>
-          </a:p>
-        </p:txBody>
-      </p:sp>
-      <p:sp>
-        <p:nvSpPr>
-          <p:cNvPr id="4" name="Slide Number Placeholder 3"/>
-          <p:cNvSpPr>
-            <a:spLocks noGrp="1"/>
-          </p:cNvSpPr>
-          <p:nvPr>
-            <p:ph type="sldNum" idx="5" sz="quarter"/>
-          </p:nvPr>
-        </p:nvSpPr>
-        <p:spPr/>
-      </p:sp>
-    </p:spTree>
-  </p:cSld>
-  <p:clrMapOvr>
-    <a:masterClrMapping/>
-  </p:clrMapOvr>
-</p:notes>
 </file>
 
 <file path=ppt/slideLayouts/slideLayout1.xml><?xml version="1.0" encoding="utf-8"?>

--- a/1_Class/Slides/INFO4610-Session1.pptx
+++ b/1_Class/Slides/INFO4610-Session1.pptx
@@ -5,26 +5,26 @@
     <p:sldMasterId id="2147483648" r:id="rId1"/>
   </p:sldMasterIdLst>
   <p:sldIdLst>
-    <p:sldId id="256" r:id="rId7"/>
-    <p:sldId id="257" r:id="rId9"/>
-    <p:sldId id="258" r:id="rId10"/>
-    <p:sldId id="259" r:id="rId11"/>
-    <p:sldId id="260" r:id="rId12"/>
-    <p:sldId id="261" r:id="rId13"/>
-    <p:sldId id="262" r:id="rId14"/>
-    <p:sldId id="263" r:id="rId15"/>
-    <p:sldId id="264" r:id="rId16"/>
-    <p:sldId id="265" r:id="rId17"/>
-    <p:sldId id="266" r:id="rId18"/>
-    <p:sldId id="267" r:id="rId19"/>
-    <p:sldId id="268" r:id="rId20"/>
-    <p:sldId id="269" r:id="rId21"/>
-    <p:sldId id="270" r:id="rId22"/>
-    <p:sldId id="271" r:id="rId23"/>
-    <p:sldId id="272" r:id="rId24"/>
-    <p:sldId id="273" r:id="rId25"/>
+    <p:sldId id="256" r:id="rId2"/>
+    <p:sldId id="257" r:id="rId3"/>
+    <p:sldId id="258" r:id="rId4"/>
+    <p:sldId id="259" r:id="rId5"/>
+    <p:sldId id="260" r:id="rId6"/>
+    <p:sldId id="261" r:id="rId7"/>
+    <p:sldId id="262" r:id="rId8"/>
+    <p:sldId id="263" r:id="rId9"/>
+    <p:sldId id="264" r:id="rId10"/>
+    <p:sldId id="265" r:id="rId11"/>
+    <p:sldId id="266" r:id="rId12"/>
+    <p:sldId id="267" r:id="rId13"/>
+    <p:sldId id="268" r:id="rId14"/>
+    <p:sldId id="269" r:id="rId15"/>
+    <p:sldId id="270" r:id="rId16"/>
+    <p:sldId id="271" r:id="rId17"/>
+    <p:sldId id="272" r:id="rId18"/>
+    <p:sldId id="273" r:id="rId19"/>
   </p:sldIdLst>
-  <p:sldSz cx="12191695" cy="6858000" type="screen4x3"/>
+  <p:sldSz cx="12192000" cy="6858000"/>
   <p:notesSz cx="6858000" cy="9144000"/>
   <p:defaultTextStyle>
     <a:defPPr>
@@ -121,357 +121,23 @@
       </a:defRPr>
     </a:lvl9pPr>
   </p:defaultTextStyle>
+  <p:extLst>
+    <p:ext uri="{EFAFB233-063F-42B5-8137-9DF3F51BA10A}">
+      <p15:sldGuideLst xmlns:p15="http://schemas.microsoft.com/office/powerpoint/2012/main">
+        <p15:guide id="1" orient="horz" pos="2160">
+          <p15:clr>
+            <a:srgbClr val="A4A3A4"/>
+          </p15:clr>
+        </p15:guide>
+        <p15:guide id="2" pos="2880">
+          <p15:clr>
+            <a:srgbClr val="A4A3A4"/>
+          </p15:clr>
+        </p15:guide>
+      </p15:sldGuideLst>
+    </p:ext>
+  </p:extLst>
 </p:presentation>
-</file>
-
-<file path=ppt/notesMasters/notesMaster1.xml><?xml version="1.0" encoding="utf-8"?>
-<p:notesMaster xmlns:a="http://schemas.openxmlformats.org/drawingml/2006/main" xmlns:p="http://schemas.openxmlformats.org/presentationml/2006/main" xmlns:r="http://schemas.openxmlformats.org/officeDocument/2006/relationships">
-  <p:cSld>
-    <p:bg>
-      <p:bgRef idx="1001">
-        <a:schemeClr val="bg1"/>
-      </p:bgRef>
-    </p:bg>
-    <p:spTree>
-      <p:nvGrpSpPr>
-        <p:cNvPr id="1" name=""/>
-        <p:cNvGrpSpPr/>
-        <p:nvPr/>
-      </p:nvGrpSpPr>
-      <p:grpSpPr>
-        <a:xfrm>
-          <a:off x="0" y="0"/>
-          <a:ext cx="0" cy="0"/>
-          <a:chOff x="0" y="0"/>
-          <a:chExt cx="0" cy="0"/>
-        </a:xfrm>
-      </p:grpSpPr>
-      <p:sp>
-        <p:nvSpPr>
-          <p:cNvPr id="2" name="Header Placeholder 1"/>
-          <p:cNvSpPr>
-            <a:spLocks noGrp="1"/>
-          </p:cNvSpPr>
-          <p:nvPr>
-            <p:ph type="hdr" sz="quarter"/>
-          </p:nvPr>
-        </p:nvSpPr>
-        <p:spPr>
-          <a:xfrm>
-            <a:off x="0" y="0"/>
-            <a:ext cx="2971800" cy="457200"/>
-          </a:xfrm>
-          <a:prstGeom prst="rect">
-            <a:avLst/>
-          </a:prstGeom>
-        </p:spPr>
-        <p:txBody>
-          <a:bodyPr vert="horz" lIns="91440" tIns="45720" rIns="91440" bIns="45720" rtlCol="0"/>
-          <a:lstStyle>
-            <a:lvl1pPr algn="l">
-              <a:defRPr sz="1200"/>
-            </a:lvl1pPr>
-          </a:lstStyle>
-          <a:p>
-            <a:endParaRPr lang="en-US"/>
-          </a:p>
-        </p:txBody>
-      </p:sp>
-      <p:sp>
-        <p:nvSpPr>
-          <p:cNvPr id="3" name="Date Placeholder 2"/>
-          <p:cNvSpPr>
-            <a:spLocks noGrp="1"/>
-          </p:cNvSpPr>
-          <p:nvPr>
-            <p:ph type="dt" idx="1"/>
-          </p:nvPr>
-        </p:nvSpPr>
-        <p:spPr>
-          <a:xfrm>
-            <a:off x="3884613" y="0"/>
-            <a:ext cx="2971800" cy="457200"/>
-          </a:xfrm>
-          <a:prstGeom prst="rect">
-            <a:avLst/>
-          </a:prstGeom>
-        </p:spPr>
-        <p:txBody>
-          <a:bodyPr vert="horz" lIns="91440" tIns="45720" rIns="91440" bIns="45720" rtlCol="0"/>
-          <a:lstStyle>
-            <a:lvl1pPr algn="r">
-              <a:defRPr sz="1200"/>
-            </a:lvl1pPr>
-          </a:lstStyle>
-          <a:p>
-            <a:fld id="{0F89C1C7-3DCD-1040-A9CF-14679D8B5DDD}" type="datetimeFigureOut">
-              <a:rPr lang="en-US" smtClean="0"/>
-              <a:t>10/17/16</a:t>
-            </a:fld>
-            <a:endParaRPr lang="en-US"/>
-          </a:p>
-        </p:txBody>
-      </p:sp>
-      <p:sp>
-        <p:nvSpPr>
-          <p:cNvPr id="4" name="Slide Image Placeholder 3"/>
-          <p:cNvSpPr>
-            <a:spLocks noGrp="1" noRot="1" noChangeAspect="1"/>
-          </p:cNvSpPr>
-          <p:nvPr>
-            <p:ph type="sldImg" idx="2"/>
-          </p:nvPr>
-        </p:nvSpPr>
-        <p:spPr>
-          <a:xfrm>
-            <a:off x="1143000" y="685800"/>
-            <a:ext cx="4572000" cy="3429000"/>
-          </a:xfrm>
-          <a:prstGeom prst="rect">
-            <a:avLst/>
-          </a:prstGeom>
-          <a:noFill/>
-          <a:ln w="12700">
-            <a:solidFill>
-              <a:prstClr val="black"/>
-            </a:solidFill>
-          </a:ln>
-        </p:spPr>
-        <p:txBody>
-          <a:bodyPr vert="horz" lIns="91440" tIns="45720" rIns="91440" bIns="45720" rtlCol="0" anchor="ctr"/>
-          <a:lstStyle/>
-          <a:p>
-            <a:endParaRPr lang="en-US"/>
-          </a:p>
-        </p:txBody>
-      </p:sp>
-      <p:sp>
-        <p:nvSpPr>
-          <p:cNvPr id="5" name="Notes Placeholder 4"/>
-          <p:cNvSpPr>
-            <a:spLocks noGrp="1"/>
-          </p:cNvSpPr>
-          <p:nvPr>
-            <p:ph type="body" sz="quarter" idx="3"/>
-          </p:nvPr>
-        </p:nvSpPr>
-        <p:spPr>
-          <a:xfrm>
-            <a:off x="685800" y="4343400"/>
-            <a:ext cx="5486400" cy="4114800"/>
-          </a:xfrm>
-          <a:prstGeom prst="rect">
-            <a:avLst/>
-          </a:prstGeom>
-        </p:spPr>
-        <p:txBody>
-          <a:bodyPr vert="horz" lIns="91440" tIns="45720" rIns="91440" bIns="45720" rtlCol="0"/>
-          <a:lstStyle/>
-          <a:p>
-            <a:pPr lvl="0"/>
-            <a:r>
-              <a:rPr lang="en-US" smtClean="0"/>
-              <a:t>Click to edit Master text styles</a:t>
-            </a:r>
-          </a:p>
-          <a:p>
-            <a:pPr lvl="1"/>
-            <a:r>
-              <a:rPr lang="en-US" smtClean="0"/>
-              <a:t>Second level</a:t>
-            </a:r>
-          </a:p>
-          <a:p>
-            <a:pPr lvl="2"/>
-            <a:r>
-              <a:rPr lang="en-US" smtClean="0"/>
-              <a:t>Third level</a:t>
-            </a:r>
-          </a:p>
-          <a:p>
-            <a:pPr lvl="3"/>
-            <a:r>
-              <a:rPr lang="en-US" smtClean="0"/>
-              <a:t>Fourth level</a:t>
-            </a:r>
-          </a:p>
-          <a:p>
-            <a:pPr lvl="4"/>
-            <a:r>
-              <a:rPr lang="en-US" smtClean="0"/>
-              <a:t>Fifth level</a:t>
-            </a:r>
-            <a:endParaRPr lang="en-US"/>
-          </a:p>
-        </p:txBody>
-      </p:sp>
-      <p:sp>
-        <p:nvSpPr>
-          <p:cNvPr id="6" name="Footer Placeholder 5"/>
-          <p:cNvSpPr>
-            <a:spLocks noGrp="1"/>
-          </p:cNvSpPr>
-          <p:nvPr>
-            <p:ph type="ftr" sz="quarter" idx="4"/>
-          </p:nvPr>
-        </p:nvSpPr>
-        <p:spPr>
-          <a:xfrm>
-            <a:off x="0" y="8685213"/>
-            <a:ext cx="2971800" cy="457200"/>
-          </a:xfrm>
-          <a:prstGeom prst="rect">
-            <a:avLst/>
-          </a:prstGeom>
-        </p:spPr>
-        <p:txBody>
-          <a:bodyPr vert="horz" lIns="91440" tIns="45720" rIns="91440" bIns="45720" rtlCol="0" anchor="b"/>
-          <a:lstStyle>
-            <a:lvl1pPr algn="l">
-              <a:defRPr sz="1200"/>
-            </a:lvl1pPr>
-          </a:lstStyle>
-          <a:p>
-            <a:endParaRPr lang="en-US"/>
-          </a:p>
-        </p:txBody>
-      </p:sp>
-      <p:sp>
-        <p:nvSpPr>
-          <p:cNvPr id="7" name="Slide Number Placeholder 6"/>
-          <p:cNvSpPr>
-            <a:spLocks noGrp="1"/>
-          </p:cNvSpPr>
-          <p:nvPr>
-            <p:ph type="sldNum" sz="quarter" idx="5"/>
-          </p:nvPr>
-        </p:nvSpPr>
-        <p:spPr>
-          <a:xfrm>
-            <a:off x="3884613" y="8685213"/>
-            <a:ext cx="2971800" cy="457200"/>
-          </a:xfrm>
-          <a:prstGeom prst="rect">
-            <a:avLst/>
-          </a:prstGeom>
-        </p:spPr>
-        <p:txBody>
-          <a:bodyPr vert="horz" lIns="91440" tIns="45720" rIns="91440" bIns="45720" rtlCol="0" anchor="b"/>
-          <a:lstStyle>
-            <a:lvl1pPr algn="r">
-              <a:defRPr sz="1200"/>
-            </a:lvl1pPr>
-          </a:lstStyle>
-          <a:p>
-            <a:fld id="{BB5E49A5-4136-284D-997B-48E1D791AD67}" type="slidenum">
-              <a:rPr lang="en-US" smtClean="0"/>
-              <a:t>‹#›</a:t>
-            </a:fld>
-            <a:endParaRPr lang="en-US"/>
-          </a:p>
-        </p:txBody>
-      </p:sp>
-    </p:spTree>
-    <p:extLst>
-      <p:ext uri="{BB962C8B-B14F-4D97-AF65-F5344CB8AC3E}">
-        <p14:creationId xmlns:p14="http://schemas.microsoft.com/office/powerpoint/2010/main" val="2623252185"/>
-      </p:ext>
-    </p:extLst>
-  </p:cSld>
-  <p:clrMap bg1="lt1" tx1="dk1" bg2="lt2" tx2="dk2" accent1="accent1" accent2="accent2" accent3="accent3" accent4="accent4" accent5="accent5" accent6="accent6" hlink="hlink" folHlink="folHlink"/>
-  <p:notesStyle>
-    <a:lvl1pPr marL="0" algn="l" defTabSz="457200" rtl="0" eaLnBrk="1" latinLnBrk="0" hangingPunct="1">
-      <a:defRPr sz="1200" kern="1200">
-        <a:solidFill>
-          <a:schemeClr val="tx1"/>
-        </a:solidFill>
-        <a:latin typeface="+mn-lt"/>
-        <a:ea typeface="+mn-ea"/>
-        <a:cs typeface="+mn-cs"/>
-      </a:defRPr>
-    </a:lvl1pPr>
-    <a:lvl2pPr marL="457200" algn="l" defTabSz="457200" rtl="0" eaLnBrk="1" latinLnBrk="0" hangingPunct="1">
-      <a:defRPr sz="1200" kern="1200">
-        <a:solidFill>
-          <a:schemeClr val="tx1"/>
-        </a:solidFill>
-        <a:latin typeface="+mn-lt"/>
-        <a:ea typeface="+mn-ea"/>
-        <a:cs typeface="+mn-cs"/>
-      </a:defRPr>
-    </a:lvl2pPr>
-    <a:lvl3pPr marL="914400" algn="l" defTabSz="457200" rtl="0" eaLnBrk="1" latinLnBrk="0" hangingPunct="1">
-      <a:defRPr sz="1200" kern="1200">
-        <a:solidFill>
-          <a:schemeClr val="tx1"/>
-        </a:solidFill>
-        <a:latin typeface="+mn-lt"/>
-        <a:ea typeface="+mn-ea"/>
-        <a:cs typeface="+mn-cs"/>
-      </a:defRPr>
-    </a:lvl3pPr>
-    <a:lvl4pPr marL="1371600" algn="l" defTabSz="457200" rtl="0" eaLnBrk="1" latinLnBrk="0" hangingPunct="1">
-      <a:defRPr sz="1200" kern="1200">
-        <a:solidFill>
-          <a:schemeClr val="tx1"/>
-        </a:solidFill>
-        <a:latin typeface="+mn-lt"/>
-        <a:ea typeface="+mn-ea"/>
-        <a:cs typeface="+mn-cs"/>
-      </a:defRPr>
-    </a:lvl4pPr>
-    <a:lvl5pPr marL="1828800" algn="l" defTabSz="457200" rtl="0" eaLnBrk="1" latinLnBrk="0" hangingPunct="1">
-      <a:defRPr sz="1200" kern="1200">
-        <a:solidFill>
-          <a:schemeClr val="tx1"/>
-        </a:solidFill>
-        <a:latin typeface="+mn-lt"/>
-        <a:ea typeface="+mn-ea"/>
-        <a:cs typeface="+mn-cs"/>
-      </a:defRPr>
-    </a:lvl5pPr>
-    <a:lvl6pPr marL="2286000" algn="l" defTabSz="457200" rtl="0" eaLnBrk="1" latinLnBrk="0" hangingPunct="1">
-      <a:defRPr sz="1200" kern="1200">
-        <a:solidFill>
-          <a:schemeClr val="tx1"/>
-        </a:solidFill>
-        <a:latin typeface="+mn-lt"/>
-        <a:ea typeface="+mn-ea"/>
-        <a:cs typeface="+mn-cs"/>
-      </a:defRPr>
-    </a:lvl6pPr>
-    <a:lvl7pPr marL="2743200" algn="l" defTabSz="457200" rtl="0" eaLnBrk="1" latinLnBrk="0" hangingPunct="1">
-      <a:defRPr sz="1200" kern="1200">
-        <a:solidFill>
-          <a:schemeClr val="tx1"/>
-        </a:solidFill>
-        <a:latin typeface="+mn-lt"/>
-        <a:ea typeface="+mn-ea"/>
-        <a:cs typeface="+mn-cs"/>
-      </a:defRPr>
-    </a:lvl7pPr>
-    <a:lvl8pPr marL="3200400" algn="l" defTabSz="457200" rtl="0" eaLnBrk="1" latinLnBrk="0" hangingPunct="1">
-      <a:defRPr sz="1200" kern="1200">
-        <a:solidFill>
-          <a:schemeClr val="tx1"/>
-        </a:solidFill>
-        <a:latin typeface="+mn-lt"/>
-        <a:ea typeface="+mn-ea"/>
-        <a:cs typeface="+mn-cs"/>
-      </a:defRPr>
-    </a:lvl8pPr>
-    <a:lvl9pPr marL="3657600" algn="l" defTabSz="457200" rtl="0" eaLnBrk="1" latinLnBrk="0" hangingPunct="1">
-      <a:defRPr sz="1200" kern="1200">
-        <a:solidFill>
-          <a:schemeClr val="tx1"/>
-        </a:solidFill>
-        <a:latin typeface="+mn-lt"/>
-        <a:ea typeface="+mn-ea"/>
-        <a:cs typeface="+mn-cs"/>
-      </a:defRPr>
-    </a:lvl9pPr>
-  </p:notesStyle>
-</p:notesMaster>
 </file>
 
 <file path=ppt/slideLayouts/slideLayout1.xml><?xml version="1.0" encoding="utf-8"?>
@@ -512,10 +178,9 @@
           <a:lstStyle/>
           <a:p>
             <a:r>
-              <a:rPr lang="en-US" smtClean="0"/>
+              <a:rPr lang="en-US"/>
               <a:t>Click to edit Master title style</a:t>
             </a:r>
-            <a:endParaRPr lang="en-US"/>
           </a:p>
         </p:txBody>
       </p:sp>
@@ -631,10 +296,9 @@
           </a:lstStyle>
           <a:p>
             <a:r>
-              <a:rPr lang="en-US" smtClean="0"/>
+              <a:rPr lang="en-US"/>
               <a:t>Click to edit Master subtitle style</a:t>
             </a:r>
-            <a:endParaRPr lang="en-US"/>
           </a:p>
         </p:txBody>
       </p:sp>
@@ -655,7 +319,7 @@
           <a:p>
             <a:fld id="{5BCAD085-E8A6-8845-BD4E-CB4CCA059FC4}" type="datetimeFigureOut">
               <a:rPr lang="en-US" smtClean="0"/>
-              <a:t>1/27/13</a:t>
+              <a:t>8/17/2026</a:t>
             </a:fld>
             <a:endParaRPr lang="en-US"/>
           </a:p>
@@ -749,10 +413,9 @@
           <a:lstStyle/>
           <a:p>
             <a:r>
-              <a:rPr lang="en-US" smtClean="0"/>
+              <a:rPr lang="en-US"/>
               <a:t>Click to edit Master title style</a:t>
             </a:r>
-            <a:endParaRPr lang="en-US"/>
           </a:p>
         </p:txBody>
       </p:sp>
@@ -773,38 +436,37 @@
           <a:p>
             <a:pPr lvl="0"/>
             <a:r>
-              <a:rPr lang="en-US" smtClean="0"/>
+              <a:rPr lang="en-US"/>
               <a:t>Click to edit Master text styles</a:t>
             </a:r>
           </a:p>
           <a:p>
             <a:pPr lvl="1"/>
             <a:r>
-              <a:rPr lang="en-US" smtClean="0"/>
+              <a:rPr lang="en-US"/>
               <a:t>Second level</a:t>
             </a:r>
           </a:p>
           <a:p>
             <a:pPr lvl="2"/>
             <a:r>
-              <a:rPr lang="en-US" smtClean="0"/>
+              <a:rPr lang="en-US"/>
               <a:t>Third level</a:t>
             </a:r>
           </a:p>
           <a:p>
             <a:pPr lvl="3"/>
             <a:r>
-              <a:rPr lang="en-US" smtClean="0"/>
+              <a:rPr lang="en-US"/>
               <a:t>Fourth level</a:t>
             </a:r>
           </a:p>
           <a:p>
             <a:pPr lvl="4"/>
             <a:r>
-              <a:rPr lang="en-US" smtClean="0"/>
+              <a:rPr lang="en-US"/>
               <a:t>Fifth level</a:t>
             </a:r>
-            <a:endParaRPr lang="en-US"/>
           </a:p>
         </p:txBody>
       </p:sp>
@@ -825,7 +487,7 @@
           <a:p>
             <a:fld id="{5BCAD085-E8A6-8845-BD4E-CB4CCA059FC4}" type="datetimeFigureOut">
               <a:rPr lang="en-US" smtClean="0"/>
-              <a:t>1/27/13</a:t>
+              <a:t>8/17/2026</a:t>
             </a:fld>
             <a:endParaRPr lang="en-US"/>
           </a:p>
@@ -924,10 +586,9 @@
           <a:lstStyle/>
           <a:p>
             <a:r>
-              <a:rPr lang="en-US" smtClean="0"/>
+              <a:rPr lang="en-US"/>
               <a:t>Click to edit Master title style</a:t>
             </a:r>
-            <a:endParaRPr lang="en-US"/>
           </a:p>
         </p:txBody>
       </p:sp>
@@ -953,38 +614,37 @@
           <a:p>
             <a:pPr lvl="0"/>
             <a:r>
-              <a:rPr lang="en-US" smtClean="0"/>
+              <a:rPr lang="en-US"/>
               <a:t>Click to edit Master text styles</a:t>
             </a:r>
           </a:p>
           <a:p>
             <a:pPr lvl="1"/>
             <a:r>
-              <a:rPr lang="en-US" smtClean="0"/>
+              <a:rPr lang="en-US"/>
               <a:t>Second level</a:t>
             </a:r>
           </a:p>
           <a:p>
             <a:pPr lvl="2"/>
             <a:r>
-              <a:rPr lang="en-US" smtClean="0"/>
+              <a:rPr lang="en-US"/>
               <a:t>Third level</a:t>
             </a:r>
           </a:p>
           <a:p>
             <a:pPr lvl="3"/>
             <a:r>
-              <a:rPr lang="en-US" smtClean="0"/>
+              <a:rPr lang="en-US"/>
               <a:t>Fourth level</a:t>
             </a:r>
           </a:p>
           <a:p>
             <a:pPr lvl="4"/>
             <a:r>
-              <a:rPr lang="en-US" smtClean="0"/>
+              <a:rPr lang="en-US"/>
               <a:t>Fifth level</a:t>
             </a:r>
-            <a:endParaRPr lang="en-US"/>
           </a:p>
         </p:txBody>
       </p:sp>
@@ -1005,7 +665,7 @@
           <a:p>
             <a:fld id="{5BCAD085-E8A6-8845-BD4E-CB4CCA059FC4}" type="datetimeFigureOut">
               <a:rPr lang="en-US" smtClean="0"/>
-              <a:t>1/27/13</a:t>
+              <a:t>8/17/2026</a:t>
             </a:fld>
             <a:endParaRPr lang="en-US"/>
           </a:p>
@@ -1099,10 +759,9 @@
           <a:lstStyle/>
           <a:p>
             <a:r>
-              <a:rPr lang="en-US" smtClean="0"/>
+              <a:rPr lang="en-US"/>
               <a:t>Click to edit Master title style</a:t>
             </a:r>
-            <a:endParaRPr lang="en-US"/>
           </a:p>
         </p:txBody>
       </p:sp>
@@ -1123,38 +782,37 @@
           <a:p>
             <a:pPr lvl="0"/>
             <a:r>
-              <a:rPr lang="en-US" smtClean="0"/>
+              <a:rPr lang="en-US"/>
               <a:t>Click to edit Master text styles</a:t>
             </a:r>
           </a:p>
           <a:p>
             <a:pPr lvl="1"/>
             <a:r>
-              <a:rPr lang="en-US" smtClean="0"/>
+              <a:rPr lang="en-US"/>
               <a:t>Second level</a:t>
             </a:r>
           </a:p>
           <a:p>
             <a:pPr lvl="2"/>
             <a:r>
-              <a:rPr lang="en-US" smtClean="0"/>
+              <a:rPr lang="en-US"/>
               <a:t>Third level</a:t>
             </a:r>
           </a:p>
           <a:p>
             <a:pPr lvl="3"/>
             <a:r>
-              <a:rPr lang="en-US" smtClean="0"/>
+              <a:rPr lang="en-US"/>
               <a:t>Fourth level</a:t>
             </a:r>
           </a:p>
           <a:p>
             <a:pPr lvl="4"/>
             <a:r>
-              <a:rPr lang="en-US" smtClean="0"/>
+              <a:rPr lang="en-US"/>
               <a:t>Fifth level</a:t>
             </a:r>
-            <a:endParaRPr lang="en-US"/>
           </a:p>
         </p:txBody>
       </p:sp>
@@ -1175,7 +833,7 @@
           <a:p>
             <a:fld id="{5BCAD085-E8A6-8845-BD4E-CB4CCA059FC4}" type="datetimeFigureOut">
               <a:rPr lang="en-US" smtClean="0"/>
-              <a:t>1/27/13</a:t>
+              <a:t>8/17/2026</a:t>
             </a:fld>
             <a:endParaRPr lang="en-US"/>
           </a:p>
@@ -1278,10 +936,9 @@
           </a:lstStyle>
           <a:p>
             <a:r>
-              <a:rPr lang="en-US" smtClean="0"/>
+              <a:rPr lang="en-US"/>
               <a:t>Click to edit Master title style</a:t>
             </a:r>
-            <a:endParaRPr lang="en-US"/>
           </a:p>
         </p:txBody>
       </p:sp>
@@ -1398,7 +1055,7 @@
           <a:p>
             <a:pPr lvl="0"/>
             <a:r>
-              <a:rPr lang="en-US" smtClean="0"/>
+              <a:rPr lang="en-US"/>
               <a:t>Click to edit Master text styles</a:t>
             </a:r>
           </a:p>
@@ -1421,7 +1078,7 @@
           <a:p>
             <a:fld id="{5BCAD085-E8A6-8845-BD4E-CB4CCA059FC4}" type="datetimeFigureOut">
               <a:rPr lang="en-US" smtClean="0"/>
-              <a:t>1/27/13</a:t>
+              <a:t>8/17/2026</a:t>
             </a:fld>
             <a:endParaRPr lang="en-US"/>
           </a:p>
@@ -1515,10 +1172,9 @@
           <a:lstStyle/>
           <a:p>
             <a:r>
-              <a:rPr lang="en-US" smtClean="0"/>
+              <a:rPr lang="en-US"/>
               <a:t>Click to edit Master title style</a:t>
             </a:r>
-            <a:endParaRPr lang="en-US"/>
           </a:p>
         </p:txBody>
       </p:sp>
@@ -1572,38 +1228,37 @@
           <a:p>
             <a:pPr lvl="0"/>
             <a:r>
-              <a:rPr lang="en-US" smtClean="0"/>
+              <a:rPr lang="en-US"/>
               <a:t>Click to edit Master text styles</a:t>
             </a:r>
           </a:p>
           <a:p>
             <a:pPr lvl="1"/>
             <a:r>
-              <a:rPr lang="en-US" smtClean="0"/>
+              <a:rPr lang="en-US"/>
               <a:t>Second level</a:t>
             </a:r>
           </a:p>
           <a:p>
             <a:pPr lvl="2"/>
             <a:r>
-              <a:rPr lang="en-US" smtClean="0"/>
+              <a:rPr lang="en-US"/>
               <a:t>Third level</a:t>
             </a:r>
           </a:p>
           <a:p>
             <a:pPr lvl="3"/>
             <a:r>
-              <a:rPr lang="en-US" smtClean="0"/>
+              <a:rPr lang="en-US"/>
               <a:t>Fourth level</a:t>
             </a:r>
           </a:p>
           <a:p>
             <a:pPr lvl="4"/>
             <a:r>
-              <a:rPr lang="en-US" smtClean="0"/>
+              <a:rPr lang="en-US"/>
               <a:t>Fifth level</a:t>
             </a:r>
-            <a:endParaRPr lang="en-US"/>
           </a:p>
         </p:txBody>
       </p:sp>
@@ -1657,38 +1312,37 @@
           <a:p>
             <a:pPr lvl="0"/>
             <a:r>
-              <a:rPr lang="en-US" smtClean="0"/>
+              <a:rPr lang="en-US"/>
               <a:t>Click to edit Master text styles</a:t>
             </a:r>
           </a:p>
           <a:p>
             <a:pPr lvl="1"/>
             <a:r>
-              <a:rPr lang="en-US" smtClean="0"/>
+              <a:rPr lang="en-US"/>
               <a:t>Second level</a:t>
             </a:r>
           </a:p>
           <a:p>
             <a:pPr lvl="2"/>
             <a:r>
-              <a:rPr lang="en-US" smtClean="0"/>
+              <a:rPr lang="en-US"/>
               <a:t>Third level</a:t>
             </a:r>
           </a:p>
           <a:p>
             <a:pPr lvl="3"/>
             <a:r>
-              <a:rPr lang="en-US" smtClean="0"/>
+              <a:rPr lang="en-US"/>
               <a:t>Fourth level</a:t>
             </a:r>
           </a:p>
           <a:p>
             <a:pPr lvl="4"/>
             <a:r>
-              <a:rPr lang="en-US" smtClean="0"/>
+              <a:rPr lang="en-US"/>
               <a:t>Fifth level</a:t>
             </a:r>
-            <a:endParaRPr lang="en-US"/>
           </a:p>
         </p:txBody>
       </p:sp>
@@ -1709,7 +1363,7 @@
           <a:p>
             <a:fld id="{5BCAD085-E8A6-8845-BD4E-CB4CCA059FC4}" type="datetimeFigureOut">
               <a:rPr lang="en-US" smtClean="0"/>
-              <a:t>1/27/13</a:t>
+              <a:t>8/17/2026</a:t>
             </a:fld>
             <a:endParaRPr lang="en-US"/>
           </a:p>
@@ -1807,10 +1461,9 @@
           </a:lstStyle>
           <a:p>
             <a:r>
-              <a:rPr lang="en-US" smtClean="0"/>
+              <a:rPr lang="en-US"/>
               <a:t>Click to edit Master title style</a:t>
             </a:r>
-            <a:endParaRPr lang="en-US"/>
           </a:p>
         </p:txBody>
       </p:sp>
@@ -1873,7 +1526,7 @@
           <a:p>
             <a:pPr lvl="0"/>
             <a:r>
-              <a:rPr lang="en-US" smtClean="0"/>
+              <a:rPr lang="en-US"/>
               <a:t>Click to edit Master text styles</a:t>
             </a:r>
           </a:p>
@@ -1929,38 +1582,37 @@
           <a:p>
             <a:pPr lvl="0"/>
             <a:r>
-              <a:rPr lang="en-US" smtClean="0"/>
+              <a:rPr lang="en-US"/>
               <a:t>Click to edit Master text styles</a:t>
             </a:r>
           </a:p>
           <a:p>
             <a:pPr lvl="1"/>
             <a:r>
-              <a:rPr lang="en-US" smtClean="0"/>
+              <a:rPr lang="en-US"/>
               <a:t>Second level</a:t>
             </a:r>
           </a:p>
           <a:p>
             <a:pPr lvl="2"/>
             <a:r>
-              <a:rPr lang="en-US" smtClean="0"/>
+              <a:rPr lang="en-US"/>
               <a:t>Third level</a:t>
             </a:r>
           </a:p>
           <a:p>
             <a:pPr lvl="3"/>
             <a:r>
-              <a:rPr lang="en-US" smtClean="0"/>
+              <a:rPr lang="en-US"/>
               <a:t>Fourth level</a:t>
             </a:r>
           </a:p>
           <a:p>
             <a:pPr lvl="4"/>
             <a:r>
-              <a:rPr lang="en-US" smtClean="0"/>
+              <a:rPr lang="en-US"/>
               <a:t>Fifth level</a:t>
             </a:r>
-            <a:endParaRPr lang="en-US"/>
           </a:p>
         </p:txBody>
       </p:sp>
@@ -2023,7 +1675,7 @@
           <a:p>
             <a:pPr lvl="0"/>
             <a:r>
-              <a:rPr lang="en-US" smtClean="0"/>
+              <a:rPr lang="en-US"/>
               <a:t>Click to edit Master text styles</a:t>
             </a:r>
           </a:p>
@@ -2079,38 +1731,37 @@
           <a:p>
             <a:pPr lvl="0"/>
             <a:r>
-              <a:rPr lang="en-US" smtClean="0"/>
+              <a:rPr lang="en-US"/>
               <a:t>Click to edit Master text styles</a:t>
             </a:r>
           </a:p>
           <a:p>
             <a:pPr lvl="1"/>
             <a:r>
-              <a:rPr lang="en-US" smtClean="0"/>
+              <a:rPr lang="en-US"/>
               <a:t>Second level</a:t>
             </a:r>
           </a:p>
           <a:p>
             <a:pPr lvl="2"/>
             <a:r>
-              <a:rPr lang="en-US" smtClean="0"/>
+              <a:rPr lang="en-US"/>
               <a:t>Third level</a:t>
             </a:r>
           </a:p>
           <a:p>
             <a:pPr lvl="3"/>
             <a:r>
-              <a:rPr lang="en-US" smtClean="0"/>
+              <a:rPr lang="en-US"/>
               <a:t>Fourth level</a:t>
             </a:r>
           </a:p>
           <a:p>
             <a:pPr lvl="4"/>
             <a:r>
-              <a:rPr lang="en-US" smtClean="0"/>
+              <a:rPr lang="en-US"/>
               <a:t>Fifth level</a:t>
             </a:r>
-            <a:endParaRPr lang="en-US"/>
           </a:p>
         </p:txBody>
       </p:sp>
@@ -2131,7 +1782,7 @@
           <a:p>
             <a:fld id="{5BCAD085-E8A6-8845-BD4E-CB4CCA059FC4}" type="datetimeFigureOut">
               <a:rPr lang="en-US" smtClean="0"/>
-              <a:t>1/27/13</a:t>
+              <a:t>8/17/2026</a:t>
             </a:fld>
             <a:endParaRPr lang="en-US"/>
           </a:p>
@@ -2225,10 +1876,9 @@
           <a:lstStyle/>
           <a:p>
             <a:r>
-              <a:rPr lang="en-US" smtClean="0"/>
+              <a:rPr lang="en-US"/>
               <a:t>Click to edit Master title style</a:t>
             </a:r>
-            <a:endParaRPr lang="en-US"/>
           </a:p>
         </p:txBody>
       </p:sp>
@@ -2249,7 +1899,7 @@
           <a:p>
             <a:fld id="{5BCAD085-E8A6-8845-BD4E-CB4CCA059FC4}" type="datetimeFigureOut">
               <a:rPr lang="en-US" smtClean="0"/>
-              <a:t>1/27/13</a:t>
+              <a:t>8/17/2026</a:t>
             </a:fld>
             <a:endParaRPr lang="en-US"/>
           </a:p>
@@ -2344,7 +1994,7 @@
           <a:p>
             <a:fld id="{5BCAD085-E8A6-8845-BD4E-CB4CCA059FC4}" type="datetimeFigureOut">
               <a:rPr lang="en-US" smtClean="0"/>
-              <a:t>1/27/13</a:t>
+              <a:t>8/17/2026</a:t>
             </a:fld>
             <a:endParaRPr lang="en-US"/>
           </a:p>
@@ -2447,10 +2097,9 @@
           </a:lstStyle>
           <a:p>
             <a:r>
-              <a:rPr lang="en-US" smtClean="0"/>
+              <a:rPr lang="en-US"/>
               <a:t>Click to edit Master title style</a:t>
             </a:r>
-            <a:endParaRPr lang="en-US"/>
           </a:p>
         </p:txBody>
       </p:sp>
@@ -2504,38 +2153,37 @@
           <a:p>
             <a:pPr lvl="0"/>
             <a:r>
-              <a:rPr lang="en-US" smtClean="0"/>
+              <a:rPr lang="en-US"/>
               <a:t>Click to edit Master text styles</a:t>
             </a:r>
           </a:p>
           <a:p>
             <a:pPr lvl="1"/>
             <a:r>
-              <a:rPr lang="en-US" smtClean="0"/>
+              <a:rPr lang="en-US"/>
               <a:t>Second level</a:t>
             </a:r>
           </a:p>
           <a:p>
             <a:pPr lvl="2"/>
             <a:r>
-              <a:rPr lang="en-US" smtClean="0"/>
+              <a:rPr lang="en-US"/>
               <a:t>Third level</a:t>
             </a:r>
           </a:p>
           <a:p>
             <a:pPr lvl="3"/>
             <a:r>
-              <a:rPr lang="en-US" smtClean="0"/>
+              <a:rPr lang="en-US"/>
               <a:t>Fourth level</a:t>
             </a:r>
           </a:p>
           <a:p>
             <a:pPr lvl="4"/>
             <a:r>
-              <a:rPr lang="en-US" smtClean="0"/>
+              <a:rPr lang="en-US"/>
               <a:t>Fifth level</a:t>
             </a:r>
-            <a:endParaRPr lang="en-US"/>
           </a:p>
         </p:txBody>
       </p:sp>
@@ -2598,7 +2246,7 @@
           <a:p>
             <a:pPr lvl="0"/>
             <a:r>
-              <a:rPr lang="en-US" smtClean="0"/>
+              <a:rPr lang="en-US"/>
               <a:t>Click to edit Master text styles</a:t>
             </a:r>
           </a:p>
@@ -2621,7 +2269,7 @@
           <a:p>
             <a:fld id="{5BCAD085-E8A6-8845-BD4E-CB4CCA059FC4}" type="datetimeFigureOut">
               <a:rPr lang="en-US" smtClean="0"/>
-              <a:t>1/27/13</a:t>
+              <a:t>8/17/2026</a:t>
             </a:fld>
             <a:endParaRPr lang="en-US"/>
           </a:p>
@@ -2724,10 +2372,9 @@
           </a:lstStyle>
           <a:p>
             <a:r>
-              <a:rPr lang="en-US" smtClean="0"/>
+              <a:rPr lang="en-US"/>
               <a:t>Click to edit Master title style</a:t>
             </a:r>
-            <a:endParaRPr lang="en-US"/>
           </a:p>
         </p:txBody>
       </p:sp>
@@ -2851,7 +2498,7 @@
           <a:p>
             <a:pPr lvl="0"/>
             <a:r>
-              <a:rPr lang="en-US" smtClean="0"/>
+              <a:rPr lang="en-US"/>
               <a:t>Click to edit Master text styles</a:t>
             </a:r>
           </a:p>
@@ -2874,7 +2521,7 @@
           <a:p>
             <a:fld id="{5BCAD085-E8A6-8845-BD4E-CB4CCA059FC4}" type="datetimeFigureOut">
               <a:rPr lang="en-US" smtClean="0"/>
-              <a:t>1/27/13</a:t>
+              <a:t>8/17/2026</a:t>
             </a:fld>
             <a:endParaRPr lang="en-US"/>
           </a:p>
@@ -2983,10 +2630,9 @@
           <a:lstStyle/>
           <a:p>
             <a:r>
-              <a:rPr lang="en-US" smtClean="0"/>
+              <a:rPr lang="en-US"/>
               <a:t>Click to edit Master title style</a:t>
             </a:r>
-            <a:endParaRPr lang="en-US"/>
           </a:p>
         </p:txBody>
       </p:sp>
@@ -3017,38 +2663,37 @@
           <a:p>
             <a:pPr lvl="0"/>
             <a:r>
-              <a:rPr lang="en-US" smtClean="0"/>
+              <a:rPr lang="en-US"/>
               <a:t>Click to edit Master text styles</a:t>
             </a:r>
           </a:p>
           <a:p>
             <a:pPr lvl="1"/>
             <a:r>
-              <a:rPr lang="en-US" smtClean="0"/>
+              <a:rPr lang="en-US"/>
               <a:t>Second level</a:t>
             </a:r>
           </a:p>
           <a:p>
             <a:pPr lvl="2"/>
             <a:r>
-              <a:rPr lang="en-US" smtClean="0"/>
+              <a:rPr lang="en-US"/>
               <a:t>Third level</a:t>
             </a:r>
           </a:p>
           <a:p>
             <a:pPr lvl="3"/>
             <a:r>
-              <a:rPr lang="en-US" smtClean="0"/>
+              <a:rPr lang="en-US"/>
               <a:t>Fourth level</a:t>
             </a:r>
           </a:p>
           <a:p>
             <a:pPr lvl="4"/>
             <a:r>
-              <a:rPr lang="en-US" smtClean="0"/>
+              <a:rPr lang="en-US"/>
               <a:t>Fifth level</a:t>
             </a:r>
-            <a:endParaRPr lang="en-US"/>
           </a:p>
         </p:txBody>
       </p:sp>
@@ -3087,7 +2732,7 @@
           <a:p>
             <a:fld id="{5BCAD085-E8A6-8845-BD4E-CB4CCA059FC4}" type="datetimeFigureOut">
               <a:rPr lang="en-US" smtClean="0"/>
-              <a:t>1/27/13</a:t>
+              <a:t>8/17/2026</a:t>
             </a:fld>
             <a:endParaRPr lang="en-US"/>
           </a:p>
@@ -3446,7 +3091,7 @@
 </file>
 
 <file path=ppt/slides/slide1.xml><?xml version="1.0" encoding="utf-8"?>
-<p:sld xmlns:a="http://schemas.openxmlformats.org/drawingml/2006/main" xmlns:p="http://schemas.openxmlformats.org/presentationml/2006/main" xmlns:r="http://schemas.openxmlformats.org/officeDocument/2006/relationships">
+<p:sld xmlns:a="http://schemas.openxmlformats.org/drawingml/2006/main" xmlns:r="http://schemas.openxmlformats.org/officeDocument/2006/relationships" xmlns:p="http://schemas.openxmlformats.org/presentationml/2006/main">
   <p:cSld>
     <p:spTree>
       <p:nvGrpSpPr>
@@ -3454,7 +3099,14 @@
         <p:cNvGrpSpPr/>
         <p:nvPr/>
       </p:nvGrpSpPr>
-      <p:grpSpPr/>
+      <p:grpSpPr>
+        <a:xfrm>
+          <a:off x="0" y="0"/>
+          <a:ext cx="0" cy="0"/>
+          <a:chOff x="0" y="0"/>
+          <a:chExt cx="0" cy="0"/>
+        </a:xfrm>
+      </p:grpSpPr>
       <p:sp>
         <p:nvSpPr>
           <p:cNvPr id="2" name="Rectangle 1"/>
@@ -3496,6 +3148,7 @@
           <a:lstStyle/>
           <a:p>
             <a:pPr algn="ctr"/>
+            <a:endParaRPr/>
           </a:p>
         </p:txBody>
       </p:sp>
@@ -3540,7 +3193,7 @@
           <a:noFill/>
         </p:spPr>
         <p:txBody>
-          <a:bodyPr wrap="square" lIns="0" rIns="0" tIns="0" bIns="0" anchor="t">
+          <a:bodyPr wrap="square" lIns="0" tIns="0" rIns="0" bIns="0" anchor="t">
             <a:spAutoFit/>
           </a:bodyPr>
           <a:lstStyle/>
@@ -3595,7 +3248,7 @@
           <a:noFill/>
         </p:spPr>
         <p:txBody>
-          <a:bodyPr wrap="square" lIns="0" rIns="0" tIns="0" bIns="0" anchor="t">
+          <a:bodyPr wrap="square" lIns="0" tIns="0" rIns="0" bIns="0" anchor="t">
             <a:spAutoFit/>
           </a:bodyPr>
           <a:lstStyle/>
@@ -3654,6 +3307,7 @@
           <a:lstStyle/>
           <a:p>
             <a:pPr algn="ctr"/>
+            <a:endParaRPr/>
           </a:p>
         </p:txBody>
       </p:sp>
@@ -3674,7 +3328,7 @@
           <a:noFill/>
         </p:spPr>
         <p:txBody>
-          <a:bodyPr wrap="square" lIns="0" rIns="0" tIns="0" bIns="0" anchor="t">
+          <a:bodyPr wrap="square" lIns="0" tIns="0" rIns="0" bIns="0" anchor="t">
             <a:spAutoFit/>
           </a:bodyPr>
           <a:lstStyle/>
@@ -3701,7 +3355,7 @@
 </file>
 
 <file path=ppt/slides/slide10.xml><?xml version="1.0" encoding="utf-8"?>
-<p:sld xmlns:a="http://schemas.openxmlformats.org/drawingml/2006/main" xmlns:p="http://schemas.openxmlformats.org/presentationml/2006/main" xmlns:r="http://schemas.openxmlformats.org/officeDocument/2006/relationships">
+<p:sld xmlns:a="http://schemas.openxmlformats.org/drawingml/2006/main" xmlns:r="http://schemas.openxmlformats.org/officeDocument/2006/relationships" xmlns:p="http://schemas.openxmlformats.org/presentationml/2006/main">
   <p:cSld>
     <p:spTree>
       <p:nvGrpSpPr>
@@ -3709,7 +3363,14 @@
         <p:cNvGrpSpPr/>
         <p:nvPr/>
       </p:nvGrpSpPr>
-      <p:grpSpPr/>
+      <p:grpSpPr>
+        <a:xfrm>
+          <a:off x="0" y="0"/>
+          <a:ext cx="0" cy="0"/>
+          <a:chOff x="0" y="0"/>
+          <a:chExt cx="0" cy="0"/>
+        </a:xfrm>
+      </p:grpSpPr>
       <p:sp>
         <p:nvSpPr>
           <p:cNvPr id="2" name="TextBox 1"/>
@@ -3727,7 +3388,7 @@
           <a:noFill/>
         </p:spPr>
         <p:txBody>
-          <a:bodyPr wrap="square" lIns="0" rIns="0" tIns="0" bIns="0" anchor="t">
+          <a:bodyPr wrap="square" lIns="0" tIns="0" rIns="0" bIns="0" anchor="t">
             <a:spAutoFit/>
           </a:bodyPr>
           <a:lstStyle/>
@@ -3762,7 +3423,7 @@
           <a:noFill/>
         </p:spPr>
         <p:txBody>
-          <a:bodyPr wrap="square" lIns="0" rIns="0" tIns="0" bIns="0" anchor="t">
+          <a:bodyPr wrap="square" lIns="0" tIns="0" rIns="0" bIns="0" anchor="t">
             <a:spAutoFit/>
           </a:bodyPr>
           <a:lstStyle/>
@@ -3841,7 +3502,7 @@
           </a:fontRef>
         </p:style>
         <p:txBody>
-          <a:bodyPr rtlCol="0" anchor="ctr" lIns="0" rIns="0" tIns="0" bIns="0"/>
+          <a:bodyPr lIns="0" tIns="0" rIns="0" bIns="0" rtlCol="0" anchor="ctr"/>
           <a:lstStyle/>
           <a:p>
             <a:pPr algn="ctr"/>
@@ -3874,7 +3535,7 @@
           <a:noFill/>
         </p:spPr>
         <p:txBody>
-          <a:bodyPr wrap="square" lIns="0" rIns="0" tIns="0" bIns="0" anchor="t">
+          <a:bodyPr wrap="square" lIns="0" tIns="0" rIns="0" bIns="0" anchor="t">
             <a:spAutoFit/>
           </a:bodyPr>
           <a:lstStyle/>
@@ -3909,7 +3570,7 @@
           <a:noFill/>
         </p:spPr>
         <p:txBody>
-          <a:bodyPr wrap="square" lIns="0" rIns="0" tIns="0" bIns="0" anchor="t">
+          <a:bodyPr wrap="square" lIns="0" tIns="0" rIns="0" bIns="0" anchor="t">
             <a:spAutoFit/>
           </a:bodyPr>
           <a:lstStyle/>
@@ -3964,7 +3625,7 @@
           </a:fontRef>
         </p:style>
         <p:txBody>
-          <a:bodyPr rtlCol="0" anchor="ctr" lIns="0" rIns="0" tIns="0" bIns="0"/>
+          <a:bodyPr lIns="0" tIns="0" rIns="0" bIns="0" rtlCol="0" anchor="ctr"/>
           <a:lstStyle/>
           <a:p>
             <a:pPr algn="ctr"/>
@@ -3997,7 +3658,7 @@
           <a:noFill/>
         </p:spPr>
         <p:txBody>
-          <a:bodyPr wrap="square" lIns="0" rIns="0" tIns="0" bIns="0" anchor="t">
+          <a:bodyPr wrap="square" lIns="0" tIns="0" rIns="0" bIns="0" anchor="t">
             <a:spAutoFit/>
           </a:bodyPr>
           <a:lstStyle/>
@@ -4032,7 +3693,7 @@
           <a:noFill/>
         </p:spPr>
         <p:txBody>
-          <a:bodyPr wrap="square" lIns="0" rIns="0" tIns="0" bIns="0" anchor="t">
+          <a:bodyPr wrap="square" lIns="0" tIns="0" rIns="0" bIns="0" anchor="t">
             <a:spAutoFit/>
           </a:bodyPr>
           <a:lstStyle/>
@@ -4087,7 +3748,7 @@
           </a:fontRef>
         </p:style>
         <p:txBody>
-          <a:bodyPr rtlCol="0" anchor="ctr" lIns="0" rIns="0" tIns="0" bIns="0"/>
+          <a:bodyPr lIns="0" tIns="0" rIns="0" bIns="0" rtlCol="0" anchor="ctr"/>
           <a:lstStyle/>
           <a:p>
             <a:pPr algn="ctr"/>
@@ -4120,7 +3781,7 @@
           <a:noFill/>
         </p:spPr>
         <p:txBody>
-          <a:bodyPr wrap="square" lIns="0" rIns="0" tIns="0" bIns="0" anchor="t">
+          <a:bodyPr wrap="square" lIns="0" tIns="0" rIns="0" bIns="0" anchor="t">
             <a:spAutoFit/>
           </a:bodyPr>
           <a:lstStyle/>
@@ -4155,7 +3816,7 @@
           <a:noFill/>
         </p:spPr>
         <p:txBody>
-          <a:bodyPr wrap="square" lIns="0" rIns="0" tIns="0" bIns="0" anchor="t">
+          <a:bodyPr wrap="square" lIns="0" tIns="0" rIns="0" bIns="0" anchor="t">
             <a:spAutoFit/>
           </a:bodyPr>
           <a:lstStyle/>
@@ -4210,7 +3871,7 @@
           </a:fontRef>
         </p:style>
         <p:txBody>
-          <a:bodyPr rtlCol="0" anchor="ctr" lIns="0" rIns="0" tIns="0" bIns="0"/>
+          <a:bodyPr lIns="0" tIns="0" rIns="0" bIns="0" rtlCol="0" anchor="ctr"/>
           <a:lstStyle/>
           <a:p>
             <a:pPr algn="ctr"/>
@@ -4243,7 +3904,7 @@
           <a:noFill/>
         </p:spPr>
         <p:txBody>
-          <a:bodyPr wrap="square" lIns="0" rIns="0" tIns="0" bIns="0" anchor="t">
+          <a:bodyPr wrap="square" lIns="0" tIns="0" rIns="0" bIns="0" anchor="t">
             <a:spAutoFit/>
           </a:bodyPr>
           <a:lstStyle/>
@@ -4278,7 +3939,7 @@
           <a:noFill/>
         </p:spPr>
         <p:txBody>
-          <a:bodyPr wrap="square" lIns="0" rIns="0" tIns="0" bIns="0" anchor="t">
+          <a:bodyPr wrap="square" lIns="0" tIns="0" rIns="0" bIns="0" anchor="t">
             <a:spAutoFit/>
           </a:bodyPr>
           <a:lstStyle/>
@@ -4333,7 +3994,7 @@
           </a:fontRef>
         </p:style>
         <p:txBody>
-          <a:bodyPr rtlCol="0" anchor="ctr" lIns="0" rIns="0" tIns="0" bIns="0"/>
+          <a:bodyPr lIns="0" tIns="0" rIns="0" bIns="0" rtlCol="0" anchor="ctr"/>
           <a:lstStyle/>
           <a:p>
             <a:pPr algn="ctr"/>
@@ -4366,7 +4027,7 @@
           <a:noFill/>
         </p:spPr>
         <p:txBody>
-          <a:bodyPr wrap="square" lIns="0" rIns="0" tIns="0" bIns="0" anchor="t">
+          <a:bodyPr wrap="square" lIns="0" tIns="0" rIns="0" bIns="0" anchor="t">
             <a:spAutoFit/>
           </a:bodyPr>
           <a:lstStyle/>
@@ -4401,7 +4062,7 @@
           <a:noFill/>
         </p:spPr>
         <p:txBody>
-          <a:bodyPr wrap="square" lIns="0" rIns="0" tIns="0" bIns="0" anchor="t">
+          <a:bodyPr wrap="square" lIns="0" tIns="0" rIns="0" bIns="0" anchor="t">
             <a:spAutoFit/>
           </a:bodyPr>
           <a:lstStyle/>
@@ -4436,7 +4097,7 @@
           <a:noFill/>
         </p:spPr>
         <p:txBody>
-          <a:bodyPr wrap="square" lIns="0" rIns="0" tIns="0" bIns="0" anchor="t">
+          <a:bodyPr wrap="square" lIns="0" tIns="0" rIns="0" bIns="0" anchor="t">
             <a:spAutoFit/>
           </a:bodyPr>
           <a:lstStyle/>
@@ -4463,7 +4124,7 @@
 </file>
 
 <file path=ppt/slides/slide11.xml><?xml version="1.0" encoding="utf-8"?>
-<p:sld xmlns:a="http://schemas.openxmlformats.org/drawingml/2006/main" xmlns:p="http://schemas.openxmlformats.org/presentationml/2006/main" xmlns:r="http://schemas.openxmlformats.org/officeDocument/2006/relationships">
+<p:sld xmlns:a="http://schemas.openxmlformats.org/drawingml/2006/main" xmlns:r="http://schemas.openxmlformats.org/officeDocument/2006/relationships" xmlns:p="http://schemas.openxmlformats.org/presentationml/2006/main">
   <p:cSld>
     <p:spTree>
       <p:nvGrpSpPr>
@@ -4471,7 +4132,14 @@
         <p:cNvGrpSpPr/>
         <p:nvPr/>
       </p:nvGrpSpPr>
-      <p:grpSpPr/>
+      <p:grpSpPr>
+        <a:xfrm>
+          <a:off x="0" y="0"/>
+          <a:ext cx="0" cy="0"/>
+          <a:chOff x="0" y="0"/>
+          <a:chExt cx="0" cy="0"/>
+        </a:xfrm>
+      </p:grpSpPr>
       <p:sp>
         <p:nvSpPr>
           <p:cNvPr id="2" name="Rectangle 1"/>
@@ -4513,6 +4181,7 @@
           <a:lstStyle/>
           <a:p>
             <a:pPr algn="ctr"/>
+            <a:endParaRPr/>
           </a:p>
         </p:txBody>
       </p:sp>
@@ -4533,7 +4202,7 @@
           <a:noFill/>
         </p:spPr>
         <p:txBody>
-          <a:bodyPr wrap="square" lIns="0" rIns="0" tIns="0" bIns="0" anchor="t">
+          <a:bodyPr wrap="square" lIns="0" tIns="0" rIns="0" bIns="0" anchor="t">
             <a:spAutoFit/>
           </a:bodyPr>
           <a:lstStyle/>
@@ -4646,6 +4315,7 @@
           <a:lstStyle/>
           <a:p>
             <a:pPr algn="ctr"/>
+            <a:endParaRPr/>
           </a:p>
         </p:txBody>
       </p:sp>
@@ -4666,7 +4336,7 @@
           <a:noFill/>
         </p:spPr>
         <p:txBody>
-          <a:bodyPr wrap="square" lIns="0" rIns="0" tIns="0" bIns="0" anchor="t">
+          <a:bodyPr wrap="square" lIns="0" tIns="0" rIns="0" bIns="0" anchor="t">
             <a:spAutoFit/>
           </a:bodyPr>
           <a:lstStyle/>
@@ -4701,7 +4371,7 @@
           <a:noFill/>
         </p:spPr>
         <p:txBody>
-          <a:bodyPr wrap="square" lIns="0" rIns="0" tIns="0" bIns="0" anchor="t">
+          <a:bodyPr wrap="square" lIns="0" tIns="0" rIns="0" bIns="0" anchor="t">
             <a:spAutoFit/>
           </a:bodyPr>
           <a:lstStyle/>
@@ -4728,7 +4398,7 @@
 </file>
 
 <file path=ppt/slides/slide12.xml><?xml version="1.0" encoding="utf-8"?>
-<p:sld xmlns:a="http://schemas.openxmlformats.org/drawingml/2006/main" xmlns:p="http://schemas.openxmlformats.org/presentationml/2006/main" xmlns:r="http://schemas.openxmlformats.org/officeDocument/2006/relationships">
+<p:sld xmlns:a="http://schemas.openxmlformats.org/drawingml/2006/main" xmlns:r="http://schemas.openxmlformats.org/officeDocument/2006/relationships" xmlns:p="http://schemas.openxmlformats.org/presentationml/2006/main">
   <p:cSld>
     <p:spTree>
       <p:nvGrpSpPr>
@@ -4736,7 +4406,14 @@
         <p:cNvGrpSpPr/>
         <p:nvPr/>
       </p:nvGrpSpPr>
-      <p:grpSpPr/>
+      <p:grpSpPr>
+        <a:xfrm>
+          <a:off x="0" y="0"/>
+          <a:ext cx="0" cy="0"/>
+          <a:chOff x="0" y="0"/>
+          <a:chExt cx="0" cy="0"/>
+        </a:xfrm>
+      </p:grpSpPr>
       <p:sp>
         <p:nvSpPr>
           <p:cNvPr id="2" name="TextBox 1"/>
@@ -4754,7 +4431,7 @@
           <a:noFill/>
         </p:spPr>
         <p:txBody>
-          <a:bodyPr wrap="square" lIns="0" rIns="0" tIns="0" bIns="0" anchor="t">
+          <a:bodyPr wrap="square" lIns="0" tIns="0" rIns="0" bIns="0" anchor="t">
             <a:spAutoFit/>
           </a:bodyPr>
           <a:lstStyle/>
@@ -4789,7 +4466,7 @@
           <a:noFill/>
         </p:spPr>
         <p:txBody>
-          <a:bodyPr wrap="square" lIns="0" rIns="0" tIns="0" bIns="0" anchor="t">
+          <a:bodyPr wrap="square" lIns="0" tIns="0" rIns="0" bIns="0" anchor="t">
             <a:spAutoFit/>
           </a:bodyPr>
           <a:lstStyle/>
@@ -4848,7 +4525,7 @@
           <a:noFill/>
         </p:spPr>
         <p:txBody>
-          <a:bodyPr wrap="square" lIns="0" rIns="0" tIns="0" bIns="0" anchor="t">
+          <a:bodyPr wrap="square" lIns="0" tIns="0" rIns="0" bIns="0" anchor="t">
             <a:spAutoFit/>
           </a:bodyPr>
           <a:lstStyle/>
@@ -4909,6 +4586,7 @@
           <a:lstStyle/>
           <a:p>
             <a:pPr algn="ctr"/>
+            <a:endParaRPr/>
           </a:p>
         </p:txBody>
       </p:sp>
@@ -4929,7 +4607,7 @@
           <a:noFill/>
         </p:spPr>
         <p:txBody>
-          <a:bodyPr wrap="square" lIns="0" rIns="0" tIns="0" bIns="0" anchor="t">
+          <a:bodyPr wrap="square" lIns="0" tIns="0" rIns="0" bIns="0" anchor="t">
             <a:spAutoFit/>
           </a:bodyPr>
           <a:lstStyle/>
@@ -4988,6 +4666,7 @@
           <a:lstStyle/>
           <a:p>
             <a:pPr algn="ctr"/>
+            <a:endParaRPr/>
           </a:p>
         </p:txBody>
       </p:sp>
@@ -5008,7 +4687,7 @@
           <a:noFill/>
         </p:spPr>
         <p:txBody>
-          <a:bodyPr wrap="square" lIns="0" rIns="0" tIns="0" bIns="0" anchor="t">
+          <a:bodyPr wrap="square" lIns="0" tIns="0" rIns="0" bIns="0" anchor="t">
             <a:spAutoFit/>
           </a:bodyPr>
           <a:lstStyle/>
@@ -5067,6 +4746,7 @@
           <a:lstStyle/>
           <a:p>
             <a:pPr algn="ctr"/>
+            <a:endParaRPr/>
           </a:p>
         </p:txBody>
       </p:sp>
@@ -5087,7 +4767,7 @@
           <a:noFill/>
         </p:spPr>
         <p:txBody>
-          <a:bodyPr wrap="square" lIns="0" rIns="0" tIns="0" bIns="0" anchor="t">
+          <a:bodyPr wrap="square" lIns="0" tIns="0" rIns="0" bIns="0" anchor="t">
             <a:spAutoFit/>
           </a:bodyPr>
           <a:lstStyle/>
@@ -5146,6 +4826,7 @@
           <a:lstStyle/>
           <a:p>
             <a:pPr algn="ctr"/>
+            <a:endParaRPr/>
           </a:p>
         </p:txBody>
       </p:sp>
@@ -5166,7 +4847,7 @@
           <a:noFill/>
         </p:spPr>
         <p:txBody>
-          <a:bodyPr wrap="square" lIns="0" rIns="0" tIns="0" bIns="0" anchor="t">
+          <a:bodyPr wrap="square" lIns="0" tIns="0" rIns="0" bIns="0" anchor="t">
             <a:spAutoFit/>
           </a:bodyPr>
           <a:lstStyle/>
@@ -5225,6 +4906,7 @@
           <a:lstStyle/>
           <a:p>
             <a:pPr algn="ctr"/>
+            <a:endParaRPr/>
           </a:p>
         </p:txBody>
       </p:sp>
@@ -5245,7 +4927,7 @@
           <a:noFill/>
         </p:spPr>
         <p:txBody>
-          <a:bodyPr wrap="square" lIns="0" rIns="0" tIns="0" bIns="0" anchor="t">
+          <a:bodyPr wrap="square" lIns="0" tIns="0" rIns="0" bIns="0" anchor="t">
             <a:spAutoFit/>
           </a:bodyPr>
           <a:lstStyle/>
@@ -5306,6 +4988,7 @@
           <a:lstStyle/>
           <a:p>
             <a:pPr algn="ctr"/>
+            <a:endParaRPr/>
           </a:p>
         </p:txBody>
       </p:sp>
@@ -5326,7 +5009,7 @@
           <a:noFill/>
         </p:spPr>
         <p:txBody>
-          <a:bodyPr wrap="square" lIns="0" rIns="0" tIns="0" bIns="0" anchor="t">
+          <a:bodyPr wrap="square" lIns="0" tIns="0" rIns="0" bIns="0" anchor="t">
             <a:spAutoFit/>
           </a:bodyPr>
           <a:lstStyle/>
@@ -5361,7 +5044,7 @@
           <a:noFill/>
         </p:spPr>
         <p:txBody>
-          <a:bodyPr wrap="square" lIns="0" rIns="0" tIns="0" bIns="0">
+          <a:bodyPr wrap="square" lIns="0" tIns="0" rIns="0" bIns="0">
             <a:spAutoFit/>
           </a:bodyPr>
           <a:lstStyle/>
@@ -5456,7 +5139,7 @@
 </file>
 
 <file path=ppt/slides/slide13.xml><?xml version="1.0" encoding="utf-8"?>
-<p:sld xmlns:a="http://schemas.openxmlformats.org/drawingml/2006/main" xmlns:p="http://schemas.openxmlformats.org/presentationml/2006/main" xmlns:r="http://schemas.openxmlformats.org/officeDocument/2006/relationships">
+<p:sld xmlns:a="http://schemas.openxmlformats.org/drawingml/2006/main" xmlns:r="http://schemas.openxmlformats.org/officeDocument/2006/relationships" xmlns:p="http://schemas.openxmlformats.org/presentationml/2006/main">
   <p:cSld>
     <p:spTree>
       <p:nvGrpSpPr>
@@ -5464,7 +5147,14 @@
         <p:cNvGrpSpPr/>
         <p:nvPr/>
       </p:nvGrpSpPr>
-      <p:grpSpPr/>
+      <p:grpSpPr>
+        <a:xfrm>
+          <a:off x="0" y="0"/>
+          <a:ext cx="0" cy="0"/>
+          <a:chOff x="0" y="0"/>
+          <a:chExt cx="0" cy="0"/>
+        </a:xfrm>
+      </p:grpSpPr>
       <p:sp>
         <p:nvSpPr>
           <p:cNvPr id="2" name="Rectangle 1"/>
@@ -5506,6 +5196,7 @@
           <a:lstStyle/>
           <a:p>
             <a:pPr algn="ctr"/>
+            <a:endParaRPr/>
           </a:p>
         </p:txBody>
       </p:sp>
@@ -5526,7 +5217,7 @@
           <a:noFill/>
         </p:spPr>
         <p:txBody>
-          <a:bodyPr wrap="square" lIns="0" rIns="0" tIns="0" bIns="0" anchor="t">
+          <a:bodyPr wrap="square" lIns="0" tIns="0" rIns="0" bIns="0" anchor="t">
             <a:spAutoFit/>
           </a:bodyPr>
           <a:lstStyle/>
@@ -5581,7 +5272,7 @@
           <a:noFill/>
         </p:spPr>
         <p:txBody>
-          <a:bodyPr wrap="square" lIns="0" rIns="0" tIns="0" bIns="0" anchor="t">
+          <a:bodyPr wrap="square" lIns="0" tIns="0" rIns="0" bIns="0" anchor="t">
             <a:spAutoFit/>
           </a:bodyPr>
           <a:lstStyle/>
@@ -5608,7 +5299,7 @@
 </file>
 
 <file path=ppt/slides/slide14.xml><?xml version="1.0" encoding="utf-8"?>
-<p:sld xmlns:a="http://schemas.openxmlformats.org/drawingml/2006/main" xmlns:p="http://schemas.openxmlformats.org/presentationml/2006/main" xmlns:r="http://schemas.openxmlformats.org/officeDocument/2006/relationships">
+<p:sld xmlns:a="http://schemas.openxmlformats.org/drawingml/2006/main" xmlns:r="http://schemas.openxmlformats.org/officeDocument/2006/relationships" xmlns:p="http://schemas.openxmlformats.org/presentationml/2006/main">
   <p:cSld>
     <p:spTree>
       <p:nvGrpSpPr>
@@ -5616,7 +5307,14 @@
         <p:cNvGrpSpPr/>
         <p:nvPr/>
       </p:nvGrpSpPr>
-      <p:grpSpPr/>
+      <p:grpSpPr>
+        <a:xfrm>
+          <a:off x="0" y="0"/>
+          <a:ext cx="0" cy="0"/>
+          <a:chOff x="0" y="0"/>
+          <a:chExt cx="0" cy="0"/>
+        </a:xfrm>
+      </p:grpSpPr>
       <p:sp>
         <p:nvSpPr>
           <p:cNvPr id="2" name="TextBox 1"/>
@@ -5634,7 +5332,7 @@
           <a:noFill/>
         </p:spPr>
         <p:txBody>
-          <a:bodyPr wrap="square" lIns="0" rIns="0" tIns="0" bIns="0" anchor="t">
+          <a:bodyPr wrap="square" lIns="0" tIns="0" rIns="0" bIns="0" anchor="t">
             <a:spAutoFit/>
           </a:bodyPr>
           <a:lstStyle/>
@@ -5669,7 +5367,7 @@
           <a:noFill/>
         </p:spPr>
         <p:txBody>
-          <a:bodyPr wrap="square" lIns="0" rIns="0" tIns="0" bIns="0" anchor="t">
+          <a:bodyPr wrap="square" lIns="0" tIns="0" rIns="0" bIns="0" anchor="t">
             <a:spAutoFit/>
           </a:bodyPr>
           <a:lstStyle/>
@@ -5748,7 +5446,7 @@
           </a:fontRef>
         </p:style>
         <p:txBody>
-          <a:bodyPr rtlCol="0" anchor="ctr" lIns="0" rIns="0" tIns="0" bIns="0"/>
+          <a:bodyPr lIns="0" tIns="0" rIns="0" bIns="0" rtlCol="0" anchor="ctr"/>
           <a:lstStyle/>
           <a:p>
             <a:pPr algn="ctr"/>
@@ -5781,7 +5479,7 @@
           <a:noFill/>
         </p:spPr>
         <p:txBody>
-          <a:bodyPr wrap="square" lIns="0" rIns="0" tIns="0" bIns="0" anchor="t">
+          <a:bodyPr wrap="square" lIns="0" tIns="0" rIns="0" bIns="0" anchor="t">
             <a:spAutoFit/>
           </a:bodyPr>
           <a:lstStyle/>
@@ -5816,7 +5514,7 @@
           <a:noFill/>
         </p:spPr>
         <p:txBody>
-          <a:bodyPr wrap="square" lIns="0" rIns="0" tIns="0" bIns="0" anchor="t">
+          <a:bodyPr wrap="square" lIns="0" tIns="0" rIns="0" bIns="0" anchor="t">
             <a:spAutoFit/>
           </a:bodyPr>
           <a:lstStyle/>
@@ -5871,7 +5569,7 @@
           </a:fontRef>
         </p:style>
         <p:txBody>
-          <a:bodyPr rtlCol="0" anchor="ctr" lIns="0" rIns="0" tIns="0" bIns="0"/>
+          <a:bodyPr lIns="0" tIns="0" rIns="0" bIns="0" rtlCol="0" anchor="ctr"/>
           <a:lstStyle/>
           <a:p>
             <a:pPr algn="ctr"/>
@@ -5904,7 +5602,7 @@
           <a:noFill/>
         </p:spPr>
         <p:txBody>
-          <a:bodyPr wrap="square" lIns="0" rIns="0" tIns="0" bIns="0" anchor="t">
+          <a:bodyPr wrap="square" lIns="0" tIns="0" rIns="0" bIns="0" anchor="t">
             <a:spAutoFit/>
           </a:bodyPr>
           <a:lstStyle/>
@@ -5939,7 +5637,7 @@
           <a:noFill/>
         </p:spPr>
         <p:txBody>
-          <a:bodyPr wrap="square" lIns="0" rIns="0" tIns="0" bIns="0" anchor="t">
+          <a:bodyPr wrap="square" lIns="0" tIns="0" rIns="0" bIns="0" anchor="t">
             <a:spAutoFit/>
           </a:bodyPr>
           <a:lstStyle/>
@@ -5966,7 +5664,7 @@
 </file>
 
 <file path=ppt/slides/slide15.xml><?xml version="1.0" encoding="utf-8"?>
-<p:sld xmlns:a="http://schemas.openxmlformats.org/drawingml/2006/main" xmlns:p="http://schemas.openxmlformats.org/presentationml/2006/main" xmlns:r="http://schemas.openxmlformats.org/officeDocument/2006/relationships">
+<p:sld xmlns:a="http://schemas.openxmlformats.org/drawingml/2006/main" xmlns:r="http://schemas.openxmlformats.org/officeDocument/2006/relationships" xmlns:p="http://schemas.openxmlformats.org/presentationml/2006/main">
   <p:cSld>
     <p:spTree>
       <p:nvGrpSpPr>
@@ -5974,7 +5672,14 @@
         <p:cNvGrpSpPr/>
         <p:nvPr/>
       </p:nvGrpSpPr>
-      <p:grpSpPr/>
+      <p:grpSpPr>
+        <a:xfrm>
+          <a:off x="0" y="0"/>
+          <a:ext cx="0" cy="0"/>
+          <a:chOff x="0" y="0"/>
+          <a:chExt cx="0" cy="0"/>
+        </a:xfrm>
+      </p:grpSpPr>
       <p:sp>
         <p:nvSpPr>
           <p:cNvPr id="2" name="TextBox 1"/>
@@ -5992,7 +5697,7 @@
           <a:noFill/>
         </p:spPr>
         <p:txBody>
-          <a:bodyPr wrap="square" lIns="0" rIns="0" tIns="0" bIns="0" anchor="t">
+          <a:bodyPr wrap="square" lIns="0" tIns="0" rIns="0" bIns="0" anchor="t">
             <a:spAutoFit/>
           </a:bodyPr>
           <a:lstStyle/>
@@ -6027,7 +5732,7 @@
           <a:noFill/>
         </p:spPr>
         <p:txBody>
-          <a:bodyPr wrap="square" lIns="0" rIns="0" tIns="0" bIns="0" anchor="t">
+          <a:bodyPr wrap="square" lIns="0" tIns="0" rIns="0" bIns="0" anchor="t">
             <a:spAutoFit/>
           </a:bodyPr>
           <a:lstStyle/>
@@ -6112,6 +5817,7 @@
           <a:lstStyle/>
           <a:p>
             <a:pPr algn="ctr"/>
+            <a:endParaRPr/>
           </a:p>
         </p:txBody>
       </p:sp>
@@ -6152,7 +5858,7 @@
           </a:fontRef>
         </p:style>
         <p:txBody>
-          <a:bodyPr rtlCol="0" anchor="ctr" lIns="0" rIns="0" tIns="0" bIns="0"/>
+          <a:bodyPr lIns="0" tIns="0" rIns="0" bIns="0" rtlCol="0" anchor="ctr"/>
           <a:lstStyle/>
           <a:p>
             <a:pPr algn="ctr"/>
@@ -6185,7 +5891,7 @@
           <a:noFill/>
         </p:spPr>
         <p:txBody>
-          <a:bodyPr wrap="square" lIns="0" rIns="0" tIns="0" bIns="0" anchor="t">
+          <a:bodyPr wrap="square" lIns="0" tIns="0" rIns="0" bIns="0" anchor="t">
             <a:spAutoFit/>
           </a:bodyPr>
           <a:lstStyle/>
@@ -6220,7 +5926,7 @@
           <a:noFill/>
         </p:spPr>
         <p:txBody>
-          <a:bodyPr wrap="square" lIns="0" rIns="0" tIns="0" bIns="0" anchor="t">
+          <a:bodyPr wrap="square" lIns="0" tIns="0" rIns="0" bIns="0" anchor="t">
             <a:spAutoFit/>
           </a:bodyPr>
           <a:lstStyle/>
@@ -6281,6 +5987,7 @@
           <a:lstStyle/>
           <a:p>
             <a:pPr algn="ctr"/>
+            <a:endParaRPr/>
           </a:p>
         </p:txBody>
       </p:sp>
@@ -6321,7 +6028,7 @@
           </a:fontRef>
         </p:style>
         <p:txBody>
-          <a:bodyPr rtlCol="0" anchor="ctr" lIns="0" rIns="0" tIns="0" bIns="0"/>
+          <a:bodyPr lIns="0" tIns="0" rIns="0" bIns="0" rtlCol="0" anchor="ctr"/>
           <a:lstStyle/>
           <a:p>
             <a:pPr algn="ctr"/>
@@ -6354,7 +6061,7 @@
           <a:noFill/>
         </p:spPr>
         <p:txBody>
-          <a:bodyPr wrap="square" lIns="0" rIns="0" tIns="0" bIns="0" anchor="t">
+          <a:bodyPr wrap="square" lIns="0" tIns="0" rIns="0" bIns="0" anchor="t">
             <a:spAutoFit/>
           </a:bodyPr>
           <a:lstStyle/>
@@ -6389,7 +6096,7 @@
           <a:noFill/>
         </p:spPr>
         <p:txBody>
-          <a:bodyPr wrap="square" lIns="0" rIns="0" tIns="0" bIns="0" anchor="t">
+          <a:bodyPr wrap="square" lIns="0" tIns="0" rIns="0" bIns="0" anchor="t">
             <a:spAutoFit/>
           </a:bodyPr>
           <a:lstStyle/>
@@ -6450,6 +6157,7 @@
           <a:lstStyle/>
           <a:p>
             <a:pPr algn="ctr"/>
+            <a:endParaRPr/>
           </a:p>
         </p:txBody>
       </p:sp>
@@ -6490,7 +6198,7 @@
           </a:fontRef>
         </p:style>
         <p:txBody>
-          <a:bodyPr rtlCol="0" anchor="ctr" lIns="0" rIns="0" tIns="0" bIns="0"/>
+          <a:bodyPr lIns="0" tIns="0" rIns="0" bIns="0" rtlCol="0" anchor="ctr"/>
           <a:lstStyle/>
           <a:p>
             <a:pPr algn="ctr"/>
@@ -6523,7 +6231,7 @@
           <a:noFill/>
         </p:spPr>
         <p:txBody>
-          <a:bodyPr wrap="square" lIns="0" rIns="0" tIns="0" bIns="0" anchor="t">
+          <a:bodyPr wrap="square" lIns="0" tIns="0" rIns="0" bIns="0" anchor="t">
             <a:spAutoFit/>
           </a:bodyPr>
           <a:lstStyle/>
@@ -6558,7 +6266,7 @@
           <a:noFill/>
         </p:spPr>
         <p:txBody>
-          <a:bodyPr wrap="square" lIns="0" rIns="0" tIns="0" bIns="0" anchor="t">
+          <a:bodyPr wrap="square" lIns="0" tIns="0" rIns="0" bIns="0" anchor="t">
             <a:spAutoFit/>
           </a:bodyPr>
           <a:lstStyle/>
@@ -6619,6 +6327,7 @@
           <a:lstStyle/>
           <a:p>
             <a:pPr algn="ctr"/>
+            <a:endParaRPr/>
           </a:p>
         </p:txBody>
       </p:sp>
@@ -6659,7 +6368,7 @@
           </a:fontRef>
         </p:style>
         <p:txBody>
-          <a:bodyPr rtlCol="0" anchor="ctr" lIns="0" rIns="0" tIns="0" bIns="0"/>
+          <a:bodyPr lIns="0" tIns="0" rIns="0" bIns="0" rtlCol="0" anchor="ctr"/>
           <a:lstStyle/>
           <a:p>
             <a:pPr algn="ctr"/>
@@ -6692,7 +6401,7 @@
           <a:noFill/>
         </p:spPr>
         <p:txBody>
-          <a:bodyPr wrap="square" lIns="0" rIns="0" tIns="0" bIns="0" anchor="t">
+          <a:bodyPr wrap="square" lIns="0" tIns="0" rIns="0" bIns="0" anchor="t">
             <a:spAutoFit/>
           </a:bodyPr>
           <a:lstStyle/>
@@ -6727,7 +6436,7 @@
           <a:noFill/>
         </p:spPr>
         <p:txBody>
-          <a:bodyPr wrap="square" lIns="0" rIns="0" tIns="0" bIns="0" anchor="t">
+          <a:bodyPr wrap="square" lIns="0" tIns="0" rIns="0" bIns="0" anchor="t">
             <a:spAutoFit/>
           </a:bodyPr>
           <a:lstStyle/>
@@ -6788,6 +6497,7 @@
           <a:lstStyle/>
           <a:p>
             <a:pPr algn="ctr"/>
+            <a:endParaRPr/>
           </a:p>
         </p:txBody>
       </p:sp>
@@ -6828,7 +6538,7 @@
           </a:fontRef>
         </p:style>
         <p:txBody>
-          <a:bodyPr rtlCol="0" anchor="ctr" lIns="0" rIns="0" tIns="0" bIns="0"/>
+          <a:bodyPr lIns="0" tIns="0" rIns="0" bIns="0" rtlCol="0" anchor="ctr"/>
           <a:lstStyle/>
           <a:p>
             <a:pPr algn="ctr"/>
@@ -6861,7 +6571,7 @@
           <a:noFill/>
         </p:spPr>
         <p:txBody>
-          <a:bodyPr wrap="square" lIns="0" rIns="0" tIns="0" bIns="0" anchor="t">
+          <a:bodyPr wrap="square" lIns="0" tIns="0" rIns="0" bIns="0" anchor="t">
             <a:spAutoFit/>
           </a:bodyPr>
           <a:lstStyle/>
@@ -6896,7 +6606,7 @@
           <a:noFill/>
         </p:spPr>
         <p:txBody>
-          <a:bodyPr wrap="square" lIns="0" rIns="0" tIns="0" bIns="0" anchor="t">
+          <a:bodyPr wrap="square" lIns="0" tIns="0" rIns="0" bIns="0" anchor="t">
             <a:spAutoFit/>
           </a:bodyPr>
           <a:lstStyle/>
@@ -6957,6 +6667,7 @@
           <a:lstStyle/>
           <a:p>
             <a:pPr algn="ctr"/>
+            <a:endParaRPr/>
           </a:p>
         </p:txBody>
       </p:sp>
@@ -6997,7 +6708,7 @@
           </a:fontRef>
         </p:style>
         <p:txBody>
-          <a:bodyPr rtlCol="0" anchor="ctr" lIns="0" rIns="0" tIns="0" bIns="0"/>
+          <a:bodyPr lIns="0" tIns="0" rIns="0" bIns="0" rtlCol="0" anchor="ctr"/>
           <a:lstStyle/>
           <a:p>
             <a:pPr algn="ctr"/>
@@ -7030,7 +6741,7 @@
           <a:noFill/>
         </p:spPr>
         <p:txBody>
-          <a:bodyPr wrap="square" lIns="0" rIns="0" tIns="0" bIns="0" anchor="t">
+          <a:bodyPr wrap="square" lIns="0" tIns="0" rIns="0" bIns="0" anchor="t">
             <a:spAutoFit/>
           </a:bodyPr>
           <a:lstStyle/>
@@ -7065,7 +6776,7 @@
           <a:noFill/>
         </p:spPr>
         <p:txBody>
-          <a:bodyPr wrap="square" lIns="0" rIns="0" tIns="0" bIns="0" anchor="t">
+          <a:bodyPr wrap="square" lIns="0" tIns="0" rIns="0" bIns="0" anchor="t">
             <a:spAutoFit/>
           </a:bodyPr>
           <a:lstStyle/>
@@ -7126,6 +6837,7 @@
           <a:lstStyle/>
           <a:p>
             <a:pPr algn="ctr"/>
+            <a:endParaRPr/>
           </a:p>
         </p:txBody>
       </p:sp>
@@ -7166,7 +6878,7 @@
           </a:fontRef>
         </p:style>
         <p:txBody>
-          <a:bodyPr rtlCol="0" anchor="ctr" lIns="0" rIns="0" tIns="0" bIns="0"/>
+          <a:bodyPr lIns="0" tIns="0" rIns="0" bIns="0" rtlCol="0" anchor="ctr"/>
           <a:lstStyle/>
           <a:p>
             <a:pPr algn="ctr"/>
@@ -7199,7 +6911,7 @@
           <a:noFill/>
         </p:spPr>
         <p:txBody>
-          <a:bodyPr wrap="square" lIns="0" rIns="0" tIns="0" bIns="0" anchor="t">
+          <a:bodyPr wrap="square" lIns="0" tIns="0" rIns="0" bIns="0" anchor="t">
             <a:spAutoFit/>
           </a:bodyPr>
           <a:lstStyle/>
@@ -7234,7 +6946,7 @@
           <a:noFill/>
         </p:spPr>
         <p:txBody>
-          <a:bodyPr wrap="square" lIns="0" rIns="0" tIns="0" bIns="0" anchor="t">
+          <a:bodyPr wrap="square" lIns="0" tIns="0" rIns="0" bIns="0" anchor="t">
             <a:spAutoFit/>
           </a:bodyPr>
           <a:lstStyle/>
@@ -7269,7 +6981,7 @@
           <a:noFill/>
         </p:spPr>
         <p:txBody>
-          <a:bodyPr wrap="square" lIns="0" rIns="0" tIns="0" bIns="0" anchor="t">
+          <a:bodyPr wrap="square" lIns="0" tIns="0" rIns="0" bIns="0" anchor="t">
             <a:spAutoFit/>
           </a:bodyPr>
           <a:lstStyle/>
@@ -7296,7 +7008,7 @@
 </file>
 
 <file path=ppt/slides/slide16.xml><?xml version="1.0" encoding="utf-8"?>
-<p:sld xmlns:a="http://schemas.openxmlformats.org/drawingml/2006/main" xmlns:p="http://schemas.openxmlformats.org/presentationml/2006/main" xmlns:r="http://schemas.openxmlformats.org/officeDocument/2006/relationships">
+<p:sld xmlns:a="http://schemas.openxmlformats.org/drawingml/2006/main" xmlns:r="http://schemas.openxmlformats.org/officeDocument/2006/relationships" xmlns:p="http://schemas.openxmlformats.org/presentationml/2006/main">
   <p:cSld>
     <p:spTree>
       <p:nvGrpSpPr>
@@ -7304,7 +7016,14 @@
         <p:cNvGrpSpPr/>
         <p:nvPr/>
       </p:nvGrpSpPr>
-      <p:grpSpPr/>
+      <p:grpSpPr>
+        <a:xfrm>
+          <a:off x="0" y="0"/>
+          <a:ext cx="0" cy="0"/>
+          <a:chOff x="0" y="0"/>
+          <a:chExt cx="0" cy="0"/>
+        </a:xfrm>
+      </p:grpSpPr>
       <p:sp>
         <p:nvSpPr>
           <p:cNvPr id="2" name="TextBox 1"/>
@@ -7322,7 +7041,7 @@
           <a:noFill/>
         </p:spPr>
         <p:txBody>
-          <a:bodyPr wrap="square" lIns="0" rIns="0" tIns="0" bIns="0" anchor="t">
+          <a:bodyPr wrap="square" lIns="0" tIns="0" rIns="0" bIns="0" anchor="t">
             <a:spAutoFit/>
           </a:bodyPr>
           <a:lstStyle/>
@@ -7357,7 +7076,7 @@
           <a:noFill/>
         </p:spPr>
         <p:txBody>
-          <a:bodyPr wrap="square" lIns="0" rIns="0" tIns="0" bIns="0" anchor="t">
+          <a:bodyPr wrap="square" lIns="0" tIns="0" rIns="0" bIns="0" anchor="t">
             <a:spAutoFit/>
           </a:bodyPr>
           <a:lstStyle/>
@@ -7442,6 +7161,7 @@
           <a:lstStyle/>
           <a:p>
             <a:pPr algn="ctr"/>
+            <a:endParaRPr/>
           </a:p>
         </p:txBody>
       </p:sp>
@@ -7462,7 +7182,7 @@
           <a:noFill/>
         </p:spPr>
         <p:txBody>
-          <a:bodyPr wrap="square" lIns="0" rIns="0" tIns="0" bIns="0" anchor="t">
+          <a:bodyPr wrap="square" lIns="0" tIns="0" rIns="0" bIns="0" anchor="t">
             <a:spAutoFit/>
           </a:bodyPr>
           <a:lstStyle/>
@@ -7497,7 +7217,7 @@
           <a:noFill/>
         </p:spPr>
         <p:txBody>
-          <a:bodyPr wrap="square" lIns="0" rIns="0" tIns="0" bIns="0" anchor="t">
+          <a:bodyPr wrap="square" lIns="0" tIns="0" rIns="0" bIns="0" anchor="t">
             <a:spAutoFit/>
           </a:bodyPr>
           <a:lstStyle/>
@@ -7532,7 +7252,7 @@
           <a:noFill/>
         </p:spPr>
         <p:txBody>
-          <a:bodyPr wrap="square" lIns="0" rIns="0" tIns="0" bIns="0" anchor="t">
+          <a:bodyPr wrap="square" lIns="0" tIns="0" rIns="0" bIns="0" anchor="t">
             <a:spAutoFit/>
           </a:bodyPr>
           <a:lstStyle/>
@@ -7593,6 +7313,7 @@
           <a:lstStyle/>
           <a:p>
             <a:pPr algn="ctr"/>
+            <a:endParaRPr/>
           </a:p>
         </p:txBody>
       </p:sp>
@@ -7613,7 +7334,7 @@
           <a:noFill/>
         </p:spPr>
         <p:txBody>
-          <a:bodyPr wrap="square" lIns="0" rIns="0" tIns="0" bIns="0" anchor="t">
+          <a:bodyPr wrap="square" lIns="0" tIns="0" rIns="0" bIns="0" anchor="t">
             <a:spAutoFit/>
           </a:bodyPr>
           <a:lstStyle/>
@@ -7648,7 +7369,7 @@
           <a:noFill/>
         </p:spPr>
         <p:txBody>
-          <a:bodyPr wrap="square" lIns="0" rIns="0" tIns="0" bIns="0" anchor="t">
+          <a:bodyPr wrap="square" lIns="0" tIns="0" rIns="0" bIns="0" anchor="t">
             <a:spAutoFit/>
           </a:bodyPr>
           <a:lstStyle/>
@@ -7683,7 +7404,7 @@
           <a:noFill/>
         </p:spPr>
         <p:txBody>
-          <a:bodyPr wrap="square" lIns="0" rIns="0" tIns="0" bIns="0" anchor="t">
+          <a:bodyPr wrap="square" lIns="0" tIns="0" rIns="0" bIns="0" anchor="t">
             <a:spAutoFit/>
           </a:bodyPr>
           <a:lstStyle/>
@@ -7718,7 +7439,7 @@
           <a:noFill/>
         </p:spPr>
         <p:txBody>
-          <a:bodyPr wrap="square" lIns="0" rIns="0" tIns="0" bIns="0" anchor="t">
+          <a:bodyPr wrap="square" lIns="0" tIns="0" rIns="0" bIns="0" anchor="t">
             <a:spAutoFit/>
           </a:bodyPr>
           <a:lstStyle/>
@@ -7745,7 +7466,7 @@
 </file>
 
 <file path=ppt/slides/slide17.xml><?xml version="1.0" encoding="utf-8"?>
-<p:sld xmlns:a="http://schemas.openxmlformats.org/drawingml/2006/main" xmlns:p="http://schemas.openxmlformats.org/presentationml/2006/main" xmlns:r="http://schemas.openxmlformats.org/officeDocument/2006/relationships">
+<p:sld xmlns:a="http://schemas.openxmlformats.org/drawingml/2006/main" xmlns:r="http://schemas.openxmlformats.org/officeDocument/2006/relationships" xmlns:p="http://schemas.openxmlformats.org/presentationml/2006/main">
   <p:cSld>
     <p:spTree>
       <p:nvGrpSpPr>
@@ -7753,7 +7474,14 @@
         <p:cNvGrpSpPr/>
         <p:nvPr/>
       </p:nvGrpSpPr>
-      <p:grpSpPr/>
+      <p:grpSpPr>
+        <a:xfrm>
+          <a:off x="0" y="0"/>
+          <a:ext cx="0" cy="0"/>
+          <a:chOff x="0" y="0"/>
+          <a:chExt cx="0" cy="0"/>
+        </a:xfrm>
+      </p:grpSpPr>
       <p:sp>
         <p:nvSpPr>
           <p:cNvPr id="2" name="TextBox 1"/>
@@ -7771,7 +7499,7 @@
           <a:noFill/>
         </p:spPr>
         <p:txBody>
-          <a:bodyPr wrap="square" lIns="0" rIns="0" tIns="0" bIns="0" anchor="t">
+          <a:bodyPr wrap="square" lIns="0" tIns="0" rIns="0" bIns="0" anchor="t">
             <a:spAutoFit/>
           </a:bodyPr>
           <a:lstStyle/>
@@ -7806,7 +7534,7 @@
           <a:noFill/>
         </p:spPr>
         <p:txBody>
-          <a:bodyPr wrap="square" lIns="0" rIns="0" tIns="0" bIns="0" anchor="t">
+          <a:bodyPr wrap="square" lIns="0" tIns="0" rIns="0" bIns="0" anchor="t">
             <a:spAutoFit/>
           </a:bodyPr>
           <a:lstStyle/>
@@ -7865,7 +7593,7 @@
           <a:noFill/>
         </p:spPr>
         <p:txBody>
-          <a:bodyPr wrap="square" lIns="0" rIns="0" tIns="0" bIns="0" anchor="t">
+          <a:bodyPr wrap="square" lIns="0" tIns="0" rIns="0" bIns="0" anchor="t">
             <a:spAutoFit/>
           </a:bodyPr>
           <a:lstStyle/>
@@ -7926,6 +7654,7 @@
           <a:lstStyle/>
           <a:p>
             <a:pPr algn="ctr"/>
+            <a:endParaRPr/>
           </a:p>
         </p:txBody>
       </p:sp>
@@ -7946,7 +7675,7 @@
           <a:noFill/>
         </p:spPr>
         <p:txBody>
-          <a:bodyPr wrap="square" lIns="0" rIns="0" tIns="0" bIns="0" anchor="t">
+          <a:bodyPr wrap="square" lIns="0" tIns="0" rIns="0" bIns="0" anchor="t">
             <a:spAutoFit/>
           </a:bodyPr>
           <a:lstStyle/>
@@ -7981,7 +7710,7 @@
           <a:noFill/>
         </p:spPr>
         <p:txBody>
-          <a:bodyPr wrap="square" lIns="0" rIns="0" tIns="0" bIns="0" anchor="t">
+          <a:bodyPr wrap="square" lIns="0" tIns="0" rIns="0" bIns="0" anchor="t">
             <a:spAutoFit/>
           </a:bodyPr>
           <a:lstStyle/>
@@ -8016,7 +7745,7 @@
           <a:noFill/>
         </p:spPr>
         <p:txBody>
-          <a:bodyPr wrap="square" lIns="0" rIns="0" tIns="0" bIns="0" anchor="t">
+          <a:bodyPr wrap="square" lIns="0" tIns="0" rIns="0" bIns="0" anchor="t">
             <a:spAutoFit/>
           </a:bodyPr>
           <a:lstStyle/>
@@ -8079,6 +7808,7 @@
           <a:lstStyle/>
           <a:p>
             <a:pPr algn="ctr"/>
+            <a:endParaRPr/>
           </a:p>
         </p:txBody>
       </p:sp>
@@ -8099,7 +7829,7 @@
           <a:noFill/>
         </p:spPr>
         <p:txBody>
-          <a:bodyPr wrap="square" lIns="0" rIns="0" tIns="0" bIns="0" anchor="t">
+          <a:bodyPr wrap="square" lIns="0" tIns="0" rIns="0" bIns="0" anchor="t">
             <a:spAutoFit/>
           </a:bodyPr>
           <a:lstStyle/>
@@ -8134,7 +7864,7 @@
           <a:noFill/>
         </p:spPr>
         <p:txBody>
-          <a:bodyPr wrap="square" lIns="0" rIns="0" tIns="0" bIns="0" anchor="t">
+          <a:bodyPr wrap="square" lIns="0" tIns="0" rIns="0" bIns="0" anchor="t">
             <a:spAutoFit/>
           </a:bodyPr>
           <a:lstStyle/>
@@ -8193,6 +7923,7 @@
           <a:lstStyle/>
           <a:p>
             <a:pPr algn="ctr"/>
+            <a:endParaRPr/>
           </a:p>
         </p:txBody>
       </p:sp>
@@ -8213,7 +7944,7 @@
           <a:noFill/>
         </p:spPr>
         <p:txBody>
-          <a:bodyPr wrap="square" lIns="0" rIns="0" tIns="0" bIns="0" anchor="t">
+          <a:bodyPr wrap="square" lIns="0" tIns="0" rIns="0" bIns="0" anchor="t">
             <a:spAutoFit/>
           </a:bodyPr>
           <a:lstStyle/>
@@ -8272,6 +8003,7 @@
           <a:lstStyle/>
           <a:p>
             <a:pPr algn="ctr"/>
+            <a:endParaRPr/>
           </a:p>
         </p:txBody>
       </p:sp>
@@ -8292,7 +8024,7 @@
           <a:noFill/>
         </p:spPr>
         <p:txBody>
-          <a:bodyPr wrap="square" lIns="0" rIns="0" tIns="0" bIns="0" anchor="t">
+          <a:bodyPr wrap="square" lIns="0" tIns="0" rIns="0" bIns="0" anchor="t">
             <a:spAutoFit/>
           </a:bodyPr>
           <a:lstStyle/>
@@ -8351,6 +8083,7 @@
           <a:lstStyle/>
           <a:p>
             <a:pPr algn="ctr"/>
+            <a:endParaRPr/>
           </a:p>
         </p:txBody>
       </p:sp>
@@ -8371,7 +8104,7 @@
           <a:noFill/>
         </p:spPr>
         <p:txBody>
-          <a:bodyPr wrap="square" lIns="0" rIns="0" tIns="0" bIns="0" anchor="t">
+          <a:bodyPr wrap="square" lIns="0" tIns="0" rIns="0" bIns="0" anchor="t">
             <a:spAutoFit/>
           </a:bodyPr>
           <a:lstStyle/>
@@ -8398,7 +8131,7 @@
 </file>
 
 <file path=ppt/slides/slide18.xml><?xml version="1.0" encoding="utf-8"?>
-<p:sld xmlns:a="http://schemas.openxmlformats.org/drawingml/2006/main" xmlns:p="http://schemas.openxmlformats.org/presentationml/2006/main" xmlns:r="http://schemas.openxmlformats.org/officeDocument/2006/relationships">
+<p:sld xmlns:a="http://schemas.openxmlformats.org/drawingml/2006/main" xmlns:r="http://schemas.openxmlformats.org/officeDocument/2006/relationships" xmlns:p="http://schemas.openxmlformats.org/presentationml/2006/main">
   <p:cSld>
     <p:spTree>
       <p:nvGrpSpPr>
@@ -8406,7 +8139,14 @@
         <p:cNvGrpSpPr/>
         <p:nvPr/>
       </p:nvGrpSpPr>
-      <p:grpSpPr/>
+      <p:grpSpPr>
+        <a:xfrm>
+          <a:off x="0" y="0"/>
+          <a:ext cx="0" cy="0"/>
+          <a:chOff x="0" y="0"/>
+          <a:chExt cx="0" cy="0"/>
+        </a:xfrm>
+      </p:grpSpPr>
       <p:sp>
         <p:nvSpPr>
           <p:cNvPr id="2" name="Rectangle 1"/>
@@ -8448,6 +8188,7 @@
           <a:lstStyle/>
           <a:p>
             <a:pPr algn="ctr"/>
+            <a:endParaRPr/>
           </a:p>
         </p:txBody>
       </p:sp>
@@ -8468,7 +8209,7 @@
           <a:noFill/>
         </p:spPr>
         <p:txBody>
-          <a:bodyPr wrap="square" lIns="0" rIns="0" tIns="0" bIns="0" anchor="t">
+          <a:bodyPr wrap="square" lIns="0" tIns="0" rIns="0" bIns="0" anchor="t">
             <a:spAutoFit/>
           </a:bodyPr>
           <a:lstStyle/>
@@ -8503,7 +8244,7 @@
           <a:noFill/>
         </p:spPr>
         <p:txBody>
-          <a:bodyPr wrap="square" lIns="0" rIns="0" tIns="0" bIns="0" anchor="t">
+          <a:bodyPr wrap="square" lIns="0" tIns="0" rIns="0" bIns="0" anchor="t">
             <a:spAutoFit/>
           </a:bodyPr>
           <a:lstStyle/>
@@ -8558,7 +8299,7 @@
           </a:fontRef>
         </p:style>
         <p:txBody>
-          <a:bodyPr rtlCol="0" anchor="ctr" lIns="0" rIns="0" tIns="0" bIns="0"/>
+          <a:bodyPr lIns="0" tIns="0" rIns="0" bIns="0" rtlCol="0" anchor="ctr"/>
           <a:lstStyle/>
           <a:p>
             <a:pPr algn="ctr"/>
@@ -8591,7 +8332,7 @@
           <a:noFill/>
         </p:spPr>
         <p:txBody>
-          <a:bodyPr wrap="square" lIns="0" rIns="0" tIns="0" bIns="0" anchor="t">
+          <a:bodyPr wrap="square" lIns="0" tIns="0" rIns="0" bIns="0" anchor="t">
             <a:spAutoFit/>
           </a:bodyPr>
           <a:lstStyle/>
@@ -8626,7 +8367,7 @@
           <a:noFill/>
         </p:spPr>
         <p:txBody>
-          <a:bodyPr wrap="square" lIns="0" rIns="0" tIns="0" bIns="0" anchor="t">
+          <a:bodyPr wrap="square" lIns="0" tIns="0" rIns="0" bIns="0" anchor="t">
             <a:spAutoFit/>
           </a:bodyPr>
           <a:lstStyle/>
@@ -8681,7 +8422,7 @@
           </a:fontRef>
         </p:style>
         <p:txBody>
-          <a:bodyPr rtlCol="0" anchor="ctr" lIns="0" rIns="0" tIns="0" bIns="0"/>
+          <a:bodyPr lIns="0" tIns="0" rIns="0" bIns="0" rtlCol="0" anchor="ctr"/>
           <a:lstStyle/>
           <a:p>
             <a:pPr algn="ctr"/>
@@ -8714,7 +8455,7 @@
           <a:noFill/>
         </p:spPr>
         <p:txBody>
-          <a:bodyPr wrap="square" lIns="0" rIns="0" tIns="0" bIns="0" anchor="t">
+          <a:bodyPr wrap="square" lIns="0" tIns="0" rIns="0" bIns="0" anchor="t">
             <a:spAutoFit/>
           </a:bodyPr>
           <a:lstStyle/>
@@ -8749,7 +8490,7 @@
           <a:noFill/>
         </p:spPr>
         <p:txBody>
-          <a:bodyPr wrap="square" lIns="0" rIns="0" tIns="0" bIns="0" anchor="t">
+          <a:bodyPr wrap="square" lIns="0" tIns="0" rIns="0" bIns="0" anchor="t">
             <a:spAutoFit/>
           </a:bodyPr>
           <a:lstStyle/>
@@ -8804,7 +8545,7 @@
           </a:fontRef>
         </p:style>
         <p:txBody>
-          <a:bodyPr rtlCol="0" anchor="ctr" lIns="0" rIns="0" tIns="0" bIns="0"/>
+          <a:bodyPr lIns="0" tIns="0" rIns="0" bIns="0" rtlCol="0" anchor="ctr"/>
           <a:lstStyle/>
           <a:p>
             <a:pPr algn="ctr"/>
@@ -8837,7 +8578,7 @@
           <a:noFill/>
         </p:spPr>
         <p:txBody>
-          <a:bodyPr wrap="square" lIns="0" rIns="0" tIns="0" bIns="0" anchor="t">
+          <a:bodyPr wrap="square" lIns="0" tIns="0" rIns="0" bIns="0" anchor="t">
             <a:spAutoFit/>
           </a:bodyPr>
           <a:lstStyle/>
@@ -8872,7 +8613,7 @@
           <a:noFill/>
         </p:spPr>
         <p:txBody>
-          <a:bodyPr wrap="square" lIns="0" rIns="0" tIns="0" bIns="0" anchor="t">
+          <a:bodyPr wrap="square" lIns="0" tIns="0" rIns="0" bIns="0" anchor="t">
             <a:spAutoFit/>
           </a:bodyPr>
           <a:lstStyle/>
@@ -8907,7 +8648,7 @@
           <a:noFill/>
         </p:spPr>
         <p:txBody>
-          <a:bodyPr wrap="square" lIns="0" rIns="0" tIns="0" bIns="0" anchor="t">
+          <a:bodyPr wrap="square" lIns="0" tIns="0" rIns="0" bIns="0" anchor="t">
             <a:spAutoFit/>
           </a:bodyPr>
           <a:lstStyle/>
@@ -8942,7 +8683,7 @@
           <a:noFill/>
         </p:spPr>
         <p:txBody>
-          <a:bodyPr wrap="square" lIns="0" rIns="0" tIns="0" bIns="0" anchor="t">
+          <a:bodyPr wrap="square" lIns="0" tIns="0" rIns="0" bIns="0" anchor="t">
             <a:spAutoFit/>
           </a:bodyPr>
           <a:lstStyle/>
@@ -8969,7 +8710,7 @@
 </file>
 
 <file path=ppt/slides/slide2.xml><?xml version="1.0" encoding="utf-8"?>
-<p:sld xmlns:a="http://schemas.openxmlformats.org/drawingml/2006/main" xmlns:p="http://schemas.openxmlformats.org/presentationml/2006/main" xmlns:r="http://schemas.openxmlformats.org/officeDocument/2006/relationships">
+<p:sld xmlns:a="http://schemas.openxmlformats.org/drawingml/2006/main" xmlns:r="http://schemas.openxmlformats.org/officeDocument/2006/relationships" xmlns:p="http://schemas.openxmlformats.org/presentationml/2006/main">
   <p:cSld>
     <p:spTree>
       <p:nvGrpSpPr>
@@ -8977,7 +8718,14 @@
         <p:cNvGrpSpPr/>
         <p:nvPr/>
       </p:nvGrpSpPr>
-      <p:grpSpPr/>
+      <p:grpSpPr>
+        <a:xfrm>
+          <a:off x="0" y="0"/>
+          <a:ext cx="0" cy="0"/>
+          <a:chOff x="0" y="0"/>
+          <a:chExt cx="0" cy="0"/>
+        </a:xfrm>
+      </p:grpSpPr>
       <p:sp>
         <p:nvSpPr>
           <p:cNvPr id="2" name="TextBox 1"/>
@@ -8995,7 +8743,7 @@
           <a:noFill/>
         </p:spPr>
         <p:txBody>
-          <a:bodyPr wrap="square" lIns="0" rIns="0" tIns="0" bIns="0" anchor="t">
+          <a:bodyPr wrap="square" lIns="0" tIns="0" rIns="0" bIns="0" anchor="t">
             <a:spAutoFit/>
           </a:bodyPr>
           <a:lstStyle/>
@@ -9030,7 +8778,7 @@
           <a:noFill/>
         </p:spPr>
         <p:txBody>
-          <a:bodyPr wrap="square" lIns="0" rIns="0" tIns="0" bIns="0" anchor="t">
+          <a:bodyPr wrap="square" lIns="0" tIns="0" rIns="0" bIns="0" anchor="t">
             <a:spAutoFit/>
           </a:bodyPr>
           <a:lstStyle/>
@@ -9080,23 +8828,23 @@
         </p:nvSpPr>
         <p:spPr>
           <a:xfrm>
-            <a:off x="640080" y="1783080"/>
-            <a:ext cx="868680" cy="292608"/>
-          </a:xfrm>
-          <a:prstGeom prst="rect">
-            <a:avLst/>
-          </a:prstGeom>
-          <a:noFill/>
-        </p:spPr>
-        <p:txBody>
-          <a:bodyPr wrap="square" lIns="0" rIns="0" tIns="0" bIns="0" anchor="t">
-            <a:spAutoFit/>
-          </a:bodyPr>
-          <a:lstStyle/>
-          <a:p>
-            <a:pPr algn="l"/>
-            <a:r>
-              <a:rPr sz="1700" b="1" i="0">
+            <a:off x="640079" y="1783080"/>
+            <a:ext cx="957235" cy="369332"/>
+          </a:xfrm>
+          <a:prstGeom prst="rect">
+            <a:avLst/>
+          </a:prstGeom>
+          <a:noFill/>
+        </p:spPr>
+        <p:txBody>
+          <a:bodyPr wrap="square" lIns="0" tIns="0" rIns="0" bIns="0" anchor="t">
+            <a:spAutoFit/>
+          </a:bodyPr>
+          <a:lstStyle/>
+          <a:p>
+            <a:pPr algn="l"/>
+            <a:r>
+              <a:rPr sz="2400" b="1" i="0">
                 <a:solidFill>
                   <a:srgbClr val="BA0C2F"/>
                 </a:solidFill>
@@ -9115,23 +8863,23 @@
         </p:nvSpPr>
         <p:spPr>
           <a:xfrm>
-            <a:off x="1554480" y="1783080"/>
-            <a:ext cx="6035040" cy="292608"/>
-          </a:xfrm>
-          <a:prstGeom prst="rect">
-            <a:avLst/>
-          </a:prstGeom>
-          <a:noFill/>
-        </p:spPr>
-        <p:txBody>
-          <a:bodyPr wrap="square" lIns="0" rIns="0" tIns="0" bIns="0" anchor="t">
-            <a:spAutoFit/>
-          </a:bodyPr>
-          <a:lstStyle/>
-          <a:p>
-            <a:pPr algn="l"/>
-            <a:r>
-              <a:rPr sz="1700" b="1" i="0">
+            <a:off x="1554479" y="1783080"/>
+            <a:ext cx="6650267" cy="369332"/>
+          </a:xfrm>
+          <a:prstGeom prst="rect">
+            <a:avLst/>
+          </a:prstGeom>
+          <a:noFill/>
+        </p:spPr>
+        <p:txBody>
+          <a:bodyPr wrap="square" lIns="0" tIns="0" rIns="0" bIns="0" anchor="t">
+            <a:spAutoFit/>
+          </a:bodyPr>
+          <a:lstStyle/>
+          <a:p>
+            <a:pPr algn="l"/>
+            <a:r>
+              <a:rPr sz="2400" b="1" i="0">
                 <a:solidFill>
                   <a:srgbClr val="17151A"/>
                 </a:solidFill>
@@ -9150,23 +8898,23 @@
         </p:nvSpPr>
         <p:spPr>
           <a:xfrm>
-            <a:off x="7772400" y="1819656"/>
-            <a:ext cx="914400" cy="256032"/>
-          </a:xfrm>
-          <a:prstGeom prst="rect">
-            <a:avLst/>
-          </a:prstGeom>
-          <a:noFill/>
-        </p:spPr>
-        <p:txBody>
-          <a:bodyPr wrap="square" lIns="0" rIns="0" tIns="0" bIns="0" anchor="t">
-            <a:spAutoFit/>
-          </a:bodyPr>
-          <a:lstStyle/>
-          <a:p>
-            <a:pPr algn="l"/>
-            <a:r>
-              <a:rPr sz="1200" b="0" i="0">
+            <a:off x="8923623" y="1819656"/>
+            <a:ext cx="1007616" cy="369332"/>
+          </a:xfrm>
+          <a:prstGeom prst="rect">
+            <a:avLst/>
+          </a:prstGeom>
+          <a:noFill/>
+        </p:spPr>
+        <p:txBody>
+          <a:bodyPr wrap="square" lIns="0" tIns="0" rIns="0" bIns="0" anchor="t">
+            <a:spAutoFit/>
+          </a:bodyPr>
+          <a:lstStyle/>
+          <a:p>
+            <a:pPr algn="l"/>
+            <a:r>
+              <a:rPr sz="2400" b="0" i="0" dirty="0">
                 <a:solidFill>
                   <a:srgbClr val="54565B"/>
                 </a:solidFill>
@@ -9185,23 +8933,23 @@
         </p:nvSpPr>
         <p:spPr>
           <a:xfrm>
-            <a:off x="1554480" y="2112264"/>
-            <a:ext cx="9144000" cy="274320"/>
-          </a:xfrm>
-          <a:prstGeom prst="rect">
-            <a:avLst/>
-          </a:prstGeom>
-          <a:noFill/>
-        </p:spPr>
-        <p:txBody>
-          <a:bodyPr wrap="square" lIns="0" rIns="0" tIns="0" bIns="0" anchor="t">
-            <a:spAutoFit/>
-          </a:bodyPr>
-          <a:lstStyle/>
-          <a:p>
-            <a:pPr algn="l"/>
-            <a:r>
-              <a:rPr sz="1300" b="0" i="0">
+            <a:off x="1554480" y="2112263"/>
+            <a:ext cx="10076162" cy="246221"/>
+          </a:xfrm>
+          <a:prstGeom prst="rect">
+            <a:avLst/>
+          </a:prstGeom>
+          <a:noFill/>
+        </p:spPr>
+        <p:txBody>
+          <a:bodyPr wrap="square" lIns="0" tIns="0" rIns="0" bIns="0" anchor="t">
+            <a:spAutoFit/>
+          </a:bodyPr>
+          <a:lstStyle/>
+          <a:p>
+            <a:pPr algn="l"/>
+            <a:r>
+              <a:rPr sz="1600" b="0" i="0">
                 <a:solidFill>
                   <a:srgbClr val="54565B"/>
                 </a:solidFill>
@@ -9220,23 +8968,23 @@
         </p:nvSpPr>
         <p:spPr>
           <a:xfrm>
-            <a:off x="640080" y="2743200"/>
-            <a:ext cx="868680" cy="292608"/>
-          </a:xfrm>
-          <a:prstGeom prst="rect">
-            <a:avLst/>
-          </a:prstGeom>
-          <a:noFill/>
-        </p:spPr>
-        <p:txBody>
-          <a:bodyPr wrap="square" lIns="0" rIns="0" tIns="0" bIns="0" anchor="t">
-            <a:spAutoFit/>
-          </a:bodyPr>
-          <a:lstStyle/>
-          <a:p>
-            <a:pPr algn="l"/>
-            <a:r>
-              <a:rPr sz="1700" b="1" i="0">
+            <a:off x="640079" y="2743200"/>
+            <a:ext cx="957235" cy="369332"/>
+          </a:xfrm>
+          <a:prstGeom prst="rect">
+            <a:avLst/>
+          </a:prstGeom>
+          <a:noFill/>
+        </p:spPr>
+        <p:txBody>
+          <a:bodyPr wrap="square" lIns="0" tIns="0" rIns="0" bIns="0" anchor="t">
+            <a:spAutoFit/>
+          </a:bodyPr>
+          <a:lstStyle/>
+          <a:p>
+            <a:pPr algn="l"/>
+            <a:r>
+              <a:rPr sz="2400" b="1" i="0">
                 <a:solidFill>
                   <a:srgbClr val="BA0C2F"/>
                 </a:solidFill>
@@ -9255,23 +9003,23 @@
         </p:nvSpPr>
         <p:spPr>
           <a:xfrm>
-            <a:off x="1554480" y="2743200"/>
-            <a:ext cx="6035040" cy="292608"/>
-          </a:xfrm>
-          <a:prstGeom prst="rect">
-            <a:avLst/>
-          </a:prstGeom>
-          <a:noFill/>
-        </p:spPr>
-        <p:txBody>
-          <a:bodyPr wrap="square" lIns="0" rIns="0" tIns="0" bIns="0" anchor="t">
-            <a:spAutoFit/>
-          </a:bodyPr>
-          <a:lstStyle/>
-          <a:p>
-            <a:pPr algn="l"/>
-            <a:r>
-              <a:rPr sz="1700" b="1" i="0">
+            <a:off x="1554479" y="2743200"/>
+            <a:ext cx="6650267" cy="369332"/>
+          </a:xfrm>
+          <a:prstGeom prst="rect">
+            <a:avLst/>
+          </a:prstGeom>
+          <a:noFill/>
+        </p:spPr>
+        <p:txBody>
+          <a:bodyPr wrap="square" lIns="0" tIns="0" rIns="0" bIns="0" anchor="t">
+            <a:spAutoFit/>
+          </a:bodyPr>
+          <a:lstStyle/>
+          <a:p>
+            <a:pPr algn="l"/>
+            <a:r>
+              <a:rPr sz="2400" b="1" i="0">
                 <a:solidFill>
                   <a:srgbClr val="17151A"/>
                 </a:solidFill>
@@ -9290,23 +9038,23 @@
         </p:nvSpPr>
         <p:spPr>
           <a:xfrm>
-            <a:off x="7772400" y="2779776"/>
-            <a:ext cx="914400" cy="256032"/>
-          </a:xfrm>
-          <a:prstGeom prst="rect">
-            <a:avLst/>
-          </a:prstGeom>
-          <a:noFill/>
-        </p:spPr>
-        <p:txBody>
-          <a:bodyPr wrap="square" lIns="0" rIns="0" tIns="0" bIns="0" anchor="t">
-            <a:spAutoFit/>
-          </a:bodyPr>
-          <a:lstStyle/>
-          <a:p>
-            <a:pPr algn="l"/>
-            <a:r>
-              <a:rPr sz="1200" b="0" i="0">
+            <a:off x="8923623" y="2779776"/>
+            <a:ext cx="1007616" cy="369332"/>
+          </a:xfrm>
+          <a:prstGeom prst="rect">
+            <a:avLst/>
+          </a:prstGeom>
+          <a:noFill/>
+        </p:spPr>
+        <p:txBody>
+          <a:bodyPr wrap="square" lIns="0" tIns="0" rIns="0" bIns="0" anchor="t">
+            <a:spAutoFit/>
+          </a:bodyPr>
+          <a:lstStyle/>
+          <a:p>
+            <a:pPr algn="l"/>
+            <a:r>
+              <a:rPr sz="2400" b="0" i="0">
                 <a:solidFill>
                   <a:srgbClr val="54565B"/>
                 </a:solidFill>
@@ -9325,23 +9073,23 @@
         </p:nvSpPr>
         <p:spPr>
           <a:xfrm>
-            <a:off x="1554480" y="3072384"/>
-            <a:ext cx="9144000" cy="274320"/>
-          </a:xfrm>
-          <a:prstGeom prst="rect">
-            <a:avLst/>
-          </a:prstGeom>
-          <a:noFill/>
-        </p:spPr>
-        <p:txBody>
-          <a:bodyPr wrap="square" lIns="0" rIns="0" tIns="0" bIns="0" anchor="t">
-            <a:spAutoFit/>
-          </a:bodyPr>
-          <a:lstStyle/>
-          <a:p>
-            <a:pPr algn="l"/>
-            <a:r>
-              <a:rPr sz="1300" b="0" i="0">
+            <a:off x="1554480" y="3072383"/>
+            <a:ext cx="10076162" cy="246221"/>
+          </a:xfrm>
+          <a:prstGeom prst="rect">
+            <a:avLst/>
+          </a:prstGeom>
+          <a:noFill/>
+        </p:spPr>
+        <p:txBody>
+          <a:bodyPr wrap="square" lIns="0" tIns="0" rIns="0" bIns="0" anchor="t">
+            <a:spAutoFit/>
+          </a:bodyPr>
+          <a:lstStyle/>
+          <a:p>
+            <a:pPr algn="l"/>
+            <a:r>
+              <a:rPr sz="1600" b="0" i="0">
                 <a:solidFill>
                   <a:srgbClr val="54565B"/>
                 </a:solidFill>
@@ -9360,23 +9108,23 @@
         </p:nvSpPr>
         <p:spPr>
           <a:xfrm>
-            <a:off x="640080" y="3703320"/>
-            <a:ext cx="868680" cy="292608"/>
-          </a:xfrm>
-          <a:prstGeom prst="rect">
-            <a:avLst/>
-          </a:prstGeom>
-          <a:noFill/>
-        </p:spPr>
-        <p:txBody>
-          <a:bodyPr wrap="square" lIns="0" rIns="0" tIns="0" bIns="0" anchor="t">
-            <a:spAutoFit/>
-          </a:bodyPr>
-          <a:lstStyle/>
-          <a:p>
-            <a:pPr algn="l"/>
-            <a:r>
-              <a:rPr sz="1700" b="1" i="0">
+            <a:off x="640079" y="3703320"/>
+            <a:ext cx="957235" cy="369332"/>
+          </a:xfrm>
+          <a:prstGeom prst="rect">
+            <a:avLst/>
+          </a:prstGeom>
+          <a:noFill/>
+        </p:spPr>
+        <p:txBody>
+          <a:bodyPr wrap="square" lIns="0" tIns="0" rIns="0" bIns="0" anchor="t">
+            <a:spAutoFit/>
+          </a:bodyPr>
+          <a:lstStyle/>
+          <a:p>
+            <a:pPr algn="l"/>
+            <a:r>
+              <a:rPr sz="2400" b="1" i="0">
                 <a:solidFill>
                   <a:srgbClr val="BA0C2F"/>
                 </a:solidFill>
@@ -9395,23 +9143,23 @@
         </p:nvSpPr>
         <p:spPr>
           <a:xfrm>
-            <a:off x="1554480" y="3703320"/>
-            <a:ext cx="6035040" cy="292608"/>
-          </a:xfrm>
-          <a:prstGeom prst="rect">
-            <a:avLst/>
-          </a:prstGeom>
-          <a:noFill/>
-        </p:spPr>
-        <p:txBody>
-          <a:bodyPr wrap="square" lIns="0" rIns="0" tIns="0" bIns="0" anchor="t">
-            <a:spAutoFit/>
-          </a:bodyPr>
-          <a:lstStyle/>
-          <a:p>
-            <a:pPr algn="l"/>
-            <a:r>
-              <a:rPr sz="1700" b="1" i="0">
+            <a:off x="1554479" y="3703320"/>
+            <a:ext cx="6650267" cy="369332"/>
+          </a:xfrm>
+          <a:prstGeom prst="rect">
+            <a:avLst/>
+          </a:prstGeom>
+          <a:noFill/>
+        </p:spPr>
+        <p:txBody>
+          <a:bodyPr wrap="square" lIns="0" tIns="0" rIns="0" bIns="0" anchor="t">
+            <a:spAutoFit/>
+          </a:bodyPr>
+          <a:lstStyle/>
+          <a:p>
+            <a:pPr algn="l"/>
+            <a:r>
+              <a:rPr sz="2400" b="1" i="0">
                 <a:solidFill>
                   <a:srgbClr val="17151A"/>
                 </a:solidFill>
@@ -9430,23 +9178,23 @@
         </p:nvSpPr>
         <p:spPr>
           <a:xfrm>
-            <a:off x="7772400" y="3739896"/>
-            <a:ext cx="914400" cy="256032"/>
-          </a:xfrm>
-          <a:prstGeom prst="rect">
-            <a:avLst/>
-          </a:prstGeom>
-          <a:noFill/>
-        </p:spPr>
-        <p:txBody>
-          <a:bodyPr wrap="square" lIns="0" rIns="0" tIns="0" bIns="0" anchor="t">
-            <a:spAutoFit/>
-          </a:bodyPr>
-          <a:lstStyle/>
-          <a:p>
-            <a:pPr algn="l"/>
-            <a:r>
-              <a:rPr sz="1200" b="0" i="0">
+            <a:off x="8923623" y="3739896"/>
+            <a:ext cx="1007616" cy="369332"/>
+          </a:xfrm>
+          <a:prstGeom prst="rect">
+            <a:avLst/>
+          </a:prstGeom>
+          <a:noFill/>
+        </p:spPr>
+        <p:txBody>
+          <a:bodyPr wrap="square" lIns="0" tIns="0" rIns="0" bIns="0" anchor="t">
+            <a:spAutoFit/>
+          </a:bodyPr>
+          <a:lstStyle/>
+          <a:p>
+            <a:pPr algn="l"/>
+            <a:r>
+              <a:rPr sz="2400" b="0" i="0">
                 <a:solidFill>
                   <a:srgbClr val="54565B"/>
                 </a:solidFill>
@@ -9465,23 +9213,23 @@
         </p:nvSpPr>
         <p:spPr>
           <a:xfrm>
-            <a:off x="1554480" y="4032504"/>
-            <a:ext cx="9144000" cy="274320"/>
-          </a:xfrm>
-          <a:prstGeom prst="rect">
-            <a:avLst/>
-          </a:prstGeom>
-          <a:noFill/>
-        </p:spPr>
-        <p:txBody>
-          <a:bodyPr wrap="square" lIns="0" rIns="0" tIns="0" bIns="0" anchor="t">
-            <a:spAutoFit/>
-          </a:bodyPr>
-          <a:lstStyle/>
-          <a:p>
-            <a:pPr algn="l"/>
-            <a:r>
-              <a:rPr sz="1300" b="0" i="0">
+            <a:off x="1554480" y="4032503"/>
+            <a:ext cx="10076162" cy="246221"/>
+          </a:xfrm>
+          <a:prstGeom prst="rect">
+            <a:avLst/>
+          </a:prstGeom>
+          <a:noFill/>
+        </p:spPr>
+        <p:txBody>
+          <a:bodyPr wrap="square" lIns="0" tIns="0" rIns="0" bIns="0" anchor="t">
+            <a:spAutoFit/>
+          </a:bodyPr>
+          <a:lstStyle/>
+          <a:p>
+            <a:pPr algn="l"/>
+            <a:r>
+              <a:rPr sz="1600" b="0" i="0">
                 <a:solidFill>
                   <a:srgbClr val="54565B"/>
                 </a:solidFill>
@@ -9500,23 +9248,23 @@
         </p:nvSpPr>
         <p:spPr>
           <a:xfrm>
-            <a:off x="640080" y="4663440"/>
-            <a:ext cx="868680" cy="292608"/>
-          </a:xfrm>
-          <a:prstGeom prst="rect">
-            <a:avLst/>
-          </a:prstGeom>
-          <a:noFill/>
-        </p:spPr>
-        <p:txBody>
-          <a:bodyPr wrap="square" lIns="0" rIns="0" tIns="0" bIns="0" anchor="t">
-            <a:spAutoFit/>
-          </a:bodyPr>
-          <a:lstStyle/>
-          <a:p>
-            <a:pPr algn="l"/>
-            <a:r>
-              <a:rPr sz="1700" b="1" i="0">
+            <a:off x="640079" y="4663440"/>
+            <a:ext cx="957235" cy="369332"/>
+          </a:xfrm>
+          <a:prstGeom prst="rect">
+            <a:avLst/>
+          </a:prstGeom>
+          <a:noFill/>
+        </p:spPr>
+        <p:txBody>
+          <a:bodyPr wrap="square" lIns="0" tIns="0" rIns="0" bIns="0" anchor="t">
+            <a:spAutoFit/>
+          </a:bodyPr>
+          <a:lstStyle/>
+          <a:p>
+            <a:pPr algn="l"/>
+            <a:r>
+              <a:rPr sz="2400" b="1" i="0">
                 <a:solidFill>
                   <a:srgbClr val="BA0C2F"/>
                 </a:solidFill>
@@ -9535,23 +9283,23 @@
         </p:nvSpPr>
         <p:spPr>
           <a:xfrm>
-            <a:off x="1554480" y="4663440"/>
-            <a:ext cx="6035040" cy="292608"/>
-          </a:xfrm>
-          <a:prstGeom prst="rect">
-            <a:avLst/>
-          </a:prstGeom>
-          <a:noFill/>
-        </p:spPr>
-        <p:txBody>
-          <a:bodyPr wrap="square" lIns="0" rIns="0" tIns="0" bIns="0" anchor="t">
-            <a:spAutoFit/>
-          </a:bodyPr>
-          <a:lstStyle/>
-          <a:p>
-            <a:pPr algn="l"/>
-            <a:r>
-              <a:rPr sz="1700" b="1" i="0">
+            <a:off x="1554479" y="4663440"/>
+            <a:ext cx="6650267" cy="369332"/>
+          </a:xfrm>
+          <a:prstGeom prst="rect">
+            <a:avLst/>
+          </a:prstGeom>
+          <a:noFill/>
+        </p:spPr>
+        <p:txBody>
+          <a:bodyPr wrap="square" lIns="0" tIns="0" rIns="0" bIns="0" anchor="t">
+            <a:spAutoFit/>
+          </a:bodyPr>
+          <a:lstStyle/>
+          <a:p>
+            <a:pPr algn="l"/>
+            <a:r>
+              <a:rPr sz="2400" b="1" i="0">
                 <a:solidFill>
                   <a:srgbClr val="17151A"/>
                 </a:solidFill>
@@ -9570,23 +9318,23 @@
         </p:nvSpPr>
         <p:spPr>
           <a:xfrm>
-            <a:off x="7772400" y="4700016"/>
-            <a:ext cx="914400" cy="256032"/>
-          </a:xfrm>
-          <a:prstGeom prst="rect">
-            <a:avLst/>
-          </a:prstGeom>
-          <a:noFill/>
-        </p:spPr>
-        <p:txBody>
-          <a:bodyPr wrap="square" lIns="0" rIns="0" tIns="0" bIns="0" anchor="t">
-            <a:spAutoFit/>
-          </a:bodyPr>
-          <a:lstStyle/>
-          <a:p>
-            <a:pPr algn="l"/>
-            <a:r>
-              <a:rPr sz="1200" b="0" i="0">
+            <a:off x="8923623" y="4700016"/>
+            <a:ext cx="1007616" cy="369332"/>
+          </a:xfrm>
+          <a:prstGeom prst="rect">
+            <a:avLst/>
+          </a:prstGeom>
+          <a:noFill/>
+        </p:spPr>
+        <p:txBody>
+          <a:bodyPr wrap="square" lIns="0" tIns="0" rIns="0" bIns="0" anchor="t">
+            <a:spAutoFit/>
+          </a:bodyPr>
+          <a:lstStyle/>
+          <a:p>
+            <a:pPr algn="l"/>
+            <a:r>
+              <a:rPr sz="2400" b="0" i="0">
                 <a:solidFill>
                   <a:srgbClr val="54565B"/>
                 </a:solidFill>
@@ -9605,23 +9353,23 @@
         </p:nvSpPr>
         <p:spPr>
           <a:xfrm>
-            <a:off x="1554480" y="4992624"/>
-            <a:ext cx="9144000" cy="274320"/>
-          </a:xfrm>
-          <a:prstGeom prst="rect">
-            <a:avLst/>
-          </a:prstGeom>
-          <a:noFill/>
-        </p:spPr>
-        <p:txBody>
-          <a:bodyPr wrap="square" lIns="0" rIns="0" tIns="0" bIns="0" anchor="t">
-            <a:spAutoFit/>
-          </a:bodyPr>
-          <a:lstStyle/>
-          <a:p>
-            <a:pPr algn="l"/>
-            <a:r>
-              <a:rPr sz="1300" b="0" i="0">
+            <a:off x="1554480" y="4992623"/>
+            <a:ext cx="10076162" cy="246221"/>
+          </a:xfrm>
+          <a:prstGeom prst="rect">
+            <a:avLst/>
+          </a:prstGeom>
+          <a:noFill/>
+        </p:spPr>
+        <p:txBody>
+          <a:bodyPr wrap="square" lIns="0" tIns="0" rIns="0" bIns="0" anchor="t">
+            <a:spAutoFit/>
+          </a:bodyPr>
+          <a:lstStyle/>
+          <a:p>
+            <a:pPr algn="l"/>
+            <a:r>
+              <a:rPr sz="1600" b="0" i="0">
                 <a:solidFill>
                   <a:srgbClr val="54565B"/>
                 </a:solidFill>
@@ -9641,7 +9389,7 @@
 </file>
 
 <file path=ppt/slides/slide3.xml><?xml version="1.0" encoding="utf-8"?>
-<p:sld xmlns:a="http://schemas.openxmlformats.org/drawingml/2006/main" xmlns:p="http://schemas.openxmlformats.org/presentationml/2006/main" xmlns:r="http://schemas.openxmlformats.org/officeDocument/2006/relationships">
+<p:sld xmlns:a="http://schemas.openxmlformats.org/drawingml/2006/main" xmlns:r="http://schemas.openxmlformats.org/officeDocument/2006/relationships" xmlns:p="http://schemas.openxmlformats.org/presentationml/2006/main">
   <p:cSld>
     <p:spTree>
       <p:nvGrpSpPr>
@@ -9649,7 +9397,14 @@
         <p:cNvGrpSpPr/>
         <p:nvPr/>
       </p:nvGrpSpPr>
-      <p:grpSpPr/>
+      <p:grpSpPr>
+        <a:xfrm>
+          <a:off x="0" y="0"/>
+          <a:ext cx="0" cy="0"/>
+          <a:chOff x="0" y="0"/>
+          <a:chExt cx="0" cy="0"/>
+        </a:xfrm>
+      </p:grpSpPr>
       <p:sp>
         <p:nvSpPr>
           <p:cNvPr id="2" name="TextBox 1"/>
@@ -9667,7 +9422,7 @@
           <a:noFill/>
         </p:spPr>
         <p:txBody>
-          <a:bodyPr wrap="square" lIns="0" rIns="0" tIns="0" bIns="0" anchor="t">
+          <a:bodyPr wrap="square" lIns="0" tIns="0" rIns="0" bIns="0" anchor="t">
             <a:spAutoFit/>
           </a:bodyPr>
           <a:lstStyle/>
@@ -9702,7 +9457,7 @@
           <a:noFill/>
         </p:spPr>
         <p:txBody>
-          <a:bodyPr wrap="square" lIns="0" rIns="0" tIns="0" bIns="0" anchor="t">
+          <a:bodyPr wrap="square" lIns="0" tIns="0" rIns="0" bIns="0" anchor="t">
             <a:spAutoFit/>
           </a:bodyPr>
           <a:lstStyle/>
@@ -9787,6 +9542,7 @@
           <a:lstStyle/>
           <a:p>
             <a:pPr algn="ctr"/>
+            <a:endParaRPr/>
           </a:p>
         </p:txBody>
       </p:sp>
@@ -9827,7 +9583,7 @@
           </a:fontRef>
         </p:style>
         <p:txBody>
-          <a:bodyPr rtlCol="0" anchor="ctr" lIns="0" rIns="0" tIns="0" bIns="0"/>
+          <a:bodyPr lIns="0" tIns="0" rIns="0" bIns="0" rtlCol="0" anchor="ctr"/>
           <a:lstStyle/>
           <a:p>
             <a:pPr algn="ctr"/>
@@ -9852,22 +9608,22 @@
         <p:spPr>
           <a:xfrm>
             <a:off x="932688" y="2761488"/>
-            <a:ext cx="2880360" cy="411480"/>
-          </a:xfrm>
-          <a:prstGeom prst="rect">
-            <a:avLst/>
-          </a:prstGeom>
-          <a:noFill/>
-        </p:spPr>
-        <p:txBody>
-          <a:bodyPr wrap="square" lIns="0" rIns="0" tIns="0" bIns="0" anchor="t">
-            <a:spAutoFit/>
-          </a:bodyPr>
-          <a:lstStyle/>
-          <a:p>
-            <a:pPr algn="l"/>
-            <a:r>
-              <a:rPr sz="1800" b="1" i="0">
+            <a:ext cx="2880360" cy="307777"/>
+          </a:xfrm>
+          <a:prstGeom prst="rect">
+            <a:avLst/>
+          </a:prstGeom>
+          <a:noFill/>
+        </p:spPr>
+        <p:txBody>
+          <a:bodyPr wrap="square" lIns="0" tIns="0" rIns="0" bIns="0" anchor="t">
+            <a:spAutoFit/>
+          </a:bodyPr>
+          <a:lstStyle/>
+          <a:p>
+            <a:pPr algn="l"/>
+            <a:r>
+              <a:rPr sz="2000" b="1" i="0" dirty="0">
                 <a:solidFill>
                   <a:srgbClr val="17151A"/>
                 </a:solidFill>
@@ -9887,22 +9643,22 @@
         <p:spPr>
           <a:xfrm>
             <a:off x="932688" y="3218688"/>
-            <a:ext cx="2880360" cy="1051560"/>
-          </a:xfrm>
-          <a:prstGeom prst="rect">
-            <a:avLst/>
-          </a:prstGeom>
-          <a:noFill/>
-        </p:spPr>
-        <p:txBody>
-          <a:bodyPr wrap="square" lIns="0" rIns="0" tIns="0" bIns="0" anchor="t">
-            <a:spAutoFit/>
-          </a:bodyPr>
-          <a:lstStyle/>
-          <a:p>
-            <a:pPr algn="l"/>
-            <a:r>
-              <a:rPr sz="1300" b="0" i="0">
+            <a:ext cx="2880360" cy="830997"/>
+          </a:xfrm>
+          <a:prstGeom prst="rect">
+            <a:avLst/>
+          </a:prstGeom>
+          <a:noFill/>
+        </p:spPr>
+        <p:txBody>
+          <a:bodyPr wrap="square" lIns="0" tIns="0" rIns="0" bIns="0" anchor="t">
+            <a:spAutoFit/>
+          </a:bodyPr>
+          <a:lstStyle/>
+          <a:p>
+            <a:pPr algn="l"/>
+            <a:r>
+              <a:rPr b="0" i="0" dirty="0">
                 <a:solidFill>
                   <a:srgbClr val="54565B"/>
                 </a:solidFill>
@@ -9956,6 +9712,7 @@
           <a:lstStyle/>
           <a:p>
             <a:pPr algn="ctr"/>
+            <a:endParaRPr/>
           </a:p>
         </p:txBody>
       </p:sp>
@@ -9996,7 +9753,7 @@
           </a:fontRef>
         </p:style>
         <p:txBody>
-          <a:bodyPr rtlCol="0" anchor="ctr" lIns="0" rIns="0" tIns="0" bIns="0"/>
+          <a:bodyPr lIns="0" tIns="0" rIns="0" bIns="0" rtlCol="0" anchor="ctr"/>
           <a:lstStyle/>
           <a:p>
             <a:pPr algn="ctr"/>
@@ -10021,22 +9778,22 @@
         <p:spPr>
           <a:xfrm>
             <a:off x="4636008" y="2761488"/>
-            <a:ext cx="2880360" cy="411480"/>
-          </a:xfrm>
-          <a:prstGeom prst="rect">
-            <a:avLst/>
-          </a:prstGeom>
-          <a:noFill/>
-        </p:spPr>
-        <p:txBody>
-          <a:bodyPr wrap="square" lIns="0" rIns="0" tIns="0" bIns="0" anchor="t">
-            <a:spAutoFit/>
-          </a:bodyPr>
-          <a:lstStyle/>
-          <a:p>
-            <a:pPr algn="l"/>
-            <a:r>
-              <a:rPr sz="1800" b="1" i="0">
+            <a:ext cx="2880360" cy="307777"/>
+          </a:xfrm>
+          <a:prstGeom prst="rect">
+            <a:avLst/>
+          </a:prstGeom>
+          <a:noFill/>
+        </p:spPr>
+        <p:txBody>
+          <a:bodyPr wrap="square" lIns="0" tIns="0" rIns="0" bIns="0" anchor="t">
+            <a:spAutoFit/>
+          </a:bodyPr>
+          <a:lstStyle/>
+          <a:p>
+            <a:pPr algn="l"/>
+            <a:r>
+              <a:rPr sz="2000" b="1" i="0">
                 <a:solidFill>
                   <a:srgbClr val="17151A"/>
                 </a:solidFill>
@@ -10056,22 +9813,22 @@
         <p:spPr>
           <a:xfrm>
             <a:off x="4636008" y="3218688"/>
-            <a:ext cx="2880360" cy="1051560"/>
-          </a:xfrm>
-          <a:prstGeom prst="rect">
-            <a:avLst/>
-          </a:prstGeom>
-          <a:noFill/>
-        </p:spPr>
-        <p:txBody>
-          <a:bodyPr wrap="square" lIns="0" rIns="0" tIns="0" bIns="0" anchor="t">
-            <a:spAutoFit/>
-          </a:bodyPr>
-          <a:lstStyle/>
-          <a:p>
-            <a:pPr algn="l"/>
-            <a:r>
-              <a:rPr sz="1300" b="0" i="0">
+            <a:ext cx="2880360" cy="830997"/>
+          </a:xfrm>
+          <a:prstGeom prst="rect">
+            <a:avLst/>
+          </a:prstGeom>
+          <a:noFill/>
+        </p:spPr>
+        <p:txBody>
+          <a:bodyPr wrap="square" lIns="0" tIns="0" rIns="0" bIns="0" anchor="t">
+            <a:spAutoFit/>
+          </a:bodyPr>
+          <a:lstStyle/>
+          <a:p>
+            <a:pPr algn="l"/>
+            <a:r>
+              <a:rPr b="0" i="0">
                 <a:solidFill>
                   <a:srgbClr val="54565B"/>
                 </a:solidFill>
@@ -10125,6 +9882,7 @@
           <a:lstStyle/>
           <a:p>
             <a:pPr algn="ctr"/>
+            <a:endParaRPr/>
           </a:p>
         </p:txBody>
       </p:sp>
@@ -10165,7 +9923,7 @@
           </a:fontRef>
         </p:style>
         <p:txBody>
-          <a:bodyPr rtlCol="0" anchor="ctr" lIns="0" rIns="0" tIns="0" bIns="0"/>
+          <a:bodyPr lIns="0" tIns="0" rIns="0" bIns="0" rtlCol="0" anchor="ctr"/>
           <a:lstStyle/>
           <a:p>
             <a:pPr algn="ctr"/>
@@ -10190,22 +9948,22 @@
         <p:spPr>
           <a:xfrm>
             <a:off x="8339327" y="2761488"/>
-            <a:ext cx="2880360" cy="411480"/>
-          </a:xfrm>
-          <a:prstGeom prst="rect">
-            <a:avLst/>
-          </a:prstGeom>
-          <a:noFill/>
-        </p:spPr>
-        <p:txBody>
-          <a:bodyPr wrap="square" lIns="0" rIns="0" tIns="0" bIns="0" anchor="t">
-            <a:spAutoFit/>
-          </a:bodyPr>
-          <a:lstStyle/>
-          <a:p>
-            <a:pPr algn="l"/>
-            <a:r>
-              <a:rPr sz="1800" b="1" i="0">
+            <a:ext cx="2880360" cy="307777"/>
+          </a:xfrm>
+          <a:prstGeom prst="rect">
+            <a:avLst/>
+          </a:prstGeom>
+          <a:noFill/>
+        </p:spPr>
+        <p:txBody>
+          <a:bodyPr wrap="square" lIns="0" tIns="0" rIns="0" bIns="0" anchor="t">
+            <a:spAutoFit/>
+          </a:bodyPr>
+          <a:lstStyle/>
+          <a:p>
+            <a:pPr algn="l"/>
+            <a:r>
+              <a:rPr sz="2000" b="1" i="0">
                 <a:solidFill>
                   <a:srgbClr val="17151A"/>
                 </a:solidFill>
@@ -10225,22 +9983,22 @@
         <p:spPr>
           <a:xfrm>
             <a:off x="8339327" y="3218688"/>
-            <a:ext cx="2880360" cy="1051560"/>
-          </a:xfrm>
-          <a:prstGeom prst="rect">
-            <a:avLst/>
-          </a:prstGeom>
-          <a:noFill/>
-        </p:spPr>
-        <p:txBody>
-          <a:bodyPr wrap="square" lIns="0" rIns="0" tIns="0" bIns="0" anchor="t">
-            <a:spAutoFit/>
-          </a:bodyPr>
-          <a:lstStyle/>
-          <a:p>
-            <a:pPr algn="l"/>
-            <a:r>
-              <a:rPr sz="1300" b="0" i="0">
+            <a:ext cx="2880360" cy="1107996"/>
+          </a:xfrm>
+          <a:prstGeom prst="rect">
+            <a:avLst/>
+          </a:prstGeom>
+          <a:noFill/>
+        </p:spPr>
+        <p:txBody>
+          <a:bodyPr wrap="square" lIns="0" tIns="0" rIns="0" bIns="0" anchor="t">
+            <a:spAutoFit/>
+          </a:bodyPr>
+          <a:lstStyle/>
+          <a:p>
+            <a:pPr algn="l"/>
+            <a:r>
+              <a:rPr b="0" i="0">
                 <a:solidFill>
                   <a:srgbClr val="54565B"/>
                 </a:solidFill>
@@ -10260,22 +10018,22 @@
         <p:spPr>
           <a:xfrm>
             <a:off x="640080" y="4846320"/>
-            <a:ext cx="10515600" cy="365760"/>
-          </a:xfrm>
-          <a:prstGeom prst="rect">
-            <a:avLst/>
-          </a:prstGeom>
-          <a:noFill/>
-        </p:spPr>
-        <p:txBody>
-          <a:bodyPr wrap="square" lIns="0" rIns="0" tIns="0" bIns="0" anchor="t">
-            <a:spAutoFit/>
-          </a:bodyPr>
-          <a:lstStyle/>
-          <a:p>
-            <a:pPr algn="l"/>
-            <a:r>
-              <a:rPr sz="1600" b="0" i="1">
+            <a:ext cx="10515600" cy="369332"/>
+          </a:xfrm>
+          <a:prstGeom prst="rect">
+            <a:avLst/>
+          </a:prstGeom>
+          <a:noFill/>
+        </p:spPr>
+        <p:txBody>
+          <a:bodyPr wrap="square" lIns="0" tIns="0" rIns="0" bIns="0" anchor="t">
+            <a:spAutoFit/>
+          </a:bodyPr>
+          <a:lstStyle/>
+          <a:p>
+            <a:pPr algn="l"/>
+            <a:r>
+              <a:rPr sz="2400" b="0" i="1" dirty="0">
                 <a:solidFill>
                   <a:srgbClr val="BA0C2F"/>
                 </a:solidFill>
@@ -10295,7 +10053,7 @@
 </file>
 
 <file path=ppt/slides/slide4.xml><?xml version="1.0" encoding="utf-8"?>
-<p:sld xmlns:a="http://schemas.openxmlformats.org/drawingml/2006/main" xmlns:p="http://schemas.openxmlformats.org/presentationml/2006/main" xmlns:r="http://schemas.openxmlformats.org/officeDocument/2006/relationships">
+<p:sld xmlns:a="http://schemas.openxmlformats.org/drawingml/2006/main" xmlns:r="http://schemas.openxmlformats.org/officeDocument/2006/relationships" xmlns:p="http://schemas.openxmlformats.org/presentationml/2006/main">
   <p:cSld>
     <p:spTree>
       <p:nvGrpSpPr>
@@ -10303,7 +10061,14 @@
         <p:cNvGrpSpPr/>
         <p:nvPr/>
       </p:nvGrpSpPr>
-      <p:grpSpPr/>
+      <p:grpSpPr>
+        <a:xfrm>
+          <a:off x="0" y="0"/>
+          <a:ext cx="0" cy="0"/>
+          <a:chOff x="0" y="0"/>
+          <a:chExt cx="0" cy="0"/>
+        </a:xfrm>
+      </p:grpSpPr>
       <p:sp>
         <p:nvSpPr>
           <p:cNvPr id="2" name="TextBox 1"/>
@@ -10321,7 +10086,7 @@
           <a:noFill/>
         </p:spPr>
         <p:txBody>
-          <a:bodyPr wrap="square" lIns="0" rIns="0" tIns="0" bIns="0" anchor="t">
+          <a:bodyPr wrap="square" lIns="0" tIns="0" rIns="0" bIns="0" anchor="t">
             <a:spAutoFit/>
           </a:bodyPr>
           <a:lstStyle/>
@@ -10356,7 +10121,7 @@
           <a:noFill/>
         </p:spPr>
         <p:txBody>
-          <a:bodyPr wrap="square" lIns="0" rIns="0" tIns="0" bIns="0" anchor="t">
+          <a:bodyPr wrap="square" lIns="0" tIns="0" rIns="0" bIns="0" anchor="t">
             <a:spAutoFit/>
           </a:bodyPr>
           <a:lstStyle/>
@@ -10406,23 +10171,23 @@
         </p:nvSpPr>
         <p:spPr>
           <a:xfrm>
-            <a:off x="640080" y="1572768"/>
-            <a:ext cx="10515600" cy="320040"/>
-          </a:xfrm>
-          <a:prstGeom prst="rect">
-            <a:avLst/>
-          </a:prstGeom>
-          <a:noFill/>
-        </p:spPr>
-        <p:txBody>
-          <a:bodyPr wrap="square" lIns="0" rIns="0" tIns="0" bIns="0" anchor="t">
-            <a:spAutoFit/>
-          </a:bodyPr>
-          <a:lstStyle/>
-          <a:p>
-            <a:pPr algn="l"/>
-            <a:r>
-              <a:rPr sz="1500" b="0" i="0">
+            <a:off x="640080" y="1257003"/>
+            <a:ext cx="10515600" cy="369332"/>
+          </a:xfrm>
+          <a:prstGeom prst="rect">
+            <a:avLst/>
+          </a:prstGeom>
+          <a:noFill/>
+        </p:spPr>
+        <p:txBody>
+          <a:bodyPr wrap="square" lIns="0" tIns="0" rIns="0" bIns="0" anchor="t">
+            <a:spAutoFit/>
+          </a:bodyPr>
+          <a:lstStyle/>
+          <a:p>
+            <a:pPr algn="l"/>
+            <a:r>
+              <a:rPr sz="2400" b="0" i="0" dirty="0">
                 <a:solidFill>
                   <a:srgbClr val="54565B"/>
                 </a:solidFill>
@@ -10442,22 +10207,22 @@
         <p:spPr>
           <a:xfrm>
             <a:off x="640080" y="2103120"/>
-            <a:ext cx="3931920" cy="292608"/>
-          </a:xfrm>
-          <a:prstGeom prst="rect">
-            <a:avLst/>
-          </a:prstGeom>
-          <a:noFill/>
-        </p:spPr>
-        <p:txBody>
-          <a:bodyPr wrap="square" lIns="0" rIns="0" tIns="0" bIns="0" anchor="t">
-            <a:spAutoFit/>
-          </a:bodyPr>
-          <a:lstStyle/>
-          <a:p>
-            <a:pPr algn="l"/>
-            <a:r>
-              <a:rPr sz="1500" b="1" i="0">
+            <a:ext cx="3931920" cy="276999"/>
+          </a:xfrm>
+          <a:prstGeom prst="rect">
+            <a:avLst/>
+          </a:prstGeom>
+          <a:noFill/>
+        </p:spPr>
+        <p:txBody>
+          <a:bodyPr wrap="square" lIns="0" tIns="0" rIns="0" bIns="0" anchor="t">
+            <a:spAutoFit/>
+          </a:bodyPr>
+          <a:lstStyle/>
+          <a:p>
+            <a:pPr algn="l"/>
+            <a:r>
+              <a:rPr b="1" i="0" dirty="0">
                 <a:solidFill>
                   <a:srgbClr val="17151A"/>
                 </a:solidFill>
@@ -10477,22 +10242,22 @@
         <p:spPr>
           <a:xfrm>
             <a:off x="4754880" y="2103120"/>
-            <a:ext cx="1737360" cy="292608"/>
-          </a:xfrm>
-          <a:prstGeom prst="rect">
-            <a:avLst/>
-          </a:prstGeom>
-          <a:noFill/>
-        </p:spPr>
-        <p:txBody>
-          <a:bodyPr wrap="square" lIns="0" rIns="0" tIns="0" bIns="0" anchor="t">
-            <a:spAutoFit/>
-          </a:bodyPr>
-          <a:lstStyle/>
-          <a:p>
-            <a:pPr algn="l"/>
-            <a:r>
-              <a:rPr sz="1400" b="1" i="0">
+            <a:ext cx="1737360" cy="276999"/>
+          </a:xfrm>
+          <a:prstGeom prst="rect">
+            <a:avLst/>
+          </a:prstGeom>
+          <a:noFill/>
+        </p:spPr>
+        <p:txBody>
+          <a:bodyPr wrap="square" lIns="0" tIns="0" rIns="0" bIns="0" anchor="t">
+            <a:spAutoFit/>
+          </a:bodyPr>
+          <a:lstStyle/>
+          <a:p>
+            <a:pPr algn="l"/>
+            <a:r>
+              <a:rPr b="1" i="0">
                 <a:solidFill>
                   <a:srgbClr val="375060"/>
                 </a:solidFill>
@@ -10512,22 +10277,22 @@
         <p:spPr>
           <a:xfrm>
             <a:off x="6675120" y="2103120"/>
-            <a:ext cx="4754880" cy="292608"/>
-          </a:xfrm>
-          <a:prstGeom prst="rect">
-            <a:avLst/>
-          </a:prstGeom>
-          <a:noFill/>
-        </p:spPr>
-        <p:txBody>
-          <a:bodyPr wrap="square" lIns="0" rIns="0" tIns="0" bIns="0" anchor="t">
-            <a:spAutoFit/>
-          </a:bodyPr>
-          <a:lstStyle/>
-          <a:p>
-            <a:pPr algn="l"/>
-            <a:r>
-              <a:rPr sz="1400" b="0" i="0">
+            <a:ext cx="4754880" cy="276999"/>
+          </a:xfrm>
+          <a:prstGeom prst="rect">
+            <a:avLst/>
+          </a:prstGeom>
+          <a:noFill/>
+        </p:spPr>
+        <p:txBody>
+          <a:bodyPr wrap="square" lIns="0" tIns="0" rIns="0" bIns="0" anchor="t">
+            <a:spAutoFit/>
+          </a:bodyPr>
+          <a:lstStyle/>
+          <a:p>
+            <a:pPr algn="l"/>
+            <a:r>
+              <a:rPr b="0" i="0">
                 <a:solidFill>
                   <a:srgbClr val="54565B"/>
                 </a:solidFill>
@@ -10547,22 +10312,22 @@
         <p:spPr>
           <a:xfrm>
             <a:off x="640080" y="2724912"/>
-            <a:ext cx="3931920" cy="292608"/>
-          </a:xfrm>
-          <a:prstGeom prst="rect">
-            <a:avLst/>
-          </a:prstGeom>
-          <a:noFill/>
-        </p:spPr>
-        <p:txBody>
-          <a:bodyPr wrap="square" lIns="0" rIns="0" tIns="0" bIns="0" anchor="t">
-            <a:spAutoFit/>
-          </a:bodyPr>
-          <a:lstStyle/>
-          <a:p>
-            <a:pPr algn="l"/>
-            <a:r>
-              <a:rPr sz="1500" b="1" i="0">
+            <a:ext cx="3931920" cy="276999"/>
+          </a:xfrm>
+          <a:prstGeom prst="rect">
+            <a:avLst/>
+          </a:prstGeom>
+          <a:noFill/>
+        </p:spPr>
+        <p:txBody>
+          <a:bodyPr wrap="square" lIns="0" tIns="0" rIns="0" bIns="0" anchor="t">
+            <a:spAutoFit/>
+          </a:bodyPr>
+          <a:lstStyle/>
+          <a:p>
+            <a:pPr algn="l"/>
+            <a:r>
+              <a:rPr b="1" i="0">
                 <a:solidFill>
                   <a:srgbClr val="17151A"/>
                 </a:solidFill>
@@ -10582,22 +10347,22 @@
         <p:spPr>
           <a:xfrm>
             <a:off x="4754880" y="2724912"/>
-            <a:ext cx="1737360" cy="292608"/>
-          </a:xfrm>
-          <a:prstGeom prst="rect">
-            <a:avLst/>
-          </a:prstGeom>
-          <a:noFill/>
-        </p:spPr>
-        <p:txBody>
-          <a:bodyPr wrap="square" lIns="0" rIns="0" tIns="0" bIns="0" anchor="t">
-            <a:spAutoFit/>
-          </a:bodyPr>
-          <a:lstStyle/>
-          <a:p>
-            <a:pPr algn="l"/>
-            <a:r>
-              <a:rPr sz="1400" b="1" i="0">
+            <a:ext cx="1737360" cy="276999"/>
+          </a:xfrm>
+          <a:prstGeom prst="rect">
+            <a:avLst/>
+          </a:prstGeom>
+          <a:noFill/>
+        </p:spPr>
+        <p:txBody>
+          <a:bodyPr wrap="square" lIns="0" tIns="0" rIns="0" bIns="0" anchor="t">
+            <a:spAutoFit/>
+          </a:bodyPr>
+          <a:lstStyle/>
+          <a:p>
+            <a:pPr algn="l"/>
+            <a:r>
+              <a:rPr b="1" i="0">
                 <a:solidFill>
                   <a:srgbClr val="375060"/>
                 </a:solidFill>
@@ -10617,22 +10382,22 @@
         <p:spPr>
           <a:xfrm>
             <a:off x="6675120" y="2724912"/>
-            <a:ext cx="4754880" cy="292608"/>
-          </a:xfrm>
-          <a:prstGeom prst="rect">
-            <a:avLst/>
-          </a:prstGeom>
-          <a:noFill/>
-        </p:spPr>
-        <p:txBody>
-          <a:bodyPr wrap="square" lIns="0" rIns="0" tIns="0" bIns="0" anchor="t">
-            <a:spAutoFit/>
-          </a:bodyPr>
-          <a:lstStyle/>
-          <a:p>
-            <a:pPr algn="l"/>
-            <a:r>
-              <a:rPr sz="1400" b="0" i="0">
+            <a:ext cx="4754880" cy="276999"/>
+          </a:xfrm>
+          <a:prstGeom prst="rect">
+            <a:avLst/>
+          </a:prstGeom>
+          <a:noFill/>
+        </p:spPr>
+        <p:txBody>
+          <a:bodyPr wrap="square" lIns="0" tIns="0" rIns="0" bIns="0" anchor="t">
+            <a:spAutoFit/>
+          </a:bodyPr>
+          <a:lstStyle/>
+          <a:p>
+            <a:pPr algn="l"/>
+            <a:r>
+              <a:rPr b="0" i="0">
                 <a:solidFill>
                   <a:srgbClr val="54565B"/>
                 </a:solidFill>
@@ -10652,22 +10417,22 @@
         <p:spPr>
           <a:xfrm>
             <a:off x="640080" y="3346704"/>
-            <a:ext cx="3931920" cy="292608"/>
-          </a:xfrm>
-          <a:prstGeom prst="rect">
-            <a:avLst/>
-          </a:prstGeom>
-          <a:noFill/>
-        </p:spPr>
-        <p:txBody>
-          <a:bodyPr wrap="square" lIns="0" rIns="0" tIns="0" bIns="0" anchor="t">
-            <a:spAutoFit/>
-          </a:bodyPr>
-          <a:lstStyle/>
-          <a:p>
-            <a:pPr algn="l"/>
-            <a:r>
-              <a:rPr sz="1500" b="1" i="0">
+            <a:ext cx="3931920" cy="276999"/>
+          </a:xfrm>
+          <a:prstGeom prst="rect">
+            <a:avLst/>
+          </a:prstGeom>
+          <a:noFill/>
+        </p:spPr>
+        <p:txBody>
+          <a:bodyPr wrap="square" lIns="0" tIns="0" rIns="0" bIns="0" anchor="t">
+            <a:spAutoFit/>
+          </a:bodyPr>
+          <a:lstStyle/>
+          <a:p>
+            <a:pPr algn="l"/>
+            <a:r>
+              <a:rPr b="1" i="0">
                 <a:solidFill>
                   <a:srgbClr val="17151A"/>
                 </a:solidFill>
@@ -10687,22 +10452,22 @@
         <p:spPr>
           <a:xfrm>
             <a:off x="4754880" y="3346704"/>
-            <a:ext cx="1737360" cy="292608"/>
-          </a:xfrm>
-          <a:prstGeom prst="rect">
-            <a:avLst/>
-          </a:prstGeom>
-          <a:noFill/>
-        </p:spPr>
-        <p:txBody>
-          <a:bodyPr wrap="square" lIns="0" rIns="0" tIns="0" bIns="0" anchor="t">
-            <a:spAutoFit/>
-          </a:bodyPr>
-          <a:lstStyle/>
-          <a:p>
-            <a:pPr algn="l"/>
-            <a:r>
-              <a:rPr sz="1400" b="1" i="0">
+            <a:ext cx="1737360" cy="276999"/>
+          </a:xfrm>
+          <a:prstGeom prst="rect">
+            <a:avLst/>
+          </a:prstGeom>
+          <a:noFill/>
+        </p:spPr>
+        <p:txBody>
+          <a:bodyPr wrap="square" lIns="0" tIns="0" rIns="0" bIns="0" anchor="t">
+            <a:spAutoFit/>
+          </a:bodyPr>
+          <a:lstStyle/>
+          <a:p>
+            <a:pPr algn="l"/>
+            <a:r>
+              <a:rPr b="1" i="0">
                 <a:solidFill>
                   <a:srgbClr val="375060"/>
                 </a:solidFill>
@@ -10722,22 +10487,22 @@
         <p:spPr>
           <a:xfrm>
             <a:off x="6675120" y="3346704"/>
-            <a:ext cx="4754880" cy="292608"/>
-          </a:xfrm>
-          <a:prstGeom prst="rect">
-            <a:avLst/>
-          </a:prstGeom>
-          <a:noFill/>
-        </p:spPr>
-        <p:txBody>
-          <a:bodyPr wrap="square" lIns="0" rIns="0" tIns="0" bIns="0" anchor="t">
-            <a:spAutoFit/>
-          </a:bodyPr>
-          <a:lstStyle/>
-          <a:p>
-            <a:pPr algn="l"/>
-            <a:r>
-              <a:rPr sz="1400" b="0" i="0">
+            <a:ext cx="4754880" cy="276999"/>
+          </a:xfrm>
+          <a:prstGeom prst="rect">
+            <a:avLst/>
+          </a:prstGeom>
+          <a:noFill/>
+        </p:spPr>
+        <p:txBody>
+          <a:bodyPr wrap="square" lIns="0" tIns="0" rIns="0" bIns="0" anchor="t">
+            <a:spAutoFit/>
+          </a:bodyPr>
+          <a:lstStyle/>
+          <a:p>
+            <a:pPr algn="l"/>
+            <a:r>
+              <a:rPr b="0" i="0">
                 <a:solidFill>
                   <a:srgbClr val="54565B"/>
                 </a:solidFill>
@@ -10757,22 +10522,22 @@
         <p:spPr>
           <a:xfrm>
             <a:off x="640080" y="3968496"/>
-            <a:ext cx="3931920" cy="292608"/>
-          </a:xfrm>
-          <a:prstGeom prst="rect">
-            <a:avLst/>
-          </a:prstGeom>
-          <a:noFill/>
-        </p:spPr>
-        <p:txBody>
-          <a:bodyPr wrap="square" lIns="0" rIns="0" tIns="0" bIns="0" anchor="t">
-            <a:spAutoFit/>
-          </a:bodyPr>
-          <a:lstStyle/>
-          <a:p>
-            <a:pPr algn="l"/>
-            <a:r>
-              <a:rPr sz="1500" b="1" i="0">
+            <a:ext cx="3931920" cy="276999"/>
+          </a:xfrm>
+          <a:prstGeom prst="rect">
+            <a:avLst/>
+          </a:prstGeom>
+          <a:noFill/>
+        </p:spPr>
+        <p:txBody>
+          <a:bodyPr wrap="square" lIns="0" tIns="0" rIns="0" bIns="0" anchor="t">
+            <a:spAutoFit/>
+          </a:bodyPr>
+          <a:lstStyle/>
+          <a:p>
+            <a:pPr algn="l"/>
+            <a:r>
+              <a:rPr b="1" i="0">
                 <a:solidFill>
                   <a:srgbClr val="17151A"/>
                 </a:solidFill>
@@ -10792,22 +10557,22 @@
         <p:spPr>
           <a:xfrm>
             <a:off x="4754880" y="3968496"/>
-            <a:ext cx="1737360" cy="292608"/>
-          </a:xfrm>
-          <a:prstGeom prst="rect">
-            <a:avLst/>
-          </a:prstGeom>
-          <a:noFill/>
-        </p:spPr>
-        <p:txBody>
-          <a:bodyPr wrap="square" lIns="0" rIns="0" tIns="0" bIns="0" anchor="t">
-            <a:spAutoFit/>
-          </a:bodyPr>
-          <a:lstStyle/>
-          <a:p>
-            <a:pPr algn="l"/>
-            <a:r>
-              <a:rPr sz="1400" b="1" i="0">
+            <a:ext cx="1737360" cy="276999"/>
+          </a:xfrm>
+          <a:prstGeom prst="rect">
+            <a:avLst/>
+          </a:prstGeom>
+          <a:noFill/>
+        </p:spPr>
+        <p:txBody>
+          <a:bodyPr wrap="square" lIns="0" tIns="0" rIns="0" bIns="0" anchor="t">
+            <a:spAutoFit/>
+          </a:bodyPr>
+          <a:lstStyle/>
+          <a:p>
+            <a:pPr algn="l"/>
+            <a:r>
+              <a:rPr b="1" i="0">
                 <a:solidFill>
                   <a:srgbClr val="375060"/>
                 </a:solidFill>
@@ -10827,22 +10592,22 @@
         <p:spPr>
           <a:xfrm>
             <a:off x="6675120" y="3968496"/>
-            <a:ext cx="4754880" cy="292608"/>
-          </a:xfrm>
-          <a:prstGeom prst="rect">
-            <a:avLst/>
-          </a:prstGeom>
-          <a:noFill/>
-        </p:spPr>
-        <p:txBody>
-          <a:bodyPr wrap="square" lIns="0" rIns="0" tIns="0" bIns="0" anchor="t">
-            <a:spAutoFit/>
-          </a:bodyPr>
-          <a:lstStyle/>
-          <a:p>
-            <a:pPr algn="l"/>
-            <a:r>
-              <a:rPr sz="1400" b="0" i="0">
+            <a:ext cx="4754880" cy="276999"/>
+          </a:xfrm>
+          <a:prstGeom prst="rect">
+            <a:avLst/>
+          </a:prstGeom>
+          <a:noFill/>
+        </p:spPr>
+        <p:txBody>
+          <a:bodyPr wrap="square" lIns="0" tIns="0" rIns="0" bIns="0" anchor="t">
+            <a:spAutoFit/>
+          </a:bodyPr>
+          <a:lstStyle/>
+          <a:p>
+            <a:pPr algn="l"/>
+            <a:r>
+              <a:rPr b="0" i="0">
                 <a:solidFill>
                   <a:srgbClr val="54565B"/>
                 </a:solidFill>
@@ -10862,22 +10627,22 @@
         <p:spPr>
           <a:xfrm>
             <a:off x="640080" y="4590288"/>
-            <a:ext cx="3931920" cy="292608"/>
-          </a:xfrm>
-          <a:prstGeom prst="rect">
-            <a:avLst/>
-          </a:prstGeom>
-          <a:noFill/>
-        </p:spPr>
-        <p:txBody>
-          <a:bodyPr wrap="square" lIns="0" rIns="0" tIns="0" bIns="0" anchor="t">
-            <a:spAutoFit/>
-          </a:bodyPr>
-          <a:lstStyle/>
-          <a:p>
-            <a:pPr algn="l"/>
-            <a:r>
-              <a:rPr sz="1500" b="1" i="0">
+            <a:ext cx="3931920" cy="276999"/>
+          </a:xfrm>
+          <a:prstGeom prst="rect">
+            <a:avLst/>
+          </a:prstGeom>
+          <a:noFill/>
+        </p:spPr>
+        <p:txBody>
+          <a:bodyPr wrap="square" lIns="0" tIns="0" rIns="0" bIns="0" anchor="t">
+            <a:spAutoFit/>
+          </a:bodyPr>
+          <a:lstStyle/>
+          <a:p>
+            <a:pPr algn="l"/>
+            <a:r>
+              <a:rPr b="1" i="0">
                 <a:solidFill>
                   <a:srgbClr val="17151A"/>
                 </a:solidFill>
@@ -10897,22 +10662,22 @@
         <p:spPr>
           <a:xfrm>
             <a:off x="4754880" y="4590288"/>
-            <a:ext cx="1737360" cy="292608"/>
-          </a:xfrm>
-          <a:prstGeom prst="rect">
-            <a:avLst/>
-          </a:prstGeom>
-          <a:noFill/>
-        </p:spPr>
-        <p:txBody>
-          <a:bodyPr wrap="square" lIns="0" rIns="0" tIns="0" bIns="0" anchor="t">
-            <a:spAutoFit/>
-          </a:bodyPr>
-          <a:lstStyle/>
-          <a:p>
-            <a:pPr algn="l"/>
-            <a:r>
-              <a:rPr sz="1400" b="1" i="0">
+            <a:ext cx="1737360" cy="276999"/>
+          </a:xfrm>
+          <a:prstGeom prst="rect">
+            <a:avLst/>
+          </a:prstGeom>
+          <a:noFill/>
+        </p:spPr>
+        <p:txBody>
+          <a:bodyPr wrap="square" lIns="0" tIns="0" rIns="0" bIns="0" anchor="t">
+            <a:spAutoFit/>
+          </a:bodyPr>
+          <a:lstStyle/>
+          <a:p>
+            <a:pPr algn="l"/>
+            <a:r>
+              <a:rPr b="1" i="0">
                 <a:solidFill>
                   <a:srgbClr val="375060"/>
                 </a:solidFill>
@@ -10932,22 +10697,22 @@
         <p:spPr>
           <a:xfrm>
             <a:off x="6675120" y="4590288"/>
-            <a:ext cx="4754880" cy="292608"/>
-          </a:xfrm>
-          <a:prstGeom prst="rect">
-            <a:avLst/>
-          </a:prstGeom>
-          <a:noFill/>
-        </p:spPr>
-        <p:txBody>
-          <a:bodyPr wrap="square" lIns="0" rIns="0" tIns="0" bIns="0" anchor="t">
-            <a:spAutoFit/>
-          </a:bodyPr>
-          <a:lstStyle/>
-          <a:p>
-            <a:pPr algn="l"/>
-            <a:r>
-              <a:rPr sz="1400" b="0" i="0">
+            <a:ext cx="4754880" cy="276999"/>
+          </a:xfrm>
+          <a:prstGeom prst="rect">
+            <a:avLst/>
+          </a:prstGeom>
+          <a:noFill/>
+        </p:spPr>
+        <p:txBody>
+          <a:bodyPr wrap="square" lIns="0" tIns="0" rIns="0" bIns="0" anchor="t">
+            <a:spAutoFit/>
+          </a:bodyPr>
+          <a:lstStyle/>
+          <a:p>
+            <a:pPr algn="l"/>
+            <a:r>
+              <a:rPr b="0" i="0">
                 <a:solidFill>
                   <a:srgbClr val="54565B"/>
                 </a:solidFill>
@@ -11001,6 +10766,7 @@
           <a:lstStyle/>
           <a:p>
             <a:pPr algn="ctr"/>
+            <a:endParaRPr sz="2400"/>
           </a:p>
         </p:txBody>
       </p:sp>
@@ -11013,22 +10779,22 @@
         <p:spPr>
           <a:xfrm>
             <a:off x="640080" y="5212079"/>
-            <a:ext cx="3931920" cy="292608"/>
-          </a:xfrm>
-          <a:prstGeom prst="rect">
-            <a:avLst/>
-          </a:prstGeom>
-          <a:noFill/>
-        </p:spPr>
-        <p:txBody>
-          <a:bodyPr wrap="square" lIns="0" rIns="0" tIns="0" bIns="0" anchor="t">
-            <a:spAutoFit/>
-          </a:bodyPr>
-          <a:lstStyle/>
-          <a:p>
-            <a:pPr algn="l"/>
-            <a:r>
-              <a:rPr sz="1500" b="1" i="0">
+            <a:ext cx="3931920" cy="276999"/>
+          </a:xfrm>
+          <a:prstGeom prst="rect">
+            <a:avLst/>
+          </a:prstGeom>
+          <a:noFill/>
+        </p:spPr>
+        <p:txBody>
+          <a:bodyPr wrap="square" lIns="0" tIns="0" rIns="0" bIns="0" anchor="t">
+            <a:spAutoFit/>
+          </a:bodyPr>
+          <a:lstStyle/>
+          <a:p>
+            <a:pPr algn="l"/>
+            <a:r>
+              <a:rPr b="1" i="0">
                 <a:solidFill>
                   <a:srgbClr val="BA0C2F"/>
                 </a:solidFill>
@@ -11048,22 +10814,22 @@
         <p:spPr>
           <a:xfrm>
             <a:off x="4754880" y="5212079"/>
-            <a:ext cx="1737360" cy="292608"/>
-          </a:xfrm>
-          <a:prstGeom prst="rect">
-            <a:avLst/>
-          </a:prstGeom>
-          <a:noFill/>
-        </p:spPr>
-        <p:txBody>
-          <a:bodyPr wrap="square" lIns="0" rIns="0" tIns="0" bIns="0" anchor="t">
-            <a:spAutoFit/>
-          </a:bodyPr>
-          <a:lstStyle/>
-          <a:p>
-            <a:pPr algn="l"/>
-            <a:r>
-              <a:rPr sz="1400" b="1" i="0">
+            <a:ext cx="1737360" cy="276999"/>
+          </a:xfrm>
+          <a:prstGeom prst="rect">
+            <a:avLst/>
+          </a:prstGeom>
+          <a:noFill/>
+        </p:spPr>
+        <p:txBody>
+          <a:bodyPr wrap="square" lIns="0" tIns="0" rIns="0" bIns="0" anchor="t">
+            <a:spAutoFit/>
+          </a:bodyPr>
+          <a:lstStyle/>
+          <a:p>
+            <a:pPr algn="l"/>
+            <a:r>
+              <a:rPr b="1" i="0">
                 <a:solidFill>
                   <a:srgbClr val="375060"/>
                 </a:solidFill>
@@ -11083,22 +10849,22 @@
         <p:spPr>
           <a:xfrm>
             <a:off x="6675120" y="5212079"/>
-            <a:ext cx="4754880" cy="292608"/>
-          </a:xfrm>
-          <a:prstGeom prst="rect">
-            <a:avLst/>
-          </a:prstGeom>
-          <a:noFill/>
-        </p:spPr>
-        <p:txBody>
-          <a:bodyPr wrap="square" lIns="0" rIns="0" tIns="0" bIns="0" anchor="t">
-            <a:spAutoFit/>
-          </a:bodyPr>
-          <a:lstStyle/>
-          <a:p>
-            <a:pPr algn="l"/>
-            <a:r>
-              <a:rPr sz="1400" b="0" i="0">
+            <a:ext cx="4754880" cy="276999"/>
+          </a:xfrm>
+          <a:prstGeom prst="rect">
+            <a:avLst/>
+          </a:prstGeom>
+          <a:noFill/>
+        </p:spPr>
+        <p:txBody>
+          <a:bodyPr wrap="square" lIns="0" tIns="0" rIns="0" bIns="0" anchor="t">
+            <a:spAutoFit/>
+          </a:bodyPr>
+          <a:lstStyle/>
+          <a:p>
+            <a:pPr algn="l"/>
+            <a:r>
+              <a:rPr b="0" i="0">
                 <a:solidFill>
                   <a:srgbClr val="54565B"/>
                 </a:solidFill>
@@ -11118,22 +10884,22 @@
         <p:spPr>
           <a:xfrm>
             <a:off x="640080" y="5806440"/>
-            <a:ext cx="10607040" cy="292608"/>
-          </a:xfrm>
-          <a:prstGeom prst="rect">
-            <a:avLst/>
-          </a:prstGeom>
-          <a:noFill/>
-        </p:spPr>
-        <p:txBody>
-          <a:bodyPr wrap="square" lIns="0" rIns="0" tIns="0" bIns="0" anchor="t">
-            <a:spAutoFit/>
-          </a:bodyPr>
-          <a:lstStyle/>
-          <a:p>
-            <a:pPr algn="l"/>
-            <a:r>
-              <a:rPr sz="1500" b="1" i="0">
+            <a:ext cx="10607040" cy="276999"/>
+          </a:xfrm>
+          <a:prstGeom prst="rect">
+            <a:avLst/>
+          </a:prstGeom>
+          <a:noFill/>
+        </p:spPr>
+        <p:txBody>
+          <a:bodyPr wrap="square" lIns="0" tIns="0" rIns="0" bIns="0" anchor="t">
+            <a:spAutoFit/>
+          </a:bodyPr>
+          <a:lstStyle/>
+          <a:p>
+            <a:pPr algn="l"/>
+            <a:r>
+              <a:rPr b="1" i="0">
                 <a:solidFill>
                   <a:srgbClr val="17151A"/>
                 </a:solidFill>
@@ -11153,22 +10919,22 @@
         <p:spPr>
           <a:xfrm>
             <a:off x="640080" y="6108192"/>
-            <a:ext cx="10607040" cy="292608"/>
-          </a:xfrm>
-          <a:prstGeom prst="rect">
-            <a:avLst/>
-          </a:prstGeom>
-          <a:noFill/>
-        </p:spPr>
-        <p:txBody>
-          <a:bodyPr wrap="square" lIns="0" rIns="0" tIns="0" bIns="0" anchor="t">
-            <a:spAutoFit/>
-          </a:bodyPr>
-          <a:lstStyle/>
-          <a:p>
-            <a:pPr algn="l"/>
-            <a:r>
-              <a:rPr sz="1500" b="1" i="0">
+            <a:ext cx="10607040" cy="276999"/>
+          </a:xfrm>
+          <a:prstGeom prst="rect">
+            <a:avLst/>
+          </a:prstGeom>
+          <a:noFill/>
+        </p:spPr>
+        <p:txBody>
+          <a:bodyPr wrap="square" lIns="0" tIns="0" rIns="0" bIns="0" anchor="t">
+            <a:spAutoFit/>
+          </a:bodyPr>
+          <a:lstStyle/>
+          <a:p>
+            <a:pPr algn="l"/>
+            <a:r>
+              <a:rPr b="1" i="0">
                 <a:solidFill>
                   <a:srgbClr val="17151A"/>
                 </a:solidFill>
@@ -11188,7 +10954,7 @@
 </file>
 
 <file path=ppt/slides/slide5.xml><?xml version="1.0" encoding="utf-8"?>
-<p:sld xmlns:a="http://schemas.openxmlformats.org/drawingml/2006/main" xmlns:p="http://schemas.openxmlformats.org/presentationml/2006/main" xmlns:r="http://schemas.openxmlformats.org/officeDocument/2006/relationships">
+<p:sld xmlns:a="http://schemas.openxmlformats.org/drawingml/2006/main" xmlns:r="http://schemas.openxmlformats.org/officeDocument/2006/relationships" xmlns:p="http://schemas.openxmlformats.org/presentationml/2006/main">
   <p:cSld>
     <p:spTree>
       <p:nvGrpSpPr>
@@ -11196,7 +10962,14 @@
         <p:cNvGrpSpPr/>
         <p:nvPr/>
       </p:nvGrpSpPr>
-      <p:grpSpPr/>
+      <p:grpSpPr>
+        <a:xfrm>
+          <a:off x="0" y="0"/>
+          <a:ext cx="0" cy="0"/>
+          <a:chOff x="0" y="0"/>
+          <a:chExt cx="0" cy="0"/>
+        </a:xfrm>
+      </p:grpSpPr>
       <p:sp>
         <p:nvSpPr>
           <p:cNvPr id="2" name="Rounded Rectangle 1"/>
@@ -11240,6 +11013,7 @@
           <a:lstStyle/>
           <a:p>
             <a:pPr algn="ctr"/>
+            <a:endParaRPr/>
           </a:p>
         </p:txBody>
       </p:sp>
@@ -11260,7 +11034,7 @@
           <a:noFill/>
         </p:spPr>
         <p:txBody>
-          <a:bodyPr wrap="square" lIns="0" rIns="0" tIns="0" bIns="0" anchor="t">
+          <a:bodyPr wrap="square" lIns="0" tIns="0" rIns="0" bIns="0" anchor="t">
             <a:spAutoFit/>
           </a:bodyPr>
           <a:lstStyle/>
@@ -11295,7 +11069,7 @@
           <a:noFill/>
         </p:spPr>
         <p:txBody>
-          <a:bodyPr wrap="square" lIns="0" rIns="0" tIns="0" bIns="0" anchor="t">
+          <a:bodyPr wrap="square" lIns="0" tIns="0" rIns="0" bIns="0" anchor="t">
             <a:spAutoFit/>
           </a:bodyPr>
           <a:lstStyle/>
@@ -11354,6 +11128,7 @@
           <a:lstStyle/>
           <a:p>
             <a:pPr algn="ctr"/>
+            <a:endParaRPr/>
           </a:p>
         </p:txBody>
       </p:sp>
@@ -11374,7 +11149,7 @@
           <a:noFill/>
         </p:spPr>
         <p:txBody>
-          <a:bodyPr wrap="square" lIns="0" rIns="0" tIns="0" bIns="0" anchor="t">
+          <a:bodyPr wrap="square" lIns="0" tIns="0" rIns="0" bIns="0" anchor="t">
             <a:spAutoFit/>
           </a:bodyPr>
           <a:lstStyle/>
@@ -11433,6 +11208,7 @@
           <a:lstStyle/>
           <a:p>
             <a:pPr algn="ctr"/>
+            <a:endParaRPr/>
           </a:p>
         </p:txBody>
       </p:sp>
@@ -11453,7 +11229,7 @@
           <a:noFill/>
         </p:spPr>
         <p:txBody>
-          <a:bodyPr wrap="square" lIns="0" rIns="0" tIns="0" bIns="0" anchor="t">
+          <a:bodyPr wrap="square" lIns="0" tIns="0" rIns="0" bIns="0" anchor="t">
             <a:spAutoFit/>
           </a:bodyPr>
           <a:lstStyle/>
@@ -11512,6 +11288,7 @@
           <a:lstStyle/>
           <a:p>
             <a:pPr algn="ctr"/>
+            <a:endParaRPr/>
           </a:p>
         </p:txBody>
       </p:sp>
@@ -11532,7 +11309,7 @@
           <a:noFill/>
         </p:spPr>
         <p:txBody>
-          <a:bodyPr wrap="square" lIns="0" rIns="0" tIns="0" bIns="0" anchor="t">
+          <a:bodyPr wrap="square" lIns="0" tIns="0" rIns="0" bIns="0" anchor="t">
             <a:spAutoFit/>
           </a:bodyPr>
           <a:lstStyle/>
@@ -11591,6 +11368,7 @@
           <a:lstStyle/>
           <a:p>
             <a:pPr algn="ctr"/>
+            <a:endParaRPr/>
           </a:p>
         </p:txBody>
       </p:sp>
@@ -11611,7 +11389,7 @@
           <a:noFill/>
         </p:spPr>
         <p:txBody>
-          <a:bodyPr wrap="square" lIns="0" rIns="0" tIns="0" bIns="0" anchor="t">
+          <a:bodyPr wrap="square" lIns="0" tIns="0" rIns="0" bIns="0" anchor="t">
             <a:spAutoFit/>
           </a:bodyPr>
           <a:lstStyle/>
@@ -11670,6 +11448,7 @@
           <a:lstStyle/>
           <a:p>
             <a:pPr algn="ctr"/>
+            <a:endParaRPr/>
           </a:p>
         </p:txBody>
       </p:sp>
@@ -11690,7 +11469,7 @@
           <a:noFill/>
         </p:spPr>
         <p:txBody>
-          <a:bodyPr wrap="square" lIns="0" rIns="0" tIns="0" bIns="0" anchor="t">
+          <a:bodyPr wrap="square" lIns="0" tIns="0" rIns="0" bIns="0" anchor="t">
             <a:spAutoFit/>
           </a:bodyPr>
           <a:lstStyle/>
@@ -11717,7 +11496,7 @@
 </file>
 
 <file path=ppt/slides/slide6.xml><?xml version="1.0" encoding="utf-8"?>
-<p:sld xmlns:a="http://schemas.openxmlformats.org/drawingml/2006/main" xmlns:p="http://schemas.openxmlformats.org/presentationml/2006/main" xmlns:r="http://schemas.openxmlformats.org/officeDocument/2006/relationships">
+<p:sld xmlns:a="http://schemas.openxmlformats.org/drawingml/2006/main" xmlns:r="http://schemas.openxmlformats.org/officeDocument/2006/relationships" xmlns:p="http://schemas.openxmlformats.org/presentationml/2006/main">
   <p:cSld>
     <p:spTree>
       <p:nvGrpSpPr>
@@ -11725,7 +11504,14 @@
         <p:cNvGrpSpPr/>
         <p:nvPr/>
       </p:nvGrpSpPr>
-      <p:grpSpPr/>
+      <p:grpSpPr>
+        <a:xfrm>
+          <a:off x="0" y="0"/>
+          <a:ext cx="0" cy="0"/>
+          <a:chOff x="0" y="0"/>
+          <a:chExt cx="0" cy="0"/>
+        </a:xfrm>
+      </p:grpSpPr>
       <p:sp>
         <p:nvSpPr>
           <p:cNvPr id="2" name="TextBox 1"/>
@@ -11743,7 +11529,7 @@
           <a:noFill/>
         </p:spPr>
         <p:txBody>
-          <a:bodyPr wrap="square" lIns="0" rIns="0" tIns="0" bIns="0" anchor="t">
+          <a:bodyPr wrap="square" lIns="0" tIns="0" rIns="0" bIns="0" anchor="t">
             <a:spAutoFit/>
           </a:bodyPr>
           <a:lstStyle/>
@@ -11778,7 +11564,7 @@
           <a:noFill/>
         </p:spPr>
         <p:txBody>
-          <a:bodyPr wrap="square" lIns="0" rIns="0" tIns="0" bIns="0" anchor="t">
+          <a:bodyPr wrap="square" lIns="0" tIns="0" rIns="0" bIns="0" anchor="t">
             <a:spAutoFit/>
           </a:bodyPr>
           <a:lstStyle/>
@@ -11865,6 +11651,7 @@
           <a:lstStyle/>
           <a:p>
             <a:pPr algn="ctr"/>
+            <a:endParaRPr/>
           </a:p>
         </p:txBody>
       </p:sp>
@@ -11909,6 +11696,7 @@
           <a:lstStyle/>
           <a:p>
             <a:pPr algn="ctr"/>
+            <a:endParaRPr/>
           </a:p>
         </p:txBody>
       </p:sp>
@@ -11929,7 +11717,7 @@
           <a:noFill/>
         </p:spPr>
         <p:txBody>
-          <a:bodyPr wrap="square" lIns="0" rIns="0" tIns="0" bIns="0" anchor="t">
+          <a:bodyPr wrap="square" lIns="0" tIns="0" rIns="0" bIns="0" anchor="t">
             <a:spAutoFit/>
           </a:bodyPr>
           <a:lstStyle/>
@@ -11964,7 +11752,7 @@
           <a:noFill/>
         </p:spPr>
         <p:txBody>
-          <a:bodyPr wrap="square" lIns="0" rIns="0" tIns="0" bIns="0" anchor="t">
+          <a:bodyPr wrap="square" lIns="0" tIns="0" rIns="0" bIns="0" anchor="t">
             <a:spAutoFit/>
           </a:bodyPr>
           <a:lstStyle/>
@@ -11999,7 +11787,7 @@
           <a:noFill/>
         </p:spPr>
         <p:txBody>
-          <a:bodyPr wrap="square" lIns="0" rIns="0" tIns="0" bIns="0" anchor="t">
+          <a:bodyPr wrap="square" lIns="0" tIns="0" rIns="0" bIns="0" anchor="t">
             <a:spAutoFit/>
           </a:bodyPr>
           <a:lstStyle/>
@@ -12062,6 +11850,7 @@
           <a:lstStyle/>
           <a:p>
             <a:pPr algn="ctr"/>
+            <a:endParaRPr/>
           </a:p>
         </p:txBody>
       </p:sp>
@@ -12106,6 +11895,7 @@
           <a:lstStyle/>
           <a:p>
             <a:pPr algn="ctr"/>
+            <a:endParaRPr/>
           </a:p>
         </p:txBody>
       </p:sp>
@@ -12126,7 +11916,7 @@
           <a:noFill/>
         </p:spPr>
         <p:txBody>
-          <a:bodyPr wrap="square" lIns="0" rIns="0" tIns="0" bIns="0" anchor="t">
+          <a:bodyPr wrap="square" lIns="0" tIns="0" rIns="0" bIns="0" anchor="t">
             <a:spAutoFit/>
           </a:bodyPr>
           <a:lstStyle/>
@@ -12161,7 +11951,7 @@
           <a:noFill/>
         </p:spPr>
         <p:txBody>
-          <a:bodyPr wrap="square" lIns="0" rIns="0" tIns="0" bIns="0" anchor="t">
+          <a:bodyPr wrap="square" lIns="0" tIns="0" rIns="0" bIns="0" anchor="t">
             <a:spAutoFit/>
           </a:bodyPr>
           <a:lstStyle/>
@@ -12196,7 +11986,7 @@
           <a:noFill/>
         </p:spPr>
         <p:txBody>
-          <a:bodyPr wrap="square" lIns="0" rIns="0" tIns="0" bIns="0" anchor="t">
+          <a:bodyPr wrap="square" lIns="0" tIns="0" rIns="0" bIns="0" anchor="t">
             <a:spAutoFit/>
           </a:bodyPr>
           <a:lstStyle/>
@@ -12259,6 +12049,7 @@
           <a:lstStyle/>
           <a:p>
             <a:pPr algn="ctr"/>
+            <a:endParaRPr/>
           </a:p>
         </p:txBody>
       </p:sp>
@@ -12303,6 +12094,7 @@
           <a:lstStyle/>
           <a:p>
             <a:pPr algn="ctr"/>
+            <a:endParaRPr/>
           </a:p>
         </p:txBody>
       </p:sp>
@@ -12323,7 +12115,7 @@
           <a:noFill/>
         </p:spPr>
         <p:txBody>
-          <a:bodyPr wrap="square" lIns="0" rIns="0" tIns="0" bIns="0" anchor="t">
+          <a:bodyPr wrap="square" lIns="0" tIns="0" rIns="0" bIns="0" anchor="t">
             <a:spAutoFit/>
           </a:bodyPr>
           <a:lstStyle/>
@@ -12358,7 +12150,7 @@
           <a:noFill/>
         </p:spPr>
         <p:txBody>
-          <a:bodyPr wrap="square" lIns="0" rIns="0" tIns="0" bIns="0" anchor="t">
+          <a:bodyPr wrap="square" lIns="0" tIns="0" rIns="0" bIns="0" anchor="t">
             <a:spAutoFit/>
           </a:bodyPr>
           <a:lstStyle/>
@@ -12405,7 +12197,7 @@
           <a:noFill/>
         </p:spPr>
         <p:txBody>
-          <a:bodyPr wrap="square" lIns="0" rIns="0" tIns="0" bIns="0" anchor="t">
+          <a:bodyPr wrap="square" lIns="0" tIns="0" rIns="0" bIns="0" anchor="t">
             <a:spAutoFit/>
           </a:bodyPr>
           <a:lstStyle/>
@@ -12468,6 +12260,7 @@
           <a:lstStyle/>
           <a:p>
             <a:pPr algn="ctr"/>
+            <a:endParaRPr/>
           </a:p>
         </p:txBody>
       </p:sp>
@@ -12512,6 +12305,7 @@
           <a:lstStyle/>
           <a:p>
             <a:pPr algn="ctr"/>
+            <a:endParaRPr/>
           </a:p>
         </p:txBody>
       </p:sp>
@@ -12532,7 +12326,7 @@
           <a:noFill/>
         </p:spPr>
         <p:txBody>
-          <a:bodyPr wrap="square" lIns="0" rIns="0" tIns="0" bIns="0" anchor="t">
+          <a:bodyPr wrap="square" lIns="0" tIns="0" rIns="0" bIns="0" anchor="t">
             <a:spAutoFit/>
           </a:bodyPr>
           <a:lstStyle/>
@@ -12567,7 +12361,7 @@
           <a:noFill/>
         </p:spPr>
         <p:txBody>
-          <a:bodyPr wrap="square" lIns="0" rIns="0" tIns="0" bIns="0" anchor="t">
+          <a:bodyPr wrap="square" lIns="0" tIns="0" rIns="0" bIns="0" anchor="t">
             <a:spAutoFit/>
           </a:bodyPr>
           <a:lstStyle/>
@@ -12614,7 +12408,7 @@
           <a:noFill/>
         </p:spPr>
         <p:txBody>
-          <a:bodyPr wrap="square" lIns="0" rIns="0" tIns="0" bIns="0" anchor="t">
+          <a:bodyPr wrap="square" lIns="0" tIns="0" rIns="0" bIns="0" anchor="t">
             <a:spAutoFit/>
           </a:bodyPr>
           <a:lstStyle/>
@@ -12649,7 +12443,7 @@
           <a:noFill/>
         </p:spPr>
         <p:txBody>
-          <a:bodyPr wrap="square" lIns="0" rIns="0" tIns="0" bIns="0" anchor="t">
+          <a:bodyPr wrap="square" lIns="0" tIns="0" rIns="0" bIns="0" anchor="t">
             <a:spAutoFit/>
           </a:bodyPr>
           <a:lstStyle/>
@@ -12684,7 +12478,7 @@
           <a:noFill/>
         </p:spPr>
         <p:txBody>
-          <a:bodyPr wrap="square" lIns="0" rIns="0" tIns="0" bIns="0" anchor="t">
+          <a:bodyPr wrap="square" lIns="0" tIns="0" rIns="0" bIns="0" anchor="t">
             <a:spAutoFit/>
           </a:bodyPr>
           <a:lstStyle/>
@@ -12711,7 +12505,7 @@
 </file>
 
 <file path=ppt/slides/slide7.xml><?xml version="1.0" encoding="utf-8"?>
-<p:sld xmlns:a="http://schemas.openxmlformats.org/drawingml/2006/main" xmlns:p="http://schemas.openxmlformats.org/presentationml/2006/main" xmlns:r="http://schemas.openxmlformats.org/officeDocument/2006/relationships">
+<p:sld xmlns:a="http://schemas.openxmlformats.org/drawingml/2006/main" xmlns:r="http://schemas.openxmlformats.org/officeDocument/2006/relationships" xmlns:p="http://schemas.openxmlformats.org/presentationml/2006/main">
   <p:cSld>
     <p:spTree>
       <p:nvGrpSpPr>
@@ -12719,7 +12513,14 @@
         <p:cNvGrpSpPr/>
         <p:nvPr/>
       </p:nvGrpSpPr>
-      <p:grpSpPr/>
+      <p:grpSpPr>
+        <a:xfrm>
+          <a:off x="0" y="0"/>
+          <a:ext cx="0" cy="0"/>
+          <a:chOff x="0" y="0"/>
+          <a:chExt cx="0" cy="0"/>
+        </a:xfrm>
+      </p:grpSpPr>
       <p:sp>
         <p:nvSpPr>
           <p:cNvPr id="2" name="TextBox 1"/>
@@ -12737,7 +12538,7 @@
           <a:noFill/>
         </p:spPr>
         <p:txBody>
-          <a:bodyPr wrap="square" lIns="0" rIns="0" tIns="0" bIns="0" anchor="t">
+          <a:bodyPr wrap="square" lIns="0" tIns="0" rIns="0" bIns="0" anchor="t">
             <a:spAutoFit/>
           </a:bodyPr>
           <a:lstStyle/>
@@ -12772,7 +12573,7 @@
           <a:noFill/>
         </p:spPr>
         <p:txBody>
-          <a:bodyPr wrap="square" lIns="0" rIns="0" tIns="0" bIns="0" anchor="t">
+          <a:bodyPr wrap="square" lIns="0" tIns="0" rIns="0" bIns="0" anchor="t">
             <a:spAutoFit/>
           </a:bodyPr>
           <a:lstStyle/>
@@ -12831,7 +12632,7 @@
           <a:noFill/>
         </p:spPr>
         <p:txBody>
-          <a:bodyPr wrap="square" lIns="0" rIns="0" tIns="0" bIns="0" anchor="t">
+          <a:bodyPr wrap="square" lIns="0" tIns="0" rIns="0" bIns="0" anchor="t">
             <a:spAutoFit/>
           </a:bodyPr>
           <a:lstStyle/>
@@ -12892,6 +12693,7 @@
           <a:lstStyle/>
           <a:p>
             <a:pPr algn="ctr"/>
+            <a:endParaRPr/>
           </a:p>
         </p:txBody>
       </p:sp>
@@ -12912,7 +12714,7 @@
           <a:noFill/>
         </p:spPr>
         <p:txBody>
-          <a:bodyPr wrap="square" lIns="0" rIns="0" tIns="0" bIns="0" anchor="t">
+          <a:bodyPr wrap="square" lIns="0" tIns="0" rIns="0" bIns="0" anchor="t">
             <a:spAutoFit/>
           </a:bodyPr>
           <a:lstStyle/>
@@ -12983,7 +12785,7 @@
           <a:noFill/>
         </p:spPr>
         <p:txBody>
-          <a:bodyPr wrap="square" lIns="0" rIns="0" tIns="0" bIns="0" anchor="t">
+          <a:bodyPr wrap="square" lIns="0" tIns="0" rIns="0" bIns="0" anchor="t">
             <a:spAutoFit/>
           </a:bodyPr>
           <a:lstStyle/>
@@ -13046,6 +12848,7 @@
           <a:lstStyle/>
           <a:p>
             <a:pPr algn="ctr"/>
+            <a:endParaRPr/>
           </a:p>
         </p:txBody>
       </p:sp>
@@ -13066,7 +12869,7 @@
           <a:noFill/>
         </p:spPr>
         <p:txBody>
-          <a:bodyPr wrap="square" lIns="0" rIns="0" tIns="0" bIns="0" anchor="t">
+          <a:bodyPr wrap="square" lIns="0" tIns="0" rIns="0" bIns="0" anchor="t">
             <a:spAutoFit/>
           </a:bodyPr>
           <a:lstStyle/>
@@ -13101,7 +12904,7 @@
           <a:noFill/>
         </p:spPr>
         <p:txBody>
-          <a:bodyPr wrap="square" lIns="0" rIns="0" tIns="0" bIns="0" anchor="t">
+          <a:bodyPr wrap="square" lIns="0" tIns="0" rIns="0" bIns="0" anchor="t">
             <a:spAutoFit/>
           </a:bodyPr>
           <a:lstStyle/>
@@ -13128,7 +12931,7 @@
 </file>
 
 <file path=ppt/slides/slide8.xml><?xml version="1.0" encoding="utf-8"?>
-<p:sld xmlns:a="http://schemas.openxmlformats.org/drawingml/2006/main" xmlns:p="http://schemas.openxmlformats.org/presentationml/2006/main" xmlns:r="http://schemas.openxmlformats.org/officeDocument/2006/relationships">
+<p:sld xmlns:a="http://schemas.openxmlformats.org/drawingml/2006/main" xmlns:r="http://schemas.openxmlformats.org/officeDocument/2006/relationships" xmlns:p="http://schemas.openxmlformats.org/presentationml/2006/main">
   <p:cSld>
     <p:spTree>
       <p:nvGrpSpPr>
@@ -13136,7 +12939,14 @@
         <p:cNvGrpSpPr/>
         <p:nvPr/>
       </p:nvGrpSpPr>
-      <p:grpSpPr/>
+      <p:grpSpPr>
+        <a:xfrm>
+          <a:off x="0" y="0"/>
+          <a:ext cx="0" cy="0"/>
+          <a:chOff x="0" y="0"/>
+          <a:chExt cx="0" cy="0"/>
+        </a:xfrm>
+      </p:grpSpPr>
       <p:sp>
         <p:nvSpPr>
           <p:cNvPr id="2" name="Rectangle 1"/>
@@ -13178,6 +12988,7 @@
           <a:lstStyle/>
           <a:p>
             <a:pPr algn="ctr"/>
+            <a:endParaRPr/>
           </a:p>
         </p:txBody>
       </p:sp>
@@ -13198,7 +13009,7 @@
           <a:noFill/>
         </p:spPr>
         <p:txBody>
-          <a:bodyPr wrap="square" lIns="0" rIns="0" tIns="0" bIns="0" anchor="t">
+          <a:bodyPr wrap="square" lIns="0" tIns="0" rIns="0" bIns="0" anchor="t">
             <a:spAutoFit/>
           </a:bodyPr>
           <a:lstStyle/>
@@ -13293,6 +13104,7 @@
           <a:lstStyle/>
           <a:p>
             <a:pPr algn="ctr"/>
+            <a:endParaRPr/>
           </a:p>
         </p:txBody>
       </p:sp>
@@ -13313,7 +13125,7 @@
           <a:noFill/>
         </p:spPr>
         <p:txBody>
-          <a:bodyPr wrap="square" lIns="0" rIns="0" tIns="0" bIns="0" anchor="t">
+          <a:bodyPr wrap="square" lIns="0" tIns="0" rIns="0" bIns="0" anchor="t">
             <a:spAutoFit/>
           </a:bodyPr>
           <a:lstStyle/>
@@ -13340,7 +13152,7 @@
 </file>
 
 <file path=ppt/slides/slide9.xml><?xml version="1.0" encoding="utf-8"?>
-<p:sld xmlns:a="http://schemas.openxmlformats.org/drawingml/2006/main" xmlns:p="http://schemas.openxmlformats.org/presentationml/2006/main" xmlns:r="http://schemas.openxmlformats.org/officeDocument/2006/relationships">
+<p:sld xmlns:a="http://schemas.openxmlformats.org/drawingml/2006/main" xmlns:r="http://schemas.openxmlformats.org/officeDocument/2006/relationships" xmlns:p="http://schemas.openxmlformats.org/presentationml/2006/main">
   <p:cSld>
     <p:spTree>
       <p:nvGrpSpPr>
@@ -13348,7 +13160,14 @@
         <p:cNvGrpSpPr/>
         <p:nvPr/>
       </p:nvGrpSpPr>
-      <p:grpSpPr/>
+      <p:grpSpPr>
+        <a:xfrm>
+          <a:off x="0" y="0"/>
+          <a:ext cx="0" cy="0"/>
+          <a:chOff x="0" y="0"/>
+          <a:chExt cx="0" cy="0"/>
+        </a:xfrm>
+      </p:grpSpPr>
       <p:sp>
         <p:nvSpPr>
           <p:cNvPr id="2" name="TextBox 1"/>
@@ -13366,7 +13185,7 @@
           <a:noFill/>
         </p:spPr>
         <p:txBody>
-          <a:bodyPr wrap="square" lIns="0" rIns="0" tIns="0" bIns="0" anchor="t">
+          <a:bodyPr wrap="square" lIns="0" tIns="0" rIns="0" bIns="0" anchor="t">
             <a:spAutoFit/>
           </a:bodyPr>
           <a:lstStyle/>
@@ -13401,7 +13220,7 @@
           <a:noFill/>
         </p:spPr>
         <p:txBody>
-          <a:bodyPr wrap="square" lIns="0" rIns="0" tIns="0" bIns="0" anchor="t">
+          <a:bodyPr wrap="square" lIns="0" tIns="0" rIns="0" bIns="0" anchor="t">
             <a:spAutoFit/>
           </a:bodyPr>
           <a:lstStyle/>
@@ -13486,6 +13305,7 @@
           <a:lstStyle/>
           <a:p>
             <a:pPr algn="ctr"/>
+            <a:endParaRPr/>
           </a:p>
         </p:txBody>
       </p:sp>
@@ -13506,7 +13326,7 @@
           <a:noFill/>
         </p:spPr>
         <p:txBody>
-          <a:bodyPr wrap="square" lIns="0" rIns="0" tIns="0" bIns="0" anchor="t">
+          <a:bodyPr wrap="square" lIns="0" tIns="0" rIns="0" bIns="0" anchor="t">
             <a:spAutoFit/>
           </a:bodyPr>
           <a:lstStyle/>
@@ -13553,7 +13373,7 @@
           <a:noFill/>
         </p:spPr>
         <p:txBody>
-          <a:bodyPr wrap="square" lIns="0" rIns="0" tIns="0" bIns="0" anchor="t">
+          <a:bodyPr wrap="square" lIns="0" tIns="0" rIns="0" bIns="0" anchor="t">
             <a:spAutoFit/>
           </a:bodyPr>
           <a:lstStyle/>
@@ -13614,6 +13434,7 @@
           <a:lstStyle/>
           <a:p>
             <a:pPr algn="ctr"/>
+            <a:endParaRPr/>
           </a:p>
         </p:txBody>
       </p:sp>
@@ -13634,7 +13455,7 @@
           <a:noFill/>
         </p:spPr>
         <p:txBody>
-          <a:bodyPr wrap="square" lIns="0" rIns="0" tIns="0" bIns="0" anchor="t">
+          <a:bodyPr wrap="square" lIns="0" tIns="0" rIns="0" bIns="0" anchor="t">
             <a:spAutoFit/>
           </a:bodyPr>
           <a:lstStyle/>
@@ -13681,7 +13502,7 @@
           <a:noFill/>
         </p:spPr>
         <p:txBody>
-          <a:bodyPr wrap="square" lIns="0" rIns="0" tIns="0" bIns="0" anchor="t">
+          <a:bodyPr wrap="square" lIns="0" tIns="0" rIns="0" bIns="0" anchor="t">
             <a:spAutoFit/>
           </a:bodyPr>
           <a:lstStyle/>
@@ -13716,7 +13537,7 @@
           <a:noFill/>
         </p:spPr>
         <p:txBody>
-          <a:bodyPr wrap="square" lIns="0" rIns="0" tIns="0" bIns="0" anchor="t">
+          <a:bodyPr wrap="square" lIns="0" tIns="0" rIns="0" bIns="0" anchor="t">
             <a:spAutoFit/>
           </a:bodyPr>
           <a:lstStyle/>
@@ -14060,324 +13881,4 @@
   </a:objectDefaults>
   <a:extraClrSchemeLst/>
 </a:theme>
-</file>
-
-<file path=ppt/theme/theme2.xml><?xml version="1.0" encoding="utf-8"?>
-<a:theme xmlns:a="http://schemas.openxmlformats.org/drawingml/2006/main" name="Office Theme">
-  <a:themeElements>
-    <a:clrScheme name="Office">
-      <a:dk1>
-        <a:sysClr val="windowText" lastClr="000000"/>
-      </a:dk1>
-      <a:lt1>
-        <a:sysClr val="window" lastClr="FFFFFF"/>
-      </a:lt1>
-      <a:dk2>
-        <a:srgbClr val="1F497D"/>
-      </a:dk2>
-      <a:lt2>
-        <a:srgbClr val="EEECE1"/>
-      </a:lt2>
-      <a:accent1>
-        <a:srgbClr val="4F81BD"/>
-      </a:accent1>
-      <a:accent2>
-        <a:srgbClr val="C0504D"/>
-      </a:accent2>
-      <a:accent3>
-        <a:srgbClr val="9BBB59"/>
-      </a:accent3>
-      <a:accent4>
-        <a:srgbClr val="8064A2"/>
-      </a:accent4>
-      <a:accent5>
-        <a:srgbClr val="4BACC6"/>
-      </a:accent5>
-      <a:accent6>
-        <a:srgbClr val="F79646"/>
-      </a:accent6>
-      <a:hlink>
-        <a:srgbClr val="0000FF"/>
-      </a:hlink>
-      <a:folHlink>
-        <a:srgbClr val="800080"/>
-      </a:folHlink>
-    </a:clrScheme>
-    <a:fontScheme name="Office">
-      <a:majorFont>
-        <a:latin typeface="Calibri"/>
-        <a:ea typeface=""/>
-        <a:cs typeface=""/>
-        <a:font script="Jpan" typeface="ＭＳ Ｐゴシック"/>
-        <a:font script="Hang" typeface="맑은 고딕"/>
-        <a:font script="Hans" typeface="宋体"/>
-        <a:font script="Hant" typeface="新細明體"/>
-        <a:font script="Arab" typeface="Times New Roman"/>
-        <a:font script="Hebr" typeface="Times New Roman"/>
-        <a:font script="Thai" typeface="Angsana New"/>
-        <a:font script="Ethi" typeface="Nyala"/>
-        <a:font script="Beng" typeface="Vrinda"/>
-        <a:font script="Gujr" typeface="Shruti"/>
-        <a:font script="Khmr" typeface="MoolBoran"/>
-        <a:font script="Knda" typeface="Tunga"/>
-        <a:font script="Guru" typeface="Raavi"/>
-        <a:font script="Cans" typeface="Euphemia"/>
-        <a:font script="Cher" typeface="Plantagenet Cherokee"/>
-        <a:font script="Yiii" typeface="Microsoft Yi Baiti"/>
-        <a:font script="Tibt" typeface="Microsoft Himalaya"/>
-        <a:font script="Thaa" typeface="MV Boli"/>
-        <a:font script="Deva" typeface="Mangal"/>
-        <a:font script="Telu" typeface="Gautami"/>
-        <a:font script="Taml" typeface="Latha"/>
-        <a:font script="Syrc" typeface="Estrangelo Edessa"/>
-        <a:font script="Orya" typeface="Kalinga"/>
-        <a:font script="Mlym" typeface="Kartika"/>
-        <a:font script="Laoo" typeface="DokChampa"/>
-        <a:font script="Sinh" typeface="Iskoola Pota"/>
-        <a:font script="Mong" typeface="Mongolian Baiti"/>
-        <a:font script="Viet" typeface="Times New Roman"/>
-        <a:font script="Uigh" typeface="Microsoft Uighur"/>
-        <a:font script="Geor" typeface="Sylfaen"/>
-      </a:majorFont>
-      <a:minorFont>
-        <a:latin typeface="Calibri"/>
-        <a:ea typeface=""/>
-        <a:cs typeface=""/>
-        <a:font script="Jpan" typeface="ＭＳ Ｐゴシック"/>
-        <a:font script="Hang" typeface="맑은 고딕"/>
-        <a:font script="Hans" typeface="宋体"/>
-        <a:font script="Hant" typeface="新細明體"/>
-        <a:font script="Arab" typeface="Arial"/>
-        <a:font script="Hebr" typeface="Arial"/>
-        <a:font script="Thai" typeface="Cordia New"/>
-        <a:font script="Ethi" typeface="Nyala"/>
-        <a:font script="Beng" typeface="Vrinda"/>
-        <a:font script="Gujr" typeface="Shruti"/>
-        <a:font script="Khmr" typeface="DaunPenh"/>
-        <a:font script="Knda" typeface="Tunga"/>
-        <a:font script="Guru" typeface="Raavi"/>
-        <a:font script="Cans" typeface="Euphemia"/>
-        <a:font script="Cher" typeface="Plantagenet Cherokee"/>
-        <a:font script="Yiii" typeface="Microsoft Yi Baiti"/>
-        <a:font script="Tibt" typeface="Microsoft Himalaya"/>
-        <a:font script="Thaa" typeface="MV Boli"/>
-        <a:font script="Deva" typeface="Mangal"/>
-        <a:font script="Telu" typeface="Gautami"/>
-        <a:font script="Taml" typeface="Latha"/>
-        <a:font script="Syrc" typeface="Estrangelo Edessa"/>
-        <a:font script="Orya" typeface="Kalinga"/>
-        <a:font script="Mlym" typeface="Kartika"/>
-        <a:font script="Laoo" typeface="DokChampa"/>
-        <a:font script="Sinh" typeface="Iskoola Pota"/>
-        <a:font script="Mong" typeface="Mongolian Baiti"/>
-        <a:font script="Viet" typeface="Arial"/>
-        <a:font script="Uigh" typeface="Microsoft Uighur"/>
-        <a:font script="Geor" typeface="Sylfaen"/>
-      </a:minorFont>
-    </a:fontScheme>
-    <a:fmtScheme name="Office">
-      <a:fillStyleLst>
-        <a:solidFill>
-          <a:schemeClr val="phClr"/>
-        </a:solidFill>
-        <a:gradFill rotWithShape="1">
-          <a:gsLst>
-            <a:gs pos="0">
-              <a:schemeClr val="phClr">
-                <a:tint val="50000"/>
-                <a:satMod val="300000"/>
-              </a:schemeClr>
-            </a:gs>
-            <a:gs pos="35000">
-              <a:schemeClr val="phClr">
-                <a:tint val="37000"/>
-                <a:satMod val="300000"/>
-              </a:schemeClr>
-            </a:gs>
-            <a:gs pos="100000">
-              <a:schemeClr val="phClr">
-                <a:tint val="15000"/>
-                <a:satMod val="350000"/>
-              </a:schemeClr>
-            </a:gs>
-          </a:gsLst>
-          <a:lin ang="16200000" scaled="1"/>
-        </a:gradFill>
-        <a:gradFill rotWithShape="1">
-          <a:gsLst>
-            <a:gs pos="0">
-              <a:schemeClr val="phClr">
-                <a:tint val="100000"/>
-                <a:shade val="100000"/>
-                <a:satMod val="130000"/>
-              </a:schemeClr>
-            </a:gs>
-            <a:gs pos="100000">
-              <a:schemeClr val="phClr">
-                <a:tint val="50000"/>
-                <a:shade val="100000"/>
-                <a:satMod val="350000"/>
-              </a:schemeClr>
-            </a:gs>
-          </a:gsLst>
-          <a:lin ang="16200000" scaled="0"/>
-        </a:gradFill>
-      </a:fillStyleLst>
-      <a:lnStyleLst>
-        <a:ln w="9525" cap="flat" cmpd="sng" algn="ctr">
-          <a:solidFill>
-            <a:schemeClr val="phClr">
-              <a:shade val="95000"/>
-              <a:satMod val="105000"/>
-            </a:schemeClr>
-          </a:solidFill>
-          <a:prstDash val="solid"/>
-        </a:ln>
-        <a:ln w="25400" cap="flat" cmpd="sng" algn="ctr">
-          <a:solidFill>
-            <a:schemeClr val="phClr"/>
-          </a:solidFill>
-          <a:prstDash val="solid"/>
-        </a:ln>
-        <a:ln w="38100" cap="flat" cmpd="sng" algn="ctr">
-          <a:solidFill>
-            <a:schemeClr val="phClr"/>
-          </a:solidFill>
-          <a:prstDash val="solid"/>
-        </a:ln>
-      </a:lnStyleLst>
-      <a:effectStyleLst>
-        <a:effectStyle>
-          <a:effectLst>
-            <a:outerShdw blurRad="40000" dist="20000" dir="5400000" rotWithShape="0">
-              <a:srgbClr val="000000">
-                <a:alpha val="38000"/>
-              </a:srgbClr>
-            </a:outerShdw>
-          </a:effectLst>
-        </a:effectStyle>
-        <a:effectStyle>
-          <a:effectLst>
-            <a:outerShdw blurRad="40000" dist="23000" dir="5400000" rotWithShape="0">
-              <a:srgbClr val="000000">
-                <a:alpha val="35000"/>
-              </a:srgbClr>
-            </a:outerShdw>
-          </a:effectLst>
-        </a:effectStyle>
-        <a:effectStyle>
-          <a:effectLst>
-            <a:outerShdw blurRad="40000" dist="23000" dir="5400000" rotWithShape="0">
-              <a:srgbClr val="000000">
-                <a:alpha val="35000"/>
-              </a:srgbClr>
-            </a:outerShdw>
-          </a:effectLst>
-          <a:scene3d>
-            <a:camera prst="orthographicFront">
-              <a:rot lat="0" lon="0" rev="0"/>
-            </a:camera>
-            <a:lightRig rig="threePt" dir="t">
-              <a:rot lat="0" lon="0" rev="1200000"/>
-            </a:lightRig>
-          </a:scene3d>
-          <a:sp3d>
-            <a:bevelT w="63500" h="25400"/>
-          </a:sp3d>
-        </a:effectStyle>
-      </a:effectStyleLst>
-      <a:bgFillStyleLst>
-        <a:solidFill>
-          <a:schemeClr val="phClr"/>
-        </a:solidFill>
-        <a:gradFill rotWithShape="1">
-          <a:gsLst>
-            <a:gs pos="0">
-              <a:schemeClr val="phClr">
-                <a:tint val="40000"/>
-                <a:satMod val="350000"/>
-              </a:schemeClr>
-            </a:gs>
-            <a:gs pos="40000">
-              <a:schemeClr val="phClr">
-                <a:tint val="45000"/>
-                <a:shade val="99000"/>
-                <a:satMod val="350000"/>
-              </a:schemeClr>
-            </a:gs>
-            <a:gs pos="100000">
-              <a:schemeClr val="phClr">
-                <a:shade val="20000"/>
-                <a:satMod val="255000"/>
-              </a:schemeClr>
-            </a:gs>
-          </a:gsLst>
-          <a:path path="circle">
-            <a:fillToRect l="50000" t="-80000" r="50000" b="180000"/>
-          </a:path>
-        </a:gradFill>
-        <a:gradFill rotWithShape="1">
-          <a:gsLst>
-            <a:gs pos="0">
-              <a:schemeClr val="phClr">
-                <a:tint val="80000"/>
-                <a:satMod val="300000"/>
-              </a:schemeClr>
-            </a:gs>
-            <a:gs pos="100000">
-              <a:schemeClr val="phClr">
-                <a:shade val="30000"/>
-                <a:satMod val="200000"/>
-              </a:schemeClr>
-            </a:gs>
-          </a:gsLst>
-          <a:path path="circle">
-            <a:fillToRect l="50000" t="50000" r="50000" b="50000"/>
-          </a:path>
-        </a:gradFill>
-      </a:bgFillStyleLst>
-    </a:fmtScheme>
-  </a:themeElements>
-  <a:objectDefaults>
-    <a:spDef>
-      <a:spPr/>
-      <a:bodyPr/>
-      <a:lstStyle/>
-      <a:style>
-        <a:lnRef idx="1">
-          <a:schemeClr val="accent1"/>
-        </a:lnRef>
-        <a:fillRef idx="3">
-          <a:schemeClr val="accent1"/>
-        </a:fillRef>
-        <a:effectRef idx="2">
-          <a:schemeClr val="accent1"/>
-        </a:effectRef>
-        <a:fontRef idx="minor">
-          <a:schemeClr val="lt1"/>
-        </a:fontRef>
-      </a:style>
-    </a:spDef>
-    <a:lnDef>
-      <a:spPr/>
-      <a:bodyPr/>
-      <a:lstStyle/>
-      <a:style>
-        <a:lnRef idx="2">
-          <a:schemeClr val="accent1"/>
-        </a:lnRef>
-        <a:fillRef idx="0">
-          <a:schemeClr val="accent1"/>
-        </a:fillRef>
-        <a:effectRef idx="1">
-          <a:schemeClr val="accent1"/>
-        </a:effectRef>
-        <a:fontRef idx="minor">
-          <a:schemeClr val="tx1"/>
-        </a:fontRef>
-      </a:style>
-    </a:lnDef>
-  </a:objectDefaults>
-  <a:extraClrSchemeLst/>
-</a:theme>
 </file>